--- a/friday_aug_6/single-cell-bioinformatics-overview.pptx
+++ b/friday_aug_6/single-cell-bioinformatics-overview.pptx
@@ -35,6 +35,7 @@
     <p:sldId id="282" r:id="rId30"/>
     <p:sldId id="283" r:id="rId31"/>
     <p:sldId id="284" r:id="rId32"/>
+    <p:sldId id="285" r:id="rId33"/>
   </p:sldIdLst>
   <p:sldSz cx="12192000" cy="6858000"/>
   <p:notesSz cx="7772400" cy="10058400"/>
@@ -42,8 +43,8 @@
 </file>
 
 <file path=ppt/slideLayouts/slideLayout1.xml><?xml version="1.0" encoding="utf-8"?>
-<p:sldLayout xmlns:a="http://schemas.openxmlformats.org/drawingml/2006/main" xmlns:p="http://schemas.openxmlformats.org/presentationml/2006/main" xmlns:r="http://schemas.openxmlformats.org/officeDocument/2006/relationships" xmlns:p14="http://schemas.microsoft.com/office/powerpoint/2010/main" xmlns:p15="http://schemas.microsoft.com/office/powerpoint/2012/main" xmlns:mc="http://schemas.openxmlformats.org/markup-compatibility/2006" type="blank" preserve="1">
-  <p:cSld name="Section Header">
+<p:sldLayout xmlns:a="http://schemas.openxmlformats.org/drawingml/2006/main" xmlns:p="http://schemas.openxmlformats.org/presentationml/2006/main" xmlns:r="http://schemas.openxmlformats.org/officeDocument/2006/relationships" xmlns:p14="http://schemas.microsoft.com/office/powerpoint/2010/main" xmlns:p15="http://schemas.microsoft.com/office/powerpoint/2012/main" xmlns:mc="http://schemas.openxmlformats.org/markup-compatibility/2006" type="vertTx" preserve="1">
+  <p:cSld name="Title and Vertical Text">
     <p:bg>
       <p:bgPr>
         <a:solidFill>
@@ -77,8 +78,8 @@
         </p:nvSpPr>
         <p:spPr>
           <a:xfrm>
-            <a:off x="722160" y="4406760"/>
-            <a:ext cx="7769880" cy="1359720"/>
+            <a:off x="457200" y="274680"/>
+            <a:ext cx="8226720" cy="1140120"/>
           </a:xfrm>
           <a:prstGeom prst="rect">
             <a:avLst/>
@@ -89,11 +90,11 @@
           </a:ln>
         </p:spPr>
         <p:txBody>
-          <a:bodyPr lIns="91440" tIns="45720" rIns="91440" bIns="45720" anchor="t">
+          <a:bodyPr lIns="91440" tIns="45720" rIns="91440" bIns="45720" anchor="ctr">
             <a:noAutofit/>
           </a:bodyPr>
           <a:lstStyle>
-            <a:lvl1pPr indent="0" algn="l" defTabSz="457200">
+            <a:lvl1pPr indent="0" algn="ctr" defTabSz="457200">
               <a:lnSpc>
                 <a:spcPct val="100000"/>
               </a:lnSpc>
@@ -101,7 +102,7 @@
               <a:tabLst>
                 <a:tab pos="0" algn="l"/>
               </a:tabLst>
-              <a:defRPr lang="en-US" sz="4000" b="1" u="none" strike="noStrike" cap="all">
+              <a:defRPr lang="en-US" sz="4400" b="0" u="none" strike="noStrike">
                 <a:solidFill>
                   <a:schemeClr val="dk1"/>
                 </a:solidFill>
@@ -112,7 +113,7 @@
             </a:lvl1pPr>
           </a:lstStyle>
           <a:p>
-            <a:pPr indent="0" algn="l" defTabSz="457200">
+            <a:pPr indent="0" algn="ctr" defTabSz="457200">
               <a:lnSpc>
                 <a:spcPct val="100000"/>
               </a:lnSpc>
@@ -122,7 +123,7 @@
               </a:tabLst>
             </a:pPr>
             <a:r>
-              <a:rPr lang="en-US" sz="4000" b="1" u="none" strike="noStrike" cap="all">
+              <a:rPr lang="en-US" sz="4400" b="0" u="none" strike="noStrike">
                 <a:solidFill>
                   <a:schemeClr val="dk1"/>
                 </a:solidFill>
@@ -132,7 +133,7 @@
               </a:rPr>
               <a:t>Click to edit Master title style</a:t>
             </a:r>
-            <a:endParaRPr lang="en-US" sz="4000" b="1" u="none" strike="noStrike" cap="all">
+            <a:endParaRPr lang="en-US" sz="4400" b="0" u="none" strike="noStrike">
               <a:solidFill>
                 <a:schemeClr val="dk1"/>
               </a:solidFill>
@@ -155,8 +156,8 @@
         </p:nvSpPr>
         <p:spPr>
           <a:xfrm>
-            <a:off x="722160" y="2906640"/>
-            <a:ext cx="7769880" cy="1497600"/>
+            <a:off x="457200" y="1600200"/>
+            <a:ext cx="8226720" cy="4523040"/>
           </a:xfrm>
           <a:prstGeom prst="rect">
             <a:avLst/>
@@ -167,64 +168,280 @@
           </a:ln>
         </p:spPr>
         <p:txBody>
-          <a:bodyPr lIns="91440" tIns="45720" rIns="91440" bIns="45720" anchor="b">
+          <a:bodyPr lIns="91440" tIns="45720" rIns="91440" bIns="45720" anchor="t" vert="eaVert">
             <a:noAutofit/>
           </a:bodyPr>
           <a:lstStyle>
-            <a:lvl1pPr indent="0" algn="l" defTabSz="457200">
+            <a:lvl1pPr algn="l" defTabSz="457200">
+              <a:lnSpc>
+                <a:spcPct val="100000"/>
+              </a:lnSpc>
+              <a:spcBef>
+                <a:spcPts val="641"/>
+              </a:spcBef>
+              <a:buClr>
+                <a:srgbClr val="000000"/>
+              </a:buClr>
+              <a:buFont typeface="Arial"/>
+              <a:buChar char="•"/>
+              <a:defRPr lang="en-US" sz="3200" b="0" u="none" strike="noStrike">
+                <a:solidFill>
+                  <a:schemeClr val="dk1"/>
+                </a:solidFill>
+                <a:effectLst/>
+                <a:uFillTx/>
+                <a:latin typeface="Calibri"/>
+              </a:defRPr>
+            </a:lvl1pPr>
+            <a:lvl2pPr lvl="1" algn="l" defTabSz="457200">
+              <a:lnSpc>
+                <a:spcPct val="100000"/>
+              </a:lnSpc>
+              <a:spcBef>
+                <a:spcPts val="561"/>
+              </a:spcBef>
+              <a:buClr>
+                <a:srgbClr val="000000"/>
+              </a:buClr>
+              <a:buFont typeface="Arial"/>
+              <a:buChar char="–"/>
+              <a:defRPr lang="en-US" sz="2800" b="0" u="none" strike="noStrike">
+                <a:solidFill>
+                  <a:schemeClr val="dk1"/>
+                </a:solidFill>
+                <a:effectLst/>
+                <a:uFillTx/>
+                <a:latin typeface="Calibri"/>
+              </a:defRPr>
+            </a:lvl2pPr>
+            <a:lvl3pPr lvl="2" algn="l" defTabSz="457200">
+              <a:lnSpc>
+                <a:spcPct val="100000"/>
+              </a:lnSpc>
+              <a:spcBef>
+                <a:spcPts val="479"/>
+              </a:spcBef>
+              <a:buClr>
+                <a:srgbClr val="000000"/>
+              </a:buClr>
+              <a:buFont typeface="Arial"/>
+              <a:buChar char="•"/>
+              <a:defRPr lang="en-US" sz="2400" b="0" u="none" strike="noStrike">
+                <a:solidFill>
+                  <a:schemeClr val="dk1"/>
+                </a:solidFill>
+                <a:effectLst/>
+                <a:uFillTx/>
+                <a:latin typeface="Calibri"/>
+              </a:defRPr>
+            </a:lvl3pPr>
+            <a:lvl4pPr lvl="3" algn="l" defTabSz="457200">
               <a:lnSpc>
                 <a:spcPct val="100000"/>
               </a:lnSpc>
               <a:spcBef>
                 <a:spcPts val="400"/>
               </a:spcBef>
-              <a:buNone/>
-              <a:tabLst>
-                <a:tab pos="0" algn="l"/>
-              </a:tabLst>
+              <a:buClr>
+                <a:srgbClr val="000000"/>
+              </a:buClr>
+              <a:buFont typeface="Arial"/>
+              <a:buChar char="–"/>
               <a:defRPr lang="en-US" sz="2000" b="0" u="none" strike="noStrike">
                 <a:solidFill>
-                  <a:schemeClr val="dk1">
-                    <a:tint val="75000"/>
-                  </a:schemeClr>
+                  <a:schemeClr val="dk1"/>
                 </a:solidFill>
                 <a:effectLst/>
                 <a:uFillTx/>
                 <a:latin typeface="Calibri"/>
               </a:defRPr>
-            </a:lvl1pPr>
-          </a:lstStyle>
-          <a:p>
-            <a:pPr indent="0" algn="l" defTabSz="457200">
+            </a:lvl4pPr>
+            <a:lvl5pPr lvl="4" algn="l" defTabSz="457200">
               <a:lnSpc>
                 <a:spcPct val="100000"/>
               </a:lnSpc>
               <a:spcBef>
                 <a:spcPts val="400"/>
               </a:spcBef>
-              <a:buNone/>
-              <a:tabLst>
-                <a:tab pos="0" algn="l"/>
-              </a:tabLst>
+              <a:buClr>
+                <a:srgbClr val="000000"/>
+              </a:buClr>
+              <a:buFont typeface="Arial"/>
+              <a:buChar char="»"/>
+              <a:defRPr lang="en-US" sz="2000" b="0" u="none" strike="noStrike">
+                <a:solidFill>
+                  <a:schemeClr val="dk1"/>
+                </a:solidFill>
+                <a:effectLst/>
+                <a:uFillTx/>
+                <a:latin typeface="Calibri"/>
+              </a:defRPr>
+            </a:lvl5pPr>
+          </a:lstStyle>
+          <a:p>
+            <a:pPr marL="343080" indent="-343080" algn="l" defTabSz="457200">
+              <a:lnSpc>
+                <a:spcPct val="100000"/>
+              </a:lnSpc>
+              <a:spcBef>
+                <a:spcPts val="641"/>
+              </a:spcBef>
+              <a:buClr>
+                <a:srgbClr val="000000"/>
+              </a:buClr>
+              <a:buFont typeface="Arial"/>
+              <a:buChar char="•"/>
+            </a:pPr>
+            <a:r>
+              <a:rPr lang="en-US" sz="3200" b="0" u="none" strike="noStrike">
+                <a:solidFill>
+                  <a:schemeClr val="dk1"/>
+                </a:solidFill>
+                <a:effectLst/>
+                <a:uFillTx/>
+                <a:latin typeface="Calibri"/>
+              </a:rPr>
+              <a:t>Click to edit Master text styles</a:t>
+            </a:r>
+            <a:endParaRPr lang="en-US" sz="3200" b="0" u="none" strike="noStrike">
+              <a:solidFill>
+                <a:schemeClr val="dk1"/>
+              </a:solidFill>
+              <a:effectLst/>
+              <a:uFillTx/>
+              <a:latin typeface="Calibri"/>
+            </a:endParaRPr>
+          </a:p>
+          <a:p>
+            <a:pPr marL="743040" lvl="1" indent="-285840" algn="l" defTabSz="457200">
+              <a:lnSpc>
+                <a:spcPct val="100000"/>
+              </a:lnSpc>
+              <a:spcBef>
+                <a:spcPts val="561"/>
+              </a:spcBef>
+              <a:buClr>
+                <a:srgbClr val="000000"/>
+              </a:buClr>
+              <a:buFont typeface="Arial"/>
+              <a:buChar char="–"/>
+            </a:pPr>
+            <a:r>
+              <a:rPr lang="en-US" sz="2800" b="0" u="none" strike="noStrike">
+                <a:solidFill>
+                  <a:schemeClr val="dk1"/>
+                </a:solidFill>
+                <a:effectLst/>
+                <a:uFillTx/>
+                <a:latin typeface="Calibri"/>
+              </a:rPr>
+              <a:t>Second level</a:t>
+            </a:r>
+            <a:endParaRPr lang="en-US" sz="2800" b="0" u="none" strike="noStrike">
+              <a:solidFill>
+                <a:schemeClr val="dk1"/>
+              </a:solidFill>
+              <a:effectLst/>
+              <a:uFillTx/>
+              <a:latin typeface="Calibri"/>
+            </a:endParaRPr>
+          </a:p>
+          <a:p>
+            <a:pPr marL="1143000" lvl="2" indent="-228600" algn="l" defTabSz="457200">
+              <a:lnSpc>
+                <a:spcPct val="100000"/>
+              </a:lnSpc>
+              <a:spcBef>
+                <a:spcPts val="479"/>
+              </a:spcBef>
+              <a:buClr>
+                <a:srgbClr val="000000"/>
+              </a:buClr>
+              <a:buFont typeface="Arial"/>
+              <a:buChar char="•"/>
+            </a:pPr>
+            <a:r>
+              <a:rPr lang="en-US" sz="2400" b="0" u="none" strike="noStrike">
+                <a:solidFill>
+                  <a:schemeClr val="dk1"/>
+                </a:solidFill>
+                <a:effectLst/>
+                <a:uFillTx/>
+                <a:latin typeface="Calibri"/>
+              </a:rPr>
+              <a:t>Third level</a:t>
+            </a:r>
+            <a:endParaRPr lang="en-US" sz="2400" b="0" u="none" strike="noStrike">
+              <a:solidFill>
+                <a:schemeClr val="dk1"/>
+              </a:solidFill>
+              <a:effectLst/>
+              <a:uFillTx/>
+              <a:latin typeface="Calibri"/>
+            </a:endParaRPr>
+          </a:p>
+          <a:p>
+            <a:pPr marL="1600200" lvl="3" indent="-228600" algn="l" defTabSz="457200">
+              <a:lnSpc>
+                <a:spcPct val="100000"/>
+              </a:lnSpc>
+              <a:spcBef>
+                <a:spcPts val="400"/>
+              </a:spcBef>
+              <a:buClr>
+                <a:srgbClr val="000000"/>
+              </a:buClr>
+              <a:buFont typeface="Arial"/>
+              <a:buChar char="–"/>
             </a:pPr>
             <a:r>
               <a:rPr lang="en-US" sz="2000" b="0" u="none" strike="noStrike">
                 <a:solidFill>
-                  <a:schemeClr val="dk1">
-                    <a:tint val="75000"/>
-                  </a:schemeClr>
-                </a:solidFill>
-                <a:effectLst/>
-                <a:uFillTx/>
-                <a:latin typeface="Calibri"/>
-              </a:rPr>
-              <a:t>Click to edit Master text styles</a:t>
-            </a:r>
-            <a:endParaRPr lang="en-US" sz="2000" b="0" u="none" strike="noStrike">
-              <a:solidFill>
-                <a:schemeClr val="dk1">
-                  <a:tint val="75000"/>
-                </a:schemeClr>
+                  <a:schemeClr val="dk1"/>
+                </a:solidFill>
+                <a:effectLst/>
+                <a:uFillTx/>
+                <a:latin typeface="Calibri"/>
+              </a:rPr>
+              <a:t>Fourth level</a:t>
+            </a:r>
+            <a:endParaRPr lang="en-US" sz="2000" b="0" u="none" strike="noStrike">
+              <a:solidFill>
+                <a:schemeClr val="dk1"/>
+              </a:solidFill>
+              <a:effectLst/>
+              <a:uFillTx/>
+              <a:latin typeface="Calibri"/>
+            </a:endParaRPr>
+          </a:p>
+          <a:p>
+            <a:pPr marL="2057400" lvl="4" indent="-228600" algn="l" defTabSz="457200">
+              <a:lnSpc>
+                <a:spcPct val="100000"/>
+              </a:lnSpc>
+              <a:spcBef>
+                <a:spcPts val="400"/>
+              </a:spcBef>
+              <a:buClr>
+                <a:srgbClr val="000000"/>
+              </a:buClr>
+              <a:buFont typeface="Arial"/>
+              <a:buChar char="»"/>
+            </a:pPr>
+            <a:r>
+              <a:rPr lang="en-US" sz="2000" b="0" u="none" strike="noStrike">
+                <a:solidFill>
+                  <a:schemeClr val="dk1"/>
+                </a:solidFill>
+                <a:effectLst/>
+                <a:uFillTx/>
+                <a:latin typeface="Calibri"/>
+              </a:rPr>
+              <a:t>Fifth level</a:t>
+            </a:r>
+            <a:endParaRPr lang="en-US" sz="2000" b="0" u="none" strike="noStrike">
+              <a:solidFill>
+                <a:schemeClr val="dk1"/>
               </a:solidFill>
               <a:effectLst/>
               <a:uFillTx/>
@@ -246,7 +463,7 @@
         <p:spPr>
           <a:xfrm>
             <a:off x="457200" y="6356520"/>
-            <a:ext cx="2131200" cy="362520"/>
+            <a:ext cx="2130840" cy="362160"/>
           </a:xfrm>
           <a:prstGeom prst="rect">
             <a:avLst/>
@@ -302,7 +519,7 @@
                 <a:uFillTx/>
                 <a:latin typeface="Calibri"/>
               </a:rPr>
-              <a:t>&lt;date/time&gt;</a:t>
+              <a:t> </a:t>
             </a:r>
             <a:endParaRPr lang="en-US" sz="1200" b="0" u="none" strike="noStrike">
               <a:solidFill>
@@ -328,7 +545,7 @@
         <p:spPr>
           <a:xfrm>
             <a:off x="3124080" y="6356520"/>
-            <a:ext cx="2892960" cy="362520"/>
+            <a:ext cx="2892600" cy="362160"/>
           </a:xfrm>
           <a:prstGeom prst="rect">
             <a:avLst/>
@@ -380,7 +597,7 @@
                 <a:uFillTx/>
                 <a:latin typeface="Times New Roman"/>
               </a:rPr>
-              <a:t>&lt;footer&gt;</a:t>
+              <a:t> </a:t>
             </a:r>
             <a:endParaRPr lang="en-US" sz="1400" b="0" u="none" strike="noStrike">
               <a:solidFill>
@@ -406,7 +623,7 @@
         <p:spPr>
           <a:xfrm>
             <a:off x="6553080" y="6356520"/>
-            <a:ext cx="2131200" cy="362520"/>
+            <a:ext cx="2130840" cy="362160"/>
           </a:xfrm>
           <a:prstGeom prst="rect">
             <a:avLst/>
@@ -451,7 +668,7 @@
                 <a:tab pos="0" algn="l"/>
               </a:tabLst>
             </a:pPr>
-            <a:fld id="{60397ACD-4986-4D56-87D4-0FEC266D8450}" type="slidenum">
+            <a:fld id="{993D9234-CB38-4F92-AD03-C7D180CA9722}" type="slidenum">
               <a:rPr lang="en-US" sz="1200" b="0" u="none" strike="noStrike">
                 <a:solidFill>
                   <a:schemeClr val="dk1">
@@ -462,7 +679,7 @@
                 <a:uFillTx/>
                 <a:latin typeface="Calibri"/>
               </a:rPr>
-              <a:t>&lt;number&gt;</a:t>
+              <a:t>1</a:t>
             </a:fld>
             <a:endParaRPr lang="en-US" sz="1200" b="0" u="none" strike="noStrike">
               <a:solidFill>
@@ -481,8 +698,8 @@
 </file>
 
 <file path=ppt/slideLayouts/slideLayout10.xml><?xml version="1.0" encoding="utf-8"?>
-<p:sldLayout xmlns:a="http://schemas.openxmlformats.org/drawingml/2006/main" xmlns:p="http://schemas.openxmlformats.org/presentationml/2006/main" xmlns:r="http://schemas.openxmlformats.org/officeDocument/2006/relationships" xmlns:p14="http://schemas.microsoft.com/office/powerpoint/2010/main" xmlns:p15="http://schemas.microsoft.com/office/powerpoint/2012/main" xmlns:mc="http://schemas.openxmlformats.org/markup-compatibility/2006" type="vertTitleAndTx" preserve="1">
-  <p:cSld name="Vertical Title and Text">
+<p:sldLayout xmlns:a="http://schemas.openxmlformats.org/drawingml/2006/main" xmlns:p="http://schemas.openxmlformats.org/presentationml/2006/main" xmlns:r="http://schemas.openxmlformats.org/officeDocument/2006/relationships" xmlns:p14="http://schemas.microsoft.com/office/powerpoint/2010/main" xmlns:p15="http://schemas.microsoft.com/office/powerpoint/2012/main" xmlns:mc="http://schemas.openxmlformats.org/markup-compatibility/2006" type="blank" preserve="1">
+  <p:cSld name="Picture with Caption">
     <p:bg>
       <p:bgPr>
         <a:solidFill>
@@ -516,8 +733,8 @@
         </p:nvSpPr>
         <p:spPr>
           <a:xfrm>
-            <a:off x="6629400" y="274680"/>
-            <a:ext cx="2054880" cy="5848920"/>
+            <a:off x="1792440" y="4800600"/>
+            <a:ext cx="5483520" cy="563760"/>
           </a:xfrm>
           <a:prstGeom prst="rect">
             <a:avLst/>
@@ -528,11 +745,11 @@
           </a:ln>
         </p:spPr>
         <p:txBody>
-          <a:bodyPr lIns="91440" tIns="45720" rIns="91440" bIns="45720" anchor="ctr" vert="eaVert">
+          <a:bodyPr lIns="91440" tIns="45720" rIns="91440" bIns="45720" anchor="b">
             <a:noAutofit/>
           </a:bodyPr>
           <a:lstStyle>
-            <a:lvl1pPr indent="0" algn="ctr" defTabSz="457200">
+            <a:lvl1pPr indent="0" algn="l" defTabSz="457200">
               <a:lnSpc>
                 <a:spcPct val="100000"/>
               </a:lnSpc>
@@ -540,7 +757,7 @@
               <a:tabLst>
                 <a:tab pos="0" algn="l"/>
               </a:tabLst>
-              <a:defRPr lang="en-US" sz="4400" b="0" u="none" strike="noStrike">
+              <a:defRPr lang="en-US" sz="2000" b="1" u="none" strike="noStrike">
                 <a:solidFill>
                   <a:schemeClr val="dk1"/>
                 </a:solidFill>
@@ -551,7 +768,7 @@
             </a:lvl1pPr>
           </a:lstStyle>
           <a:p>
-            <a:pPr indent="0" algn="ctr" defTabSz="457200">
+            <a:pPr indent="0" algn="l" defTabSz="457200">
               <a:lnSpc>
                 <a:spcPct val="100000"/>
               </a:lnSpc>
@@ -561,7 +778,7 @@
               </a:tabLst>
             </a:pPr>
             <a:r>
-              <a:rPr lang="en-US" sz="4400" b="0" u="none" strike="noStrike">
+              <a:rPr lang="en-US" sz="2000" b="1" u="none" strike="noStrike">
                 <a:solidFill>
                   <a:schemeClr val="dk1"/>
                 </a:solidFill>
@@ -571,7 +788,7 @@
               </a:rPr>
               <a:t>Click to edit Master title style</a:t>
             </a:r>
-            <a:endParaRPr lang="en-US" sz="4400" b="0" u="none" strike="noStrike">
+            <a:endParaRPr lang="en-US" sz="2000" b="1" u="none" strike="noStrike">
               <a:solidFill>
                 <a:schemeClr val="dk1"/>
               </a:solidFill>
@@ -594,8 +811,8 @@
         </p:nvSpPr>
         <p:spPr>
           <a:xfrm>
-            <a:off x="457200" y="274680"/>
-            <a:ext cx="6017400" cy="5848920"/>
+            <a:off x="1792440" y="612720"/>
+            <a:ext cx="5483520" cy="4111920"/>
           </a:xfrm>
           <a:prstGeom prst="rect">
             <a:avLst/>
@@ -606,7 +823,7 @@
           </a:ln>
         </p:spPr>
         <p:txBody>
-          <a:bodyPr lIns="91440" tIns="45720" rIns="91440" bIns="45720" anchor="t" vert="eaVert">
+          <a:bodyPr lIns="90000" tIns="45000" rIns="90000" bIns="45000" anchor="t">
             <a:noAutofit/>
           </a:bodyPr>
           <a:lstStyle>
@@ -615,13 +832,16 @@
                 <a:spcPct val="100000"/>
               </a:lnSpc>
               <a:spcBef>
-                <a:spcPts val="641"/>
+                <a:spcPts val="281"/>
               </a:spcBef>
               <a:buClr>
                 <a:srgbClr val="000000"/>
               </a:buClr>
               <a:buFont typeface="Arial"/>
               <a:buChar char="•"/>
+              <a:tabLst>
+                <a:tab pos="0" algn="l"/>
+              </a:tabLst>
               <a:defRPr lang="en-US" sz="3200" b="0" u="none" strike="noStrike">
                 <a:solidFill>
                   <a:schemeClr val="dk1"/>
@@ -641,9 +861,13 @@
               <a:buClr>
                 <a:srgbClr val="000000"/>
               </a:buClr>
-              <a:buFont typeface="Arial"/>
-              <a:buChar char="–"/>
-              <a:defRPr lang="en-US" sz="2800" b="0" u="none" strike="noStrike">
+              <a:buSzPct val="75000"/>
+              <a:buFont typeface="Symbol" charset="2"/>
+              <a:buChar char=""/>
+              <a:tabLst>
+                <a:tab pos="0" algn="l"/>
+              </a:tabLst>
+              <a:defRPr lang="en-US" sz="3200" b="0" u="none" strike="noStrike">
                 <a:solidFill>
                   <a:schemeClr val="dk1"/>
                 </a:solidFill>
@@ -662,9 +886,13 @@
               <a:buClr>
                 <a:srgbClr val="000000"/>
               </a:buClr>
-              <a:buFont typeface="Arial"/>
-              <a:buChar char="•"/>
-              <a:defRPr lang="en-US" sz="2400" b="0" u="none" strike="noStrike">
+              <a:buSzPct val="45000"/>
+              <a:buFont typeface="Wingdings" charset="2"/>
+              <a:buChar char=""/>
+              <a:tabLst>
+                <a:tab pos="0" algn="l"/>
+              </a:tabLst>
+              <a:defRPr lang="en-US" sz="3200" b="0" u="none" strike="noStrike">
                 <a:solidFill>
                   <a:schemeClr val="dk1"/>
                 </a:solidFill>
@@ -683,9 +911,13 @@
               <a:buClr>
                 <a:srgbClr val="000000"/>
               </a:buClr>
-              <a:buFont typeface="Arial"/>
-              <a:buChar char="–"/>
-              <a:defRPr lang="en-US" sz="2000" b="0" u="none" strike="noStrike">
+              <a:buSzPct val="75000"/>
+              <a:buFont typeface="Symbol" charset="2"/>
+              <a:buChar char=""/>
+              <a:tabLst>
+                <a:tab pos="0" algn="l"/>
+              </a:tabLst>
+              <a:defRPr lang="en-US" sz="3200" b="0" u="none" strike="noStrike">
                 <a:solidFill>
                   <a:schemeClr val="dk1"/>
                 </a:solidFill>
@@ -704,9 +936,13 @@
               <a:buClr>
                 <a:srgbClr val="000000"/>
               </a:buClr>
-              <a:buFont typeface="Arial"/>
-              <a:buChar char="»"/>
-              <a:defRPr lang="en-US" sz="2000" b="0" u="none" strike="noStrike">
+              <a:buSzPct val="45000"/>
+              <a:buFont typeface="Wingdings" charset="2"/>
+              <a:buChar char=""/>
+              <a:tabLst>
+                <a:tab pos="0" algn="l"/>
+              </a:tabLst>
+              <a:defRPr lang="en-US" sz="3200" b="0" u="none" strike="noStrike">
                 <a:solidFill>
                   <a:schemeClr val="dk1"/>
                 </a:solidFill>
@@ -715,20 +951,73 @@
                 <a:latin typeface="Calibri"/>
               </a:defRPr>
             </a:lvl5pPr>
+            <a:lvl6pPr lvl="5" algn="l" defTabSz="457200">
+              <a:lnSpc>
+                <a:spcPct val="100000"/>
+              </a:lnSpc>
+              <a:spcBef>
+                <a:spcPts val="283"/>
+              </a:spcBef>
+              <a:buClr>
+                <a:srgbClr val="000000"/>
+              </a:buClr>
+              <a:buSzPct val="45000"/>
+              <a:buFont typeface="Wingdings" charset="2"/>
+              <a:buChar char=""/>
+              <a:tabLst>
+                <a:tab pos="0" algn="l"/>
+              </a:tabLst>
+              <a:defRPr lang="en-US" sz="3200" b="0" u="none" strike="noStrike">
+                <a:solidFill>
+                  <a:schemeClr val="dk1"/>
+                </a:solidFill>
+                <a:effectLst/>
+                <a:uFillTx/>
+                <a:latin typeface="Calibri"/>
+              </a:defRPr>
+            </a:lvl6pPr>
+            <a:lvl7pPr lvl="6" algn="l" defTabSz="457200">
+              <a:lnSpc>
+                <a:spcPct val="100000"/>
+              </a:lnSpc>
+              <a:spcBef>
+                <a:spcPts val="283"/>
+              </a:spcBef>
+              <a:buClr>
+                <a:srgbClr val="000000"/>
+              </a:buClr>
+              <a:buSzPct val="45000"/>
+              <a:buFont typeface="Wingdings" charset="2"/>
+              <a:buChar char=""/>
+              <a:tabLst>
+                <a:tab pos="0" algn="l"/>
+              </a:tabLst>
+              <a:defRPr lang="en-US" sz="3200" b="0" u="none" strike="noStrike">
+                <a:solidFill>
+                  <a:schemeClr val="dk1"/>
+                </a:solidFill>
+                <a:effectLst/>
+                <a:uFillTx/>
+                <a:latin typeface="Calibri"/>
+              </a:defRPr>
+            </a:lvl7pPr>
           </a:lstStyle>
           <a:p>
-            <a:pPr marL="343080" indent="-343080" algn="l" defTabSz="457200">
+            <a:pPr marL="432000" indent="-324000" algn="l" defTabSz="457200">
               <a:lnSpc>
                 <a:spcPct val="100000"/>
               </a:lnSpc>
               <a:spcBef>
-                <a:spcPts val="641"/>
+                <a:spcPts val="281"/>
               </a:spcBef>
               <a:buClr>
                 <a:srgbClr val="000000"/>
               </a:buClr>
               <a:buFont typeface="Arial"/>
               <a:buChar char="•"/>
+              <a:tabLst>
+                <a:tab pos="0" algn="l"/>
+              </a:tabLst>
             </a:pPr>
             <a:r>
               <a:rPr lang="en-US" sz="3200" b="0" u="none" strike="noStrike">
@@ -739,7 +1028,7 @@
                 <a:uFillTx/>
                 <a:latin typeface="Calibri"/>
               </a:rPr>
-              <a:t>Click to edit Master text styles</a:t>
+              <a:t>Click to edit the outline text format</a:t>
             </a:r>
             <a:endParaRPr lang="en-US" sz="3200" b="0" u="none" strike="noStrike">
               <a:solidFill>
@@ -751,7 +1040,7 @@
             </a:endParaRPr>
           </a:p>
           <a:p>
-            <a:pPr marL="743040" lvl="1" indent="-285840" algn="l" defTabSz="457200">
+            <a:pPr marL="457200" lvl="1" indent="-324000" algn="l" defTabSz="457200">
               <a:lnSpc>
                 <a:spcPct val="100000"/>
               </a:lnSpc>
@@ -761,11 +1050,15 @@
               <a:buClr>
                 <a:srgbClr val="000000"/>
               </a:buClr>
-              <a:buFont typeface="Arial"/>
-              <a:buChar char="–"/>
-            </a:pPr>
-            <a:r>
-              <a:rPr lang="en-US" sz="2800" b="0" u="none" strike="noStrike">
+              <a:buSzPct val="75000"/>
+              <a:buFont typeface="Symbol" charset="2"/>
+              <a:buChar char=""/>
+              <a:tabLst>
+                <a:tab pos="0" algn="l"/>
+              </a:tabLst>
+            </a:pPr>
+            <a:r>
+              <a:rPr lang="en-US" sz="3200" b="0" u="none" strike="noStrike">
                 <a:solidFill>
                   <a:schemeClr val="dk1"/>
                 </a:solidFill>
@@ -773,9 +1066,9 @@
                 <a:uFillTx/>
                 <a:latin typeface="Calibri"/>
               </a:rPr>
-              <a:t>Second level</a:t>
-            </a:r>
-            <a:endParaRPr lang="en-US" sz="2800" b="0" u="none" strike="noStrike">
+              <a:t>Second Outline Level</a:t>
+            </a:r>
+            <a:endParaRPr lang="en-US" sz="3200" b="0" u="none" strike="noStrike">
               <a:solidFill>
                 <a:schemeClr val="dk1"/>
               </a:solidFill>
@@ -785,7 +1078,7 @@
             </a:endParaRPr>
           </a:p>
           <a:p>
-            <a:pPr marL="1143000" lvl="2" indent="-228600" algn="l" defTabSz="457200">
+            <a:pPr marL="914400" lvl="2" indent="-288000" algn="l" defTabSz="457200">
               <a:lnSpc>
                 <a:spcPct val="100000"/>
               </a:lnSpc>
@@ -795,11 +1088,15 @@
               <a:buClr>
                 <a:srgbClr val="000000"/>
               </a:buClr>
-              <a:buFont typeface="Arial"/>
-              <a:buChar char="•"/>
-            </a:pPr>
-            <a:r>
-              <a:rPr lang="en-US" sz="2400" b="0" u="none" strike="noStrike">
+              <a:buSzPct val="45000"/>
+              <a:buFont typeface="Wingdings" charset="2"/>
+              <a:buChar char=""/>
+              <a:tabLst>
+                <a:tab pos="0" algn="l"/>
+              </a:tabLst>
+            </a:pPr>
+            <a:r>
+              <a:rPr lang="en-US" sz="3200" b="0" u="none" strike="noStrike">
                 <a:solidFill>
                   <a:schemeClr val="dk1"/>
                 </a:solidFill>
@@ -807,9 +1104,9 @@
                 <a:uFillTx/>
                 <a:latin typeface="Calibri"/>
               </a:rPr>
-              <a:t>Third level</a:t>
-            </a:r>
-            <a:endParaRPr lang="en-US" sz="2400" b="0" u="none" strike="noStrike">
+              <a:t>Third Outline Level</a:t>
+            </a:r>
+            <a:endParaRPr lang="en-US" sz="3200" b="0" u="none" strike="noStrike">
               <a:solidFill>
                 <a:schemeClr val="dk1"/>
               </a:solidFill>
@@ -819,7 +1116,7 @@
             </a:endParaRPr>
           </a:p>
           <a:p>
-            <a:pPr marL="1600200" lvl="3" indent="-228600" algn="l" defTabSz="457200">
+            <a:pPr marL="1371600" lvl="3" indent="-216000" algn="l" defTabSz="457200">
               <a:lnSpc>
                 <a:spcPct val="100000"/>
               </a:lnSpc>
@@ -829,11 +1126,15 @@
               <a:buClr>
                 <a:srgbClr val="000000"/>
               </a:buClr>
-              <a:buFont typeface="Arial"/>
-              <a:buChar char="–"/>
-            </a:pPr>
-            <a:r>
-              <a:rPr lang="en-US" sz="2000" b="0" u="none" strike="noStrike">
+              <a:buSzPct val="75000"/>
+              <a:buFont typeface="Symbol" charset="2"/>
+              <a:buChar char=""/>
+              <a:tabLst>
+                <a:tab pos="0" algn="l"/>
+              </a:tabLst>
+            </a:pPr>
+            <a:r>
+              <a:rPr lang="en-US" sz="3200" b="0" u="none" strike="noStrike">
                 <a:solidFill>
                   <a:schemeClr val="dk1"/>
                 </a:solidFill>
@@ -841,9 +1142,9 @@
                 <a:uFillTx/>
                 <a:latin typeface="Calibri"/>
               </a:rPr>
-              <a:t>Fourth level</a:t>
-            </a:r>
-            <a:endParaRPr lang="en-US" sz="2000" b="0" u="none" strike="noStrike">
+              <a:t>Fourth Outline Level</a:t>
+            </a:r>
+            <a:endParaRPr lang="en-US" sz="3200" b="0" u="none" strike="noStrike">
               <a:solidFill>
                 <a:schemeClr val="dk1"/>
               </a:solidFill>
@@ -853,7 +1154,7 @@
             </a:endParaRPr>
           </a:p>
           <a:p>
-            <a:pPr marL="2057400" lvl="4" indent="-228600" algn="l" defTabSz="457200">
+            <a:pPr marL="1828800" lvl="4" indent="-216000" algn="l" defTabSz="457200">
               <a:lnSpc>
                 <a:spcPct val="100000"/>
               </a:lnSpc>
@@ -863,11 +1164,15 @@
               <a:buClr>
                 <a:srgbClr val="000000"/>
               </a:buClr>
-              <a:buFont typeface="Arial"/>
-              <a:buChar char="»"/>
-            </a:pPr>
-            <a:r>
-              <a:rPr lang="en-US" sz="2000" b="0" u="none" strike="noStrike">
+              <a:buSzPct val="45000"/>
+              <a:buFont typeface="Wingdings" charset="2"/>
+              <a:buChar char=""/>
+              <a:tabLst>
+                <a:tab pos="0" algn="l"/>
+              </a:tabLst>
+            </a:pPr>
+            <a:r>
+              <a:rPr lang="en-US" sz="3200" b="0" u="none" strike="noStrike">
                 <a:solidFill>
                   <a:schemeClr val="dk1"/>
                 </a:solidFill>
@@ -875,9 +1180,85 @@
                 <a:uFillTx/>
                 <a:latin typeface="Calibri"/>
               </a:rPr>
-              <a:t>Fifth level</a:t>
-            </a:r>
-            <a:endParaRPr lang="en-US" sz="2000" b="0" u="none" strike="noStrike">
+              <a:t>Fifth Outline Level</a:t>
+            </a:r>
+            <a:endParaRPr lang="en-US" sz="3200" b="0" u="none" strike="noStrike">
+              <a:solidFill>
+                <a:schemeClr val="dk1"/>
+              </a:solidFill>
+              <a:effectLst/>
+              <a:uFillTx/>
+              <a:latin typeface="Calibri"/>
+            </a:endParaRPr>
+          </a:p>
+          <a:p>
+            <a:pPr marL="2286000" lvl="5" indent="-216000" algn="l" defTabSz="457200">
+              <a:lnSpc>
+                <a:spcPct val="100000"/>
+              </a:lnSpc>
+              <a:spcBef>
+                <a:spcPts val="283"/>
+              </a:spcBef>
+              <a:buClr>
+                <a:srgbClr val="000000"/>
+              </a:buClr>
+              <a:buSzPct val="45000"/>
+              <a:buFont typeface="Wingdings" charset="2"/>
+              <a:buChar char=""/>
+              <a:tabLst>
+                <a:tab pos="0" algn="l"/>
+              </a:tabLst>
+            </a:pPr>
+            <a:r>
+              <a:rPr lang="en-US" sz="3200" b="0" u="none" strike="noStrike">
+                <a:solidFill>
+                  <a:schemeClr val="dk1"/>
+                </a:solidFill>
+                <a:effectLst/>
+                <a:uFillTx/>
+                <a:latin typeface="Calibri"/>
+              </a:rPr>
+              <a:t>Sixth Outline Level</a:t>
+            </a:r>
+            <a:endParaRPr lang="en-US" sz="3200" b="0" u="none" strike="noStrike">
+              <a:solidFill>
+                <a:schemeClr val="dk1"/>
+              </a:solidFill>
+              <a:effectLst/>
+              <a:uFillTx/>
+              <a:latin typeface="Calibri"/>
+            </a:endParaRPr>
+          </a:p>
+          <a:p>
+            <a:pPr marL="2743200" lvl="6" indent="-216000" algn="l" defTabSz="457200">
+              <a:lnSpc>
+                <a:spcPct val="100000"/>
+              </a:lnSpc>
+              <a:spcBef>
+                <a:spcPts val="283"/>
+              </a:spcBef>
+              <a:buClr>
+                <a:srgbClr val="000000"/>
+              </a:buClr>
+              <a:buSzPct val="45000"/>
+              <a:buFont typeface="Wingdings" charset="2"/>
+              <a:buChar char=""/>
+              <a:tabLst>
+                <a:tab pos="0" algn="l"/>
+              </a:tabLst>
+            </a:pPr>
+            <a:r>
+              <a:rPr lang="en-US" sz="3200" b="0" u="none" strike="noStrike">
+                <a:solidFill>
+                  <a:schemeClr val="dk1"/>
+                </a:solidFill>
+                <a:effectLst/>
+                <a:uFillTx/>
+                <a:latin typeface="Calibri"/>
+              </a:rPr>
+              <a:t>Seventh Outline Level</a:t>
+            </a:r>
+            <a:endParaRPr lang="en-US" sz="3200" b="0" u="none" strike="noStrike">
               <a:solidFill>
                 <a:schemeClr val="dk1"/>
               </a:solidFill>
@@ -891,6 +1272,90 @@
       <p:sp>
         <p:nvSpPr>
           <p:cNvPr id="53" name="PlaceHolder 3"/>
+          <p:cNvSpPr>
+            <a:spLocks noGrp="1"/>
+          </p:cNvSpPr>
+          <p:nvPr>
+            <p:ph type="body"/>
+          </p:nvPr>
+        </p:nvSpPr>
+        <p:spPr>
+          <a:xfrm>
+            <a:off x="1792440" y="5367240"/>
+            <a:ext cx="5483520" cy="802080"/>
+          </a:xfrm>
+          <a:prstGeom prst="rect">
+            <a:avLst/>
+          </a:prstGeom>
+          <a:noFill/>
+          <a:ln w="0">
+            <a:noFill/>
+          </a:ln>
+        </p:spPr>
+        <p:txBody>
+          <a:bodyPr lIns="91440" tIns="45720" rIns="91440" bIns="45720" anchor="t">
+            <a:noAutofit/>
+          </a:bodyPr>
+          <a:lstStyle>
+            <a:lvl1pPr indent="0" algn="l" defTabSz="457200">
+              <a:lnSpc>
+                <a:spcPct val="100000"/>
+              </a:lnSpc>
+              <a:spcBef>
+                <a:spcPts val="281"/>
+              </a:spcBef>
+              <a:buNone/>
+              <a:tabLst>
+                <a:tab pos="0" algn="l"/>
+              </a:tabLst>
+              <a:defRPr lang="en-US" sz="1400" b="0" u="none" strike="noStrike">
+                <a:solidFill>
+                  <a:schemeClr val="dk1"/>
+                </a:solidFill>
+                <a:effectLst/>
+                <a:uFillTx/>
+                <a:latin typeface="Calibri"/>
+              </a:defRPr>
+            </a:lvl1pPr>
+          </a:lstStyle>
+          <a:p>
+            <a:pPr indent="0" algn="l" defTabSz="457200">
+              <a:lnSpc>
+                <a:spcPct val="100000"/>
+              </a:lnSpc>
+              <a:spcBef>
+                <a:spcPts val="281"/>
+              </a:spcBef>
+              <a:buNone/>
+              <a:tabLst>
+                <a:tab pos="0" algn="l"/>
+              </a:tabLst>
+            </a:pPr>
+            <a:r>
+              <a:rPr lang="en-US" sz="1400" b="0" u="none" strike="noStrike">
+                <a:solidFill>
+                  <a:schemeClr val="dk1"/>
+                </a:solidFill>
+                <a:effectLst/>
+                <a:uFillTx/>
+                <a:latin typeface="Calibri"/>
+              </a:rPr>
+              <a:t>Click to edit Master text styles</a:t>
+            </a:r>
+            <a:endParaRPr lang="en-US" sz="1400" b="0" u="none" strike="noStrike">
+              <a:solidFill>
+                <a:schemeClr val="dk1"/>
+              </a:solidFill>
+              <a:effectLst/>
+              <a:uFillTx/>
+              <a:latin typeface="Calibri"/>
+            </a:endParaRPr>
+          </a:p>
+        </p:txBody>
+      </p:sp>
+      <p:sp>
+        <p:nvSpPr>
+          <p:cNvPr id="54" name="PlaceHolder 4"/>
           <p:cNvSpPr>
             <a:spLocks noGrp="1"/>
           </p:cNvSpPr>
@@ -901,7 +1366,7 @@
         <p:spPr>
           <a:xfrm>
             <a:off x="457200" y="6356520"/>
-            <a:ext cx="2131200" cy="362520"/>
+            <a:ext cx="2130840" cy="362160"/>
           </a:xfrm>
           <a:prstGeom prst="rect">
             <a:avLst/>
@@ -972,7 +1437,7 @@
       </p:sp>
       <p:sp>
         <p:nvSpPr>
-          <p:cNvPr id="54" name="PlaceHolder 4"/>
+          <p:cNvPr id="55" name="PlaceHolder 5"/>
           <p:cNvSpPr>
             <a:spLocks noGrp="1"/>
           </p:cNvSpPr>
@@ -983,7 +1448,7 @@
         <p:spPr>
           <a:xfrm>
             <a:off x="3124080" y="6356520"/>
-            <a:ext cx="2892960" cy="362520"/>
+            <a:ext cx="2892600" cy="362160"/>
           </a:xfrm>
           <a:prstGeom prst="rect">
             <a:avLst/>
@@ -1050,7 +1515,7 @@
       </p:sp>
       <p:sp>
         <p:nvSpPr>
-          <p:cNvPr id="55" name="PlaceHolder 5"/>
+          <p:cNvPr id="56" name="PlaceHolder 6"/>
           <p:cNvSpPr>
             <a:spLocks noGrp="1"/>
           </p:cNvSpPr>
@@ -1061,7 +1526,7 @@
         <p:spPr>
           <a:xfrm>
             <a:off x="6553080" y="6356520"/>
-            <a:ext cx="2131200" cy="362520"/>
+            <a:ext cx="2130840" cy="362160"/>
           </a:xfrm>
           <a:prstGeom prst="rect">
             <a:avLst/>
@@ -1106,7 +1571,7 @@
                 <a:tab pos="0" algn="l"/>
               </a:tabLst>
             </a:pPr>
-            <a:fld id="{9047DDF9-3ECC-4CF7-B809-3930AC3AB3D5}" type="slidenum">
+            <a:fld id="{F05BB4F8-E572-4C97-8DD7-52BA23199BCE}" type="slidenum">
               <a:rPr lang="en-US" sz="1200" b="0" u="none" strike="noStrike">
                 <a:solidFill>
                   <a:schemeClr val="dk1">
@@ -1136,8 +1601,8 @@
 </file>
 
 <file path=ppt/slideLayouts/slideLayout11.xml><?xml version="1.0" encoding="utf-8"?>
-<p:sldLayout xmlns:a="http://schemas.openxmlformats.org/drawingml/2006/main" xmlns:p="http://schemas.openxmlformats.org/presentationml/2006/main" xmlns:r="http://schemas.openxmlformats.org/officeDocument/2006/relationships" xmlns:p14="http://schemas.microsoft.com/office/powerpoint/2010/main" xmlns:p15="http://schemas.microsoft.com/office/powerpoint/2012/main" xmlns:mc="http://schemas.openxmlformats.org/markup-compatibility/2006" type="obj" preserve="1">
-  <p:cSld name="Title and Content">
+<p:sldLayout xmlns:a="http://schemas.openxmlformats.org/drawingml/2006/main" xmlns:p="http://schemas.openxmlformats.org/presentationml/2006/main" xmlns:r="http://schemas.openxmlformats.org/officeDocument/2006/relationships" xmlns:p14="http://schemas.microsoft.com/office/powerpoint/2010/main" xmlns:p15="http://schemas.microsoft.com/office/powerpoint/2012/main" xmlns:mc="http://schemas.openxmlformats.org/markup-compatibility/2006" type="title" preserve="1">
+  <p:cSld name="Title Slide">
     <p:bg>
       <p:bgPr>
         <a:solidFill>
@@ -1161,7 +1626,7 @@
       </p:grpSpPr>
       <p:sp>
         <p:nvSpPr>
-          <p:cNvPr id="56" name="PlaceHolder 1"/>
+          <p:cNvPr id="57" name="PlaceHolder 1"/>
           <p:cNvSpPr>
             <a:spLocks noGrp="1"/>
           </p:cNvSpPr>
@@ -1171,8 +1636,8 @@
         </p:nvSpPr>
         <p:spPr>
           <a:xfrm>
-            <a:off x="457200" y="274680"/>
-            <a:ext cx="8227080" cy="1140480"/>
+            <a:off x="685800" y="2130480"/>
+            <a:ext cx="7769520" cy="1467000"/>
           </a:xfrm>
           <a:prstGeom prst="rect">
             <a:avLst/>
@@ -1239,313 +1704,7 @@
       </p:sp>
       <p:sp>
         <p:nvSpPr>
-          <p:cNvPr id="57" name="PlaceHolder 2"/>
-          <p:cNvSpPr>
-            <a:spLocks noGrp="1"/>
-          </p:cNvSpPr>
-          <p:nvPr>
-            <p:ph type="body"/>
-          </p:nvPr>
-        </p:nvSpPr>
-        <p:spPr>
-          <a:xfrm>
-            <a:off x="457200" y="1600200"/>
-            <a:ext cx="8227080" cy="4523400"/>
-          </a:xfrm>
-          <a:prstGeom prst="rect">
-            <a:avLst/>
-          </a:prstGeom>
-          <a:noFill/>
-          <a:ln w="0">
-            <a:noFill/>
-          </a:ln>
-        </p:spPr>
-        <p:txBody>
-          <a:bodyPr lIns="91440" tIns="45720" rIns="91440" bIns="45720" anchor="t">
-            <a:noAutofit/>
-          </a:bodyPr>
-          <a:lstStyle>
-            <a:lvl1pPr algn="l" defTabSz="457200">
-              <a:lnSpc>
-                <a:spcPct val="100000"/>
-              </a:lnSpc>
-              <a:spcBef>
-                <a:spcPts val="641"/>
-              </a:spcBef>
-              <a:buClr>
-                <a:srgbClr val="000000"/>
-              </a:buClr>
-              <a:buFont typeface="Arial"/>
-              <a:buChar char="•"/>
-              <a:defRPr lang="en-US" sz="3200" b="0" u="none" strike="noStrike">
-                <a:solidFill>
-                  <a:schemeClr val="dk1"/>
-                </a:solidFill>
-                <a:effectLst/>
-                <a:uFillTx/>
-                <a:latin typeface="Calibri"/>
-              </a:defRPr>
-            </a:lvl1pPr>
-            <a:lvl2pPr lvl="1" algn="l" defTabSz="457200">
-              <a:lnSpc>
-                <a:spcPct val="100000"/>
-              </a:lnSpc>
-              <a:spcBef>
-                <a:spcPts val="561"/>
-              </a:spcBef>
-              <a:buClr>
-                <a:srgbClr val="000000"/>
-              </a:buClr>
-              <a:buFont typeface="Arial"/>
-              <a:buChar char="–"/>
-              <a:defRPr lang="en-US" sz="2800" b="0" u="none" strike="noStrike">
-                <a:solidFill>
-                  <a:schemeClr val="dk1"/>
-                </a:solidFill>
-                <a:effectLst/>
-                <a:uFillTx/>
-                <a:latin typeface="Calibri"/>
-              </a:defRPr>
-            </a:lvl2pPr>
-            <a:lvl3pPr lvl="2" algn="l" defTabSz="457200">
-              <a:lnSpc>
-                <a:spcPct val="100000"/>
-              </a:lnSpc>
-              <a:spcBef>
-                <a:spcPts val="479"/>
-              </a:spcBef>
-              <a:buClr>
-                <a:srgbClr val="000000"/>
-              </a:buClr>
-              <a:buFont typeface="Arial"/>
-              <a:buChar char="•"/>
-              <a:defRPr lang="en-US" sz="2400" b="0" u="none" strike="noStrike">
-                <a:solidFill>
-                  <a:schemeClr val="dk1"/>
-                </a:solidFill>
-                <a:effectLst/>
-                <a:uFillTx/>
-                <a:latin typeface="Calibri"/>
-              </a:defRPr>
-            </a:lvl3pPr>
-            <a:lvl4pPr lvl="3" algn="l" defTabSz="457200">
-              <a:lnSpc>
-                <a:spcPct val="100000"/>
-              </a:lnSpc>
-              <a:spcBef>
-                <a:spcPts val="400"/>
-              </a:spcBef>
-              <a:buClr>
-                <a:srgbClr val="000000"/>
-              </a:buClr>
-              <a:buFont typeface="Arial"/>
-              <a:buChar char="–"/>
-              <a:defRPr lang="en-US" sz="2000" b="0" u="none" strike="noStrike">
-                <a:solidFill>
-                  <a:schemeClr val="dk1"/>
-                </a:solidFill>
-                <a:effectLst/>
-                <a:uFillTx/>
-                <a:latin typeface="Calibri"/>
-              </a:defRPr>
-            </a:lvl4pPr>
-            <a:lvl5pPr lvl="4" algn="l" defTabSz="457200">
-              <a:lnSpc>
-                <a:spcPct val="100000"/>
-              </a:lnSpc>
-              <a:spcBef>
-                <a:spcPts val="400"/>
-              </a:spcBef>
-              <a:buClr>
-                <a:srgbClr val="000000"/>
-              </a:buClr>
-              <a:buFont typeface="Arial"/>
-              <a:buChar char="»"/>
-              <a:defRPr lang="en-US" sz="2000" b="0" u="none" strike="noStrike">
-                <a:solidFill>
-                  <a:schemeClr val="dk1"/>
-                </a:solidFill>
-                <a:effectLst/>
-                <a:uFillTx/>
-                <a:latin typeface="Calibri"/>
-              </a:defRPr>
-            </a:lvl5pPr>
-          </a:lstStyle>
-          <a:p>
-            <a:pPr marL="343080" indent="-343080" algn="l" defTabSz="457200">
-              <a:lnSpc>
-                <a:spcPct val="100000"/>
-              </a:lnSpc>
-              <a:spcBef>
-                <a:spcPts val="641"/>
-              </a:spcBef>
-              <a:buClr>
-                <a:srgbClr val="000000"/>
-              </a:buClr>
-              <a:buFont typeface="Arial"/>
-              <a:buChar char="•"/>
-            </a:pPr>
-            <a:r>
-              <a:rPr lang="en-US" sz="3200" b="0" u="none" strike="noStrike">
-                <a:solidFill>
-                  <a:schemeClr val="dk1"/>
-                </a:solidFill>
-                <a:effectLst/>
-                <a:uFillTx/>
-                <a:latin typeface="Calibri"/>
-              </a:rPr>
-              <a:t>Click to edit Master text styles</a:t>
-            </a:r>
-            <a:endParaRPr lang="en-US" sz="3200" b="0" u="none" strike="noStrike">
-              <a:solidFill>
-                <a:schemeClr val="dk1"/>
-              </a:solidFill>
-              <a:effectLst/>
-              <a:uFillTx/>
-              <a:latin typeface="Calibri"/>
-            </a:endParaRPr>
-          </a:p>
-          <a:p>
-            <a:pPr marL="743040" lvl="1" indent="-285840" algn="l" defTabSz="457200">
-              <a:lnSpc>
-                <a:spcPct val="100000"/>
-              </a:lnSpc>
-              <a:spcBef>
-                <a:spcPts val="561"/>
-              </a:spcBef>
-              <a:buClr>
-                <a:srgbClr val="000000"/>
-              </a:buClr>
-              <a:buFont typeface="Arial"/>
-              <a:buChar char="–"/>
-            </a:pPr>
-            <a:r>
-              <a:rPr lang="en-US" sz="2800" b="0" u="none" strike="noStrike">
-                <a:solidFill>
-                  <a:schemeClr val="dk1"/>
-                </a:solidFill>
-                <a:effectLst/>
-                <a:uFillTx/>
-                <a:latin typeface="Calibri"/>
-              </a:rPr>
-              <a:t>Second level</a:t>
-            </a:r>
-            <a:endParaRPr lang="en-US" sz="2800" b="0" u="none" strike="noStrike">
-              <a:solidFill>
-                <a:schemeClr val="dk1"/>
-              </a:solidFill>
-              <a:effectLst/>
-              <a:uFillTx/>
-              <a:latin typeface="Calibri"/>
-            </a:endParaRPr>
-          </a:p>
-          <a:p>
-            <a:pPr marL="1143000" lvl="2" indent="-228600" algn="l" defTabSz="457200">
-              <a:lnSpc>
-                <a:spcPct val="100000"/>
-              </a:lnSpc>
-              <a:spcBef>
-                <a:spcPts val="479"/>
-              </a:spcBef>
-              <a:buClr>
-                <a:srgbClr val="000000"/>
-              </a:buClr>
-              <a:buFont typeface="Arial"/>
-              <a:buChar char="•"/>
-            </a:pPr>
-            <a:r>
-              <a:rPr lang="en-US" sz="2400" b="0" u="none" strike="noStrike">
-                <a:solidFill>
-                  <a:schemeClr val="dk1"/>
-                </a:solidFill>
-                <a:effectLst/>
-                <a:uFillTx/>
-                <a:latin typeface="Calibri"/>
-              </a:rPr>
-              <a:t>Third level</a:t>
-            </a:r>
-            <a:endParaRPr lang="en-US" sz="2400" b="0" u="none" strike="noStrike">
-              <a:solidFill>
-                <a:schemeClr val="dk1"/>
-              </a:solidFill>
-              <a:effectLst/>
-              <a:uFillTx/>
-              <a:latin typeface="Calibri"/>
-            </a:endParaRPr>
-          </a:p>
-          <a:p>
-            <a:pPr marL="1600200" lvl="3" indent="-228600" algn="l" defTabSz="457200">
-              <a:lnSpc>
-                <a:spcPct val="100000"/>
-              </a:lnSpc>
-              <a:spcBef>
-                <a:spcPts val="400"/>
-              </a:spcBef>
-              <a:buClr>
-                <a:srgbClr val="000000"/>
-              </a:buClr>
-              <a:buFont typeface="Arial"/>
-              <a:buChar char="–"/>
-            </a:pPr>
-            <a:r>
-              <a:rPr lang="en-US" sz="2000" b="0" u="none" strike="noStrike">
-                <a:solidFill>
-                  <a:schemeClr val="dk1"/>
-                </a:solidFill>
-                <a:effectLst/>
-                <a:uFillTx/>
-                <a:latin typeface="Calibri"/>
-              </a:rPr>
-              <a:t>Fourth level</a:t>
-            </a:r>
-            <a:endParaRPr lang="en-US" sz="2000" b="0" u="none" strike="noStrike">
-              <a:solidFill>
-                <a:schemeClr val="dk1"/>
-              </a:solidFill>
-              <a:effectLst/>
-              <a:uFillTx/>
-              <a:latin typeface="Calibri"/>
-            </a:endParaRPr>
-          </a:p>
-          <a:p>
-            <a:pPr marL="2057400" lvl="4" indent="-228600" algn="l" defTabSz="457200">
-              <a:lnSpc>
-                <a:spcPct val="100000"/>
-              </a:lnSpc>
-              <a:spcBef>
-                <a:spcPts val="400"/>
-              </a:spcBef>
-              <a:buClr>
-                <a:srgbClr val="000000"/>
-              </a:buClr>
-              <a:buFont typeface="Arial"/>
-              <a:buChar char="»"/>
-            </a:pPr>
-            <a:r>
-              <a:rPr lang="en-US" sz="2000" b="0" u="none" strike="noStrike">
-                <a:solidFill>
-                  <a:schemeClr val="dk1"/>
-                </a:solidFill>
-                <a:effectLst/>
-                <a:uFillTx/>
-                <a:latin typeface="Calibri"/>
-              </a:rPr>
-              <a:t>Fifth level</a:t>
-            </a:r>
-            <a:endParaRPr lang="en-US" sz="2000" b="0" u="none" strike="noStrike">
-              <a:solidFill>
-                <a:schemeClr val="dk1"/>
-              </a:solidFill>
-              <a:effectLst/>
-              <a:uFillTx/>
-              <a:latin typeface="Calibri"/>
-            </a:endParaRPr>
-          </a:p>
-        </p:txBody>
-      </p:sp>
-      <p:sp>
-        <p:nvSpPr>
-          <p:cNvPr id="58" name="PlaceHolder 3"/>
+          <p:cNvPr id="58" name="PlaceHolder 2"/>
           <p:cNvSpPr>
             <a:spLocks noGrp="1"/>
           </p:cNvSpPr>
@@ -1556,7 +1715,7 @@
         <p:spPr>
           <a:xfrm>
             <a:off x="457200" y="6356520"/>
-            <a:ext cx="2131200" cy="362520"/>
+            <a:ext cx="2130840" cy="362160"/>
           </a:xfrm>
           <a:prstGeom prst="rect">
             <a:avLst/>
@@ -1627,7 +1786,7 @@
       </p:sp>
       <p:sp>
         <p:nvSpPr>
-          <p:cNvPr id="59" name="PlaceHolder 4"/>
+          <p:cNvPr id="59" name="PlaceHolder 3"/>
           <p:cNvSpPr>
             <a:spLocks noGrp="1"/>
           </p:cNvSpPr>
@@ -1638,7 +1797,7 @@
         <p:spPr>
           <a:xfrm>
             <a:off x="3124080" y="6356520"/>
-            <a:ext cx="2892960" cy="362520"/>
+            <a:ext cx="2892600" cy="362160"/>
           </a:xfrm>
           <a:prstGeom prst="rect">
             <a:avLst/>
@@ -1705,7 +1864,7 @@
       </p:sp>
       <p:sp>
         <p:nvSpPr>
-          <p:cNvPr id="60" name="PlaceHolder 5"/>
+          <p:cNvPr id="60" name="PlaceHolder 4"/>
           <p:cNvSpPr>
             <a:spLocks noGrp="1"/>
           </p:cNvSpPr>
@@ -1716,7 +1875,7 @@
         <p:spPr>
           <a:xfrm>
             <a:off x="6553080" y="6356520"/>
-            <a:ext cx="2131200" cy="362520"/>
+            <a:ext cx="2130840" cy="362160"/>
           </a:xfrm>
           <a:prstGeom prst="rect">
             <a:avLst/>
@@ -1761,7 +1920,7 @@
                 <a:tab pos="0" algn="l"/>
               </a:tabLst>
             </a:pPr>
-            <a:fld id="{D45E85D2-DCF9-4BF0-B782-EDBCD30F6E3A}" type="slidenum">
+            <a:fld id="{7170B81A-10BF-451F-9AF0-2210508ABEE1}" type="slidenum">
               <a:rPr lang="en-US" sz="1200" b="0" u="none" strike="noStrike">
                 <a:solidFill>
                   <a:schemeClr val="dk1">
@@ -1813,8 +1972,8 @@
 </file>
 
 <file path=ppt/slideLayouts/slideLayout2.xml><?xml version="1.0" encoding="utf-8"?>
-<p:sldLayout xmlns:a="http://schemas.openxmlformats.org/drawingml/2006/main" xmlns:p="http://schemas.openxmlformats.org/presentationml/2006/main" xmlns:r="http://schemas.openxmlformats.org/officeDocument/2006/relationships" xmlns:p14="http://schemas.microsoft.com/office/powerpoint/2010/main" xmlns:p15="http://schemas.microsoft.com/office/powerpoint/2012/main" xmlns:mc="http://schemas.openxmlformats.org/markup-compatibility/2006" type="twoObj" preserve="1">
-  <p:cSld name="Two Content">
+<p:sldLayout xmlns:a="http://schemas.openxmlformats.org/drawingml/2006/main" xmlns:p="http://schemas.openxmlformats.org/presentationml/2006/main" xmlns:r="http://schemas.openxmlformats.org/officeDocument/2006/relationships" xmlns:p14="http://schemas.microsoft.com/office/powerpoint/2010/main" xmlns:p15="http://schemas.microsoft.com/office/powerpoint/2012/main" xmlns:mc="http://schemas.openxmlformats.org/markup-compatibility/2006" type="vertTitleAndTx" preserve="1">
+  <p:cSld name="Vertical Title and Text">
     <p:bg>
       <p:bgPr>
         <a:solidFill>
@@ -1848,8 +2007,663 @@
         </p:nvSpPr>
         <p:spPr>
           <a:xfrm>
+            <a:off x="6629400" y="274680"/>
+            <a:ext cx="2054520" cy="5848560"/>
+          </a:xfrm>
+          <a:prstGeom prst="rect">
+            <a:avLst/>
+          </a:prstGeom>
+          <a:noFill/>
+          <a:ln w="0">
+            <a:noFill/>
+          </a:ln>
+        </p:spPr>
+        <p:txBody>
+          <a:bodyPr lIns="91440" tIns="45720" rIns="91440" bIns="45720" anchor="ctr" vert="eaVert">
+            <a:noAutofit/>
+          </a:bodyPr>
+          <a:lstStyle>
+            <a:lvl1pPr indent="0" algn="ctr" defTabSz="457200">
+              <a:lnSpc>
+                <a:spcPct val="100000"/>
+              </a:lnSpc>
+              <a:buNone/>
+              <a:tabLst>
+                <a:tab pos="0" algn="l"/>
+              </a:tabLst>
+              <a:defRPr lang="en-US" sz="4400" b="0" u="none" strike="noStrike">
+                <a:solidFill>
+                  <a:schemeClr val="dk1"/>
+                </a:solidFill>
+                <a:effectLst/>
+                <a:uFillTx/>
+                <a:latin typeface="Calibri"/>
+              </a:defRPr>
+            </a:lvl1pPr>
+          </a:lstStyle>
+          <a:p>
+            <a:pPr indent="0" algn="ctr" defTabSz="457200">
+              <a:lnSpc>
+                <a:spcPct val="100000"/>
+              </a:lnSpc>
+              <a:buNone/>
+              <a:tabLst>
+                <a:tab pos="0" algn="l"/>
+              </a:tabLst>
+            </a:pPr>
+            <a:r>
+              <a:rPr lang="en-US" sz="4400" b="0" u="none" strike="noStrike">
+                <a:solidFill>
+                  <a:schemeClr val="dk1"/>
+                </a:solidFill>
+                <a:effectLst/>
+                <a:uFillTx/>
+                <a:latin typeface="Calibri"/>
+              </a:rPr>
+              <a:t>Click to edit Master title style</a:t>
+            </a:r>
+            <a:endParaRPr lang="en-US" sz="4400" b="0" u="none" strike="noStrike">
+              <a:solidFill>
+                <a:schemeClr val="dk1"/>
+              </a:solidFill>
+              <a:effectLst/>
+              <a:uFillTx/>
+              <a:latin typeface="Calibri"/>
+            </a:endParaRPr>
+          </a:p>
+        </p:txBody>
+      </p:sp>
+      <p:sp>
+        <p:nvSpPr>
+          <p:cNvPr id="8" name="PlaceHolder 2"/>
+          <p:cNvSpPr>
+            <a:spLocks noGrp="1"/>
+          </p:cNvSpPr>
+          <p:nvPr>
+            <p:ph type="body"/>
+          </p:nvPr>
+        </p:nvSpPr>
+        <p:spPr>
+          <a:xfrm>
             <a:off x="457200" y="274680"/>
-            <a:ext cx="8227080" cy="1140480"/>
+            <a:ext cx="6017040" cy="5848560"/>
+          </a:xfrm>
+          <a:prstGeom prst="rect">
+            <a:avLst/>
+          </a:prstGeom>
+          <a:noFill/>
+          <a:ln w="0">
+            <a:noFill/>
+          </a:ln>
+        </p:spPr>
+        <p:txBody>
+          <a:bodyPr lIns="91440" tIns="45720" rIns="91440" bIns="45720" anchor="t" vert="eaVert">
+            <a:noAutofit/>
+          </a:bodyPr>
+          <a:lstStyle>
+            <a:lvl1pPr algn="l" defTabSz="457200">
+              <a:lnSpc>
+                <a:spcPct val="100000"/>
+              </a:lnSpc>
+              <a:spcBef>
+                <a:spcPts val="641"/>
+              </a:spcBef>
+              <a:buClr>
+                <a:srgbClr val="000000"/>
+              </a:buClr>
+              <a:buFont typeface="Arial"/>
+              <a:buChar char="•"/>
+              <a:defRPr lang="en-US" sz="3200" b="0" u="none" strike="noStrike">
+                <a:solidFill>
+                  <a:schemeClr val="dk1"/>
+                </a:solidFill>
+                <a:effectLst/>
+                <a:uFillTx/>
+                <a:latin typeface="Calibri"/>
+              </a:defRPr>
+            </a:lvl1pPr>
+            <a:lvl2pPr lvl="1" algn="l" defTabSz="457200">
+              <a:lnSpc>
+                <a:spcPct val="100000"/>
+              </a:lnSpc>
+              <a:spcBef>
+                <a:spcPts val="561"/>
+              </a:spcBef>
+              <a:buClr>
+                <a:srgbClr val="000000"/>
+              </a:buClr>
+              <a:buFont typeface="Arial"/>
+              <a:buChar char="–"/>
+              <a:defRPr lang="en-US" sz="2800" b="0" u="none" strike="noStrike">
+                <a:solidFill>
+                  <a:schemeClr val="dk1"/>
+                </a:solidFill>
+                <a:effectLst/>
+                <a:uFillTx/>
+                <a:latin typeface="Calibri"/>
+              </a:defRPr>
+            </a:lvl2pPr>
+            <a:lvl3pPr lvl="2" algn="l" defTabSz="457200">
+              <a:lnSpc>
+                <a:spcPct val="100000"/>
+              </a:lnSpc>
+              <a:spcBef>
+                <a:spcPts val="479"/>
+              </a:spcBef>
+              <a:buClr>
+                <a:srgbClr val="000000"/>
+              </a:buClr>
+              <a:buFont typeface="Arial"/>
+              <a:buChar char="•"/>
+              <a:defRPr lang="en-US" sz="2400" b="0" u="none" strike="noStrike">
+                <a:solidFill>
+                  <a:schemeClr val="dk1"/>
+                </a:solidFill>
+                <a:effectLst/>
+                <a:uFillTx/>
+                <a:latin typeface="Calibri"/>
+              </a:defRPr>
+            </a:lvl3pPr>
+            <a:lvl4pPr lvl="3" algn="l" defTabSz="457200">
+              <a:lnSpc>
+                <a:spcPct val="100000"/>
+              </a:lnSpc>
+              <a:spcBef>
+                <a:spcPts val="400"/>
+              </a:spcBef>
+              <a:buClr>
+                <a:srgbClr val="000000"/>
+              </a:buClr>
+              <a:buFont typeface="Arial"/>
+              <a:buChar char="–"/>
+              <a:defRPr lang="en-US" sz="2000" b="0" u="none" strike="noStrike">
+                <a:solidFill>
+                  <a:schemeClr val="dk1"/>
+                </a:solidFill>
+                <a:effectLst/>
+                <a:uFillTx/>
+                <a:latin typeface="Calibri"/>
+              </a:defRPr>
+            </a:lvl4pPr>
+            <a:lvl5pPr lvl="4" algn="l" defTabSz="457200">
+              <a:lnSpc>
+                <a:spcPct val="100000"/>
+              </a:lnSpc>
+              <a:spcBef>
+                <a:spcPts val="400"/>
+              </a:spcBef>
+              <a:buClr>
+                <a:srgbClr val="000000"/>
+              </a:buClr>
+              <a:buFont typeface="Arial"/>
+              <a:buChar char="»"/>
+              <a:defRPr lang="en-US" sz="2000" b="0" u="none" strike="noStrike">
+                <a:solidFill>
+                  <a:schemeClr val="dk1"/>
+                </a:solidFill>
+                <a:effectLst/>
+                <a:uFillTx/>
+                <a:latin typeface="Calibri"/>
+              </a:defRPr>
+            </a:lvl5pPr>
+          </a:lstStyle>
+          <a:p>
+            <a:pPr marL="343080" indent="-343080" algn="l" defTabSz="457200">
+              <a:lnSpc>
+                <a:spcPct val="100000"/>
+              </a:lnSpc>
+              <a:spcBef>
+                <a:spcPts val="641"/>
+              </a:spcBef>
+              <a:buClr>
+                <a:srgbClr val="000000"/>
+              </a:buClr>
+              <a:buFont typeface="Arial"/>
+              <a:buChar char="•"/>
+            </a:pPr>
+            <a:r>
+              <a:rPr lang="en-US" sz="3200" b="0" u="none" strike="noStrike">
+                <a:solidFill>
+                  <a:schemeClr val="dk1"/>
+                </a:solidFill>
+                <a:effectLst/>
+                <a:uFillTx/>
+                <a:latin typeface="Calibri"/>
+              </a:rPr>
+              <a:t>Click to edit Master text styles</a:t>
+            </a:r>
+            <a:endParaRPr lang="en-US" sz="3200" b="0" u="none" strike="noStrike">
+              <a:solidFill>
+                <a:schemeClr val="dk1"/>
+              </a:solidFill>
+              <a:effectLst/>
+              <a:uFillTx/>
+              <a:latin typeface="Calibri"/>
+            </a:endParaRPr>
+          </a:p>
+          <a:p>
+            <a:pPr marL="743040" lvl="1" indent="-285840" algn="l" defTabSz="457200">
+              <a:lnSpc>
+                <a:spcPct val="100000"/>
+              </a:lnSpc>
+              <a:spcBef>
+                <a:spcPts val="561"/>
+              </a:spcBef>
+              <a:buClr>
+                <a:srgbClr val="000000"/>
+              </a:buClr>
+              <a:buFont typeface="Arial"/>
+              <a:buChar char="–"/>
+            </a:pPr>
+            <a:r>
+              <a:rPr lang="en-US" sz="2800" b="0" u="none" strike="noStrike">
+                <a:solidFill>
+                  <a:schemeClr val="dk1"/>
+                </a:solidFill>
+                <a:effectLst/>
+                <a:uFillTx/>
+                <a:latin typeface="Calibri"/>
+              </a:rPr>
+              <a:t>Second level</a:t>
+            </a:r>
+            <a:endParaRPr lang="en-US" sz="2800" b="0" u="none" strike="noStrike">
+              <a:solidFill>
+                <a:schemeClr val="dk1"/>
+              </a:solidFill>
+              <a:effectLst/>
+              <a:uFillTx/>
+              <a:latin typeface="Calibri"/>
+            </a:endParaRPr>
+          </a:p>
+          <a:p>
+            <a:pPr marL="1143000" lvl="2" indent="-228600" algn="l" defTabSz="457200">
+              <a:lnSpc>
+                <a:spcPct val="100000"/>
+              </a:lnSpc>
+              <a:spcBef>
+                <a:spcPts val="479"/>
+              </a:spcBef>
+              <a:buClr>
+                <a:srgbClr val="000000"/>
+              </a:buClr>
+              <a:buFont typeface="Arial"/>
+              <a:buChar char="•"/>
+            </a:pPr>
+            <a:r>
+              <a:rPr lang="en-US" sz="2400" b="0" u="none" strike="noStrike">
+                <a:solidFill>
+                  <a:schemeClr val="dk1"/>
+                </a:solidFill>
+                <a:effectLst/>
+                <a:uFillTx/>
+                <a:latin typeface="Calibri"/>
+              </a:rPr>
+              <a:t>Third level</a:t>
+            </a:r>
+            <a:endParaRPr lang="en-US" sz="2400" b="0" u="none" strike="noStrike">
+              <a:solidFill>
+                <a:schemeClr val="dk1"/>
+              </a:solidFill>
+              <a:effectLst/>
+              <a:uFillTx/>
+              <a:latin typeface="Calibri"/>
+            </a:endParaRPr>
+          </a:p>
+          <a:p>
+            <a:pPr marL="1600200" lvl="3" indent="-228600" algn="l" defTabSz="457200">
+              <a:lnSpc>
+                <a:spcPct val="100000"/>
+              </a:lnSpc>
+              <a:spcBef>
+                <a:spcPts val="400"/>
+              </a:spcBef>
+              <a:buClr>
+                <a:srgbClr val="000000"/>
+              </a:buClr>
+              <a:buFont typeface="Arial"/>
+              <a:buChar char="–"/>
+            </a:pPr>
+            <a:r>
+              <a:rPr lang="en-US" sz="2000" b="0" u="none" strike="noStrike">
+                <a:solidFill>
+                  <a:schemeClr val="dk1"/>
+                </a:solidFill>
+                <a:effectLst/>
+                <a:uFillTx/>
+                <a:latin typeface="Calibri"/>
+              </a:rPr>
+              <a:t>Fourth level</a:t>
+            </a:r>
+            <a:endParaRPr lang="en-US" sz="2000" b="0" u="none" strike="noStrike">
+              <a:solidFill>
+                <a:schemeClr val="dk1"/>
+              </a:solidFill>
+              <a:effectLst/>
+              <a:uFillTx/>
+              <a:latin typeface="Calibri"/>
+            </a:endParaRPr>
+          </a:p>
+          <a:p>
+            <a:pPr marL="2057400" lvl="4" indent="-228600" algn="l" defTabSz="457200">
+              <a:lnSpc>
+                <a:spcPct val="100000"/>
+              </a:lnSpc>
+              <a:spcBef>
+                <a:spcPts val="400"/>
+              </a:spcBef>
+              <a:buClr>
+                <a:srgbClr val="000000"/>
+              </a:buClr>
+              <a:buFont typeface="Arial"/>
+              <a:buChar char="»"/>
+            </a:pPr>
+            <a:r>
+              <a:rPr lang="en-US" sz="2000" b="0" u="none" strike="noStrike">
+                <a:solidFill>
+                  <a:schemeClr val="dk1"/>
+                </a:solidFill>
+                <a:effectLst/>
+                <a:uFillTx/>
+                <a:latin typeface="Calibri"/>
+              </a:rPr>
+              <a:t>Fifth level</a:t>
+            </a:r>
+            <a:endParaRPr lang="en-US" sz="2000" b="0" u="none" strike="noStrike">
+              <a:solidFill>
+                <a:schemeClr val="dk1"/>
+              </a:solidFill>
+              <a:effectLst/>
+              <a:uFillTx/>
+              <a:latin typeface="Calibri"/>
+            </a:endParaRPr>
+          </a:p>
+        </p:txBody>
+      </p:sp>
+      <p:sp>
+        <p:nvSpPr>
+          <p:cNvPr id="9" name="PlaceHolder 3"/>
+          <p:cNvSpPr>
+            <a:spLocks noGrp="1"/>
+          </p:cNvSpPr>
+          <p:nvPr>
+            <p:ph type="dt" idx="4"/>
+          </p:nvPr>
+        </p:nvSpPr>
+        <p:spPr>
+          <a:xfrm>
+            <a:off x="457200" y="6356520"/>
+            <a:ext cx="2130840" cy="362160"/>
+          </a:xfrm>
+          <a:prstGeom prst="rect">
+            <a:avLst/>
+          </a:prstGeom>
+          <a:noFill/>
+          <a:ln w="0">
+            <a:noFill/>
+          </a:ln>
+        </p:spPr>
+        <p:txBody>
+          <a:bodyPr lIns="91440" tIns="45720" rIns="91440" bIns="45720" anchor="ctr">
+            <a:noAutofit/>
+          </a:bodyPr>
+          <a:lstStyle>
+            <a:lvl1pPr indent="0" algn="l" defTabSz="457200">
+              <a:lnSpc>
+                <a:spcPct val="100000"/>
+              </a:lnSpc>
+              <a:buNone/>
+              <a:tabLst>
+                <a:tab pos="0" algn="l"/>
+              </a:tabLst>
+              <a:defRPr lang="en-US" sz="1200" b="0" u="none" strike="noStrike">
+                <a:solidFill>
+                  <a:schemeClr val="dk1">
+                    <a:tint val="75000"/>
+                  </a:schemeClr>
+                </a:solidFill>
+                <a:effectLst/>
+                <a:uFillTx/>
+                <a:latin typeface="Calibri"/>
+              </a:defRPr>
+            </a:lvl1pPr>
+          </a:lstStyle>
+          <a:p>
+            <a:pPr indent="0" algn="l" defTabSz="457200">
+              <a:lnSpc>
+                <a:spcPct val="100000"/>
+              </a:lnSpc>
+              <a:buNone/>
+              <a:tabLst>
+                <a:tab pos="0" algn="l"/>
+              </a:tabLst>
+            </a:pPr>
+            <a:r>
+              <a:rPr lang="en-US" sz="1200" b="0" u="none" strike="noStrike">
+                <a:solidFill>
+                  <a:schemeClr val="dk1">
+                    <a:tint val="75000"/>
+                  </a:schemeClr>
+                </a:solidFill>
+                <a:effectLst/>
+                <a:uFillTx/>
+                <a:latin typeface="Calibri"/>
+              </a:rPr>
+              <a:t> </a:t>
+            </a:r>
+            <a:endParaRPr lang="en-US" sz="1200" b="0" u="none" strike="noStrike">
+              <a:solidFill>
+                <a:srgbClr val="000000"/>
+              </a:solidFill>
+              <a:effectLst/>
+              <a:uFillTx/>
+              <a:latin typeface="Times New Roman"/>
+            </a:endParaRPr>
+          </a:p>
+        </p:txBody>
+      </p:sp>
+      <p:sp>
+        <p:nvSpPr>
+          <p:cNvPr id="10" name="PlaceHolder 4"/>
+          <p:cNvSpPr>
+            <a:spLocks noGrp="1"/>
+          </p:cNvSpPr>
+          <p:nvPr>
+            <p:ph type="ftr" idx="5"/>
+          </p:nvPr>
+        </p:nvSpPr>
+        <p:spPr>
+          <a:xfrm>
+            <a:off x="3124080" y="6356520"/>
+            <a:ext cx="2892600" cy="362160"/>
+          </a:xfrm>
+          <a:prstGeom prst="rect">
+            <a:avLst/>
+          </a:prstGeom>
+          <a:noFill/>
+          <a:ln w="0">
+            <a:noFill/>
+          </a:ln>
+        </p:spPr>
+        <p:txBody>
+          <a:bodyPr lIns="91440" tIns="45720" rIns="91440" bIns="45720" anchor="ctr">
+            <a:noAutofit/>
+          </a:bodyPr>
+          <a:lstStyle>
+            <a:lvl1pPr indent="0" algn="ctr">
+              <a:lnSpc>
+                <a:spcPct val="100000"/>
+              </a:lnSpc>
+              <a:buNone/>
+              <a:tabLst>
+                <a:tab pos="0" algn="l"/>
+              </a:tabLst>
+              <a:defRPr lang="en-US" sz="1400" b="0" u="none" strike="noStrike">
+                <a:solidFill>
+                  <a:srgbClr val="000000"/>
+                </a:solidFill>
+                <a:effectLst/>
+                <a:uFillTx/>
+                <a:latin typeface="Times New Roman"/>
+              </a:defRPr>
+            </a:lvl1pPr>
+          </a:lstStyle>
+          <a:p>
+            <a:pPr indent="0" algn="ctr">
+              <a:lnSpc>
+                <a:spcPct val="100000"/>
+              </a:lnSpc>
+              <a:buNone/>
+              <a:tabLst>
+                <a:tab pos="0" algn="l"/>
+              </a:tabLst>
+            </a:pPr>
+            <a:r>
+              <a:rPr lang="en-US" sz="1400" b="0" u="none" strike="noStrike">
+                <a:solidFill>
+                  <a:srgbClr val="000000"/>
+                </a:solidFill>
+                <a:effectLst/>
+                <a:uFillTx/>
+                <a:latin typeface="Times New Roman"/>
+              </a:rPr>
+              <a:t> </a:t>
+            </a:r>
+            <a:endParaRPr lang="en-US" sz="1400" b="0" u="none" strike="noStrike">
+              <a:solidFill>
+                <a:srgbClr val="000000"/>
+              </a:solidFill>
+              <a:effectLst/>
+              <a:uFillTx/>
+              <a:latin typeface="Times New Roman"/>
+            </a:endParaRPr>
+          </a:p>
+        </p:txBody>
+      </p:sp>
+      <p:sp>
+        <p:nvSpPr>
+          <p:cNvPr id="11" name="PlaceHolder 5"/>
+          <p:cNvSpPr>
+            <a:spLocks noGrp="1"/>
+          </p:cNvSpPr>
+          <p:nvPr>
+            <p:ph type="sldNum" idx="6"/>
+          </p:nvPr>
+        </p:nvSpPr>
+        <p:spPr>
+          <a:xfrm>
+            <a:off x="6553080" y="6356520"/>
+            <a:ext cx="2130840" cy="362160"/>
+          </a:xfrm>
+          <a:prstGeom prst="rect">
+            <a:avLst/>
+          </a:prstGeom>
+          <a:noFill/>
+          <a:ln w="0">
+            <a:noFill/>
+          </a:ln>
+        </p:spPr>
+        <p:txBody>
+          <a:bodyPr lIns="91440" tIns="45720" rIns="91440" bIns="45720" anchor="ctr">
+            <a:noAutofit/>
+          </a:bodyPr>
+          <a:lstStyle>
+            <a:lvl1pPr indent="0" algn="r" defTabSz="457200">
+              <a:lnSpc>
+                <a:spcPct val="100000"/>
+              </a:lnSpc>
+              <a:buNone/>
+              <a:tabLst>
+                <a:tab pos="0" algn="l"/>
+              </a:tabLst>
+              <a:defRPr lang="en-US" sz="1200" b="0" u="none" strike="noStrike">
+                <a:solidFill>
+                  <a:schemeClr val="dk1">
+                    <a:tint val="75000"/>
+                  </a:schemeClr>
+                </a:solidFill>
+                <a:effectLst/>
+                <a:uFillTx/>
+                <a:latin typeface="Calibri"/>
+              </a:defRPr>
+            </a:lvl1pPr>
+          </a:lstStyle>
+          <a:p>
+            <a:pPr indent="0" algn="r" defTabSz="457200">
+              <a:lnSpc>
+                <a:spcPct val="100000"/>
+              </a:lnSpc>
+              <a:buNone/>
+              <a:tabLst>
+                <a:tab pos="0" algn="l"/>
+              </a:tabLst>
+            </a:pPr>
+            <a:fld id="{0A723503-2B33-4A06-8A30-03614CF126A7}" type="slidenum">
+              <a:rPr lang="en-US" sz="1200" b="0" u="none" strike="noStrike">
+                <a:solidFill>
+                  <a:schemeClr val="dk1">
+                    <a:tint val="75000"/>
+                  </a:schemeClr>
+                </a:solidFill>
+                <a:effectLst/>
+                <a:uFillTx/>
+                <a:latin typeface="Calibri"/>
+              </a:rPr>
+              <a:t>1</a:t>
+            </a:fld>
+            <a:endParaRPr lang="en-US" sz="1200" b="0" u="none" strike="noStrike">
+              <a:solidFill>
+                <a:srgbClr val="000000"/>
+              </a:solidFill>
+              <a:effectLst/>
+              <a:uFillTx/>
+              <a:latin typeface="Times New Roman"/>
+            </a:endParaRPr>
+          </a:p>
+        </p:txBody>
+      </p:sp>
+    </p:spTree>
+  </p:cSld>
+</p:sldLayout>
+</file>
+
+<file path=ppt/slideLayouts/slideLayout3.xml><?xml version="1.0" encoding="utf-8"?>
+<p:sldLayout xmlns:a="http://schemas.openxmlformats.org/drawingml/2006/main" xmlns:p="http://schemas.openxmlformats.org/presentationml/2006/main" xmlns:r="http://schemas.openxmlformats.org/officeDocument/2006/relationships" xmlns:p14="http://schemas.microsoft.com/office/powerpoint/2010/main" xmlns:p15="http://schemas.microsoft.com/office/powerpoint/2012/main" xmlns:mc="http://schemas.openxmlformats.org/markup-compatibility/2006" type="obj" preserve="1">
+  <p:cSld name="Title and Content">
+    <p:bg>
+      <p:bgPr>
+        <a:solidFill>
+          <a:srgbClr val="FFFFFF"/>
+        </a:solidFill>
+      </p:bgPr>
+    </p:bg>
+    <p:spTree>
+      <p:nvGrpSpPr>
+        <p:cNvPr id="1" name=""/>
+        <p:cNvGrpSpPr/>
+        <p:nvPr/>
+      </p:nvGrpSpPr>
+      <p:grpSpPr>
+        <a:xfrm>
+          <a:off x="0" y="0"/>
+          <a:ext cx="0" cy="0"/>
+          <a:chOff x="0" y="0"/>
+          <a:chExt cx="0" cy="0"/>
+        </a:xfrm>
+      </p:grpSpPr>
+      <p:sp>
+        <p:nvSpPr>
+          <p:cNvPr id="12" name="PlaceHolder 1"/>
+          <p:cNvSpPr>
+            <a:spLocks noGrp="1"/>
+          </p:cNvSpPr>
+          <p:nvPr>
+            <p:ph type="title"/>
+          </p:nvPr>
+        </p:nvSpPr>
+        <p:spPr>
+          <a:xfrm>
+            <a:off x="457200" y="274680"/>
+            <a:ext cx="8226720" cy="1140120"/>
           </a:xfrm>
           <a:prstGeom prst="rect">
             <a:avLst/>
@@ -1916,7 +2730,7 @@
       </p:sp>
       <p:sp>
         <p:nvSpPr>
-          <p:cNvPr id="8" name="PlaceHolder 2"/>
+          <p:cNvPr id="13" name="PlaceHolder 2"/>
           <p:cNvSpPr>
             <a:spLocks noGrp="1"/>
           </p:cNvSpPr>
@@ -1927,7 +2741,7 @@
         <p:spPr>
           <a:xfrm>
             <a:off x="457200" y="1600200"/>
-            <a:ext cx="4035960" cy="4523400"/>
+            <a:ext cx="8226720" cy="4523040"/>
           </a:xfrm>
           <a:prstGeom prst="rect">
             <a:avLst/>
@@ -1947,13 +2761,34 @@
                 <a:spcPct val="100000"/>
               </a:lnSpc>
               <a:spcBef>
+                <a:spcPts val="641"/>
+              </a:spcBef>
+              <a:buClr>
+                <a:srgbClr val="000000"/>
+              </a:buClr>
+              <a:buFont typeface="Arial"/>
+              <a:buChar char="•"/>
+              <a:defRPr lang="en-US" sz="3200" b="0" u="none" strike="noStrike">
+                <a:solidFill>
+                  <a:schemeClr val="dk1"/>
+                </a:solidFill>
+                <a:effectLst/>
+                <a:uFillTx/>
+                <a:latin typeface="Calibri"/>
+              </a:defRPr>
+            </a:lvl1pPr>
+            <a:lvl2pPr lvl="1" algn="l" defTabSz="457200">
+              <a:lnSpc>
+                <a:spcPct val="100000"/>
+              </a:lnSpc>
+              <a:spcBef>
                 <a:spcPts val="561"/>
               </a:spcBef>
               <a:buClr>
                 <a:srgbClr val="000000"/>
               </a:buClr>
               <a:buFont typeface="Arial"/>
-              <a:buChar char="•"/>
+              <a:buChar char="–"/>
               <a:defRPr lang="en-US" sz="2800" b="0" u="none" strike="noStrike">
                 <a:solidFill>
                   <a:schemeClr val="dk1"/>
@@ -1962,8 +2797,8 @@
                 <a:uFillTx/>
                 <a:latin typeface="Calibri"/>
               </a:defRPr>
-            </a:lvl1pPr>
-            <a:lvl2pPr lvl="1" algn="l" defTabSz="457200">
+            </a:lvl2pPr>
+            <a:lvl3pPr lvl="2" algn="l" defTabSz="457200">
               <a:lnSpc>
                 <a:spcPct val="100000"/>
               </a:lnSpc>
@@ -1974,7 +2809,7 @@
                 <a:srgbClr val="000000"/>
               </a:buClr>
               <a:buFont typeface="Arial"/>
-              <a:buChar char="–"/>
+              <a:buChar char="•"/>
               <a:defRPr lang="en-US" sz="2400" b="0" u="none" strike="noStrike">
                 <a:solidFill>
                   <a:schemeClr val="dk1"/>
@@ -1983,8 +2818,8 @@
                 <a:uFillTx/>
                 <a:latin typeface="Calibri"/>
               </a:defRPr>
-            </a:lvl2pPr>
-            <a:lvl3pPr lvl="2" algn="l" defTabSz="457200">
+            </a:lvl3pPr>
+            <a:lvl4pPr lvl="3" algn="l" defTabSz="457200">
               <a:lnSpc>
                 <a:spcPct val="100000"/>
               </a:lnSpc>
@@ -1995,29 +2830,8 @@
                 <a:srgbClr val="000000"/>
               </a:buClr>
               <a:buFont typeface="Arial"/>
-              <a:buChar char="•"/>
+              <a:buChar char="–"/>
               <a:defRPr lang="en-US" sz="2000" b="0" u="none" strike="noStrike">
-                <a:solidFill>
-                  <a:schemeClr val="dk1"/>
-                </a:solidFill>
-                <a:effectLst/>
-                <a:uFillTx/>
-                <a:latin typeface="Calibri"/>
-              </a:defRPr>
-            </a:lvl3pPr>
-            <a:lvl4pPr lvl="3" algn="l" defTabSz="457200">
-              <a:lnSpc>
-                <a:spcPct val="100000"/>
-              </a:lnSpc>
-              <a:spcBef>
-                <a:spcPts val="360"/>
-              </a:spcBef>
-              <a:buClr>
-                <a:srgbClr val="000000"/>
-              </a:buClr>
-              <a:buFont typeface="Arial"/>
-              <a:buChar char="–"/>
-              <a:defRPr lang="en-US" sz="1800" b="0" u="none" strike="noStrike">
                 <a:solidFill>
                   <a:schemeClr val="dk1"/>
                 </a:solidFill>
@@ -2031,14 +2845,14 @@
                 <a:spcPct val="100000"/>
               </a:lnSpc>
               <a:spcBef>
-                <a:spcPts val="360"/>
+                <a:spcPts val="400"/>
               </a:spcBef>
               <a:buClr>
                 <a:srgbClr val="000000"/>
               </a:buClr>
               <a:buFont typeface="Arial"/>
               <a:buChar char="»"/>
-              <a:defRPr lang="en-US" sz="1800" b="0" u="none" strike="noStrike">
+              <a:defRPr lang="en-US" sz="2000" b="0" u="none" strike="noStrike">
                 <a:solidFill>
                   <a:schemeClr val="dk1"/>
                 </a:solidFill>
@@ -2050,6 +2864,40 @@
           </a:lstStyle>
           <a:p>
             <a:pPr marL="343080" indent="-343080" algn="l" defTabSz="457200">
+              <a:lnSpc>
+                <a:spcPct val="100000"/>
+              </a:lnSpc>
+              <a:spcBef>
+                <a:spcPts val="641"/>
+              </a:spcBef>
+              <a:buClr>
+                <a:srgbClr val="000000"/>
+              </a:buClr>
+              <a:buFont typeface="Arial"/>
+              <a:buChar char="•"/>
+            </a:pPr>
+            <a:r>
+              <a:rPr lang="en-US" sz="3200" b="0" u="none" strike="noStrike">
+                <a:solidFill>
+                  <a:schemeClr val="dk1"/>
+                </a:solidFill>
+                <a:effectLst/>
+                <a:uFillTx/>
+                <a:latin typeface="Calibri"/>
+              </a:rPr>
+              <a:t>Click to edit Master text styles</a:t>
+            </a:r>
+            <a:endParaRPr lang="en-US" sz="3200" b="0" u="none" strike="noStrike">
+              <a:solidFill>
+                <a:schemeClr val="dk1"/>
+              </a:solidFill>
+              <a:effectLst/>
+              <a:uFillTx/>
+              <a:latin typeface="Calibri"/>
+            </a:endParaRPr>
+          </a:p>
+          <a:p>
+            <a:pPr marL="743040" lvl="1" indent="-285840" algn="l" defTabSz="457200">
               <a:lnSpc>
                 <a:spcPct val="100000"/>
               </a:lnSpc>
@@ -2060,7 +2908,7 @@
                 <a:srgbClr val="000000"/>
               </a:buClr>
               <a:buFont typeface="Arial"/>
-              <a:buChar char="•"/>
+              <a:buChar char="–"/>
             </a:pPr>
             <a:r>
               <a:rPr lang="en-US" sz="2800" b="0" u="none" strike="noStrike">
@@ -2071,7 +2919,7 @@
                 <a:uFillTx/>
                 <a:latin typeface="Calibri"/>
               </a:rPr>
-              <a:t>Click to edit Master text styles</a:t>
+              <a:t>Second level</a:t>
             </a:r>
             <a:endParaRPr lang="en-US" sz="2800" b="0" u="none" strike="noStrike">
               <a:solidFill>
@@ -2083,7 +2931,7 @@
             </a:endParaRPr>
           </a:p>
           <a:p>
-            <a:pPr marL="743040" lvl="1" indent="-285840" algn="l" defTabSz="457200">
+            <a:pPr marL="1143000" lvl="2" indent="-228600" algn="l" defTabSz="457200">
               <a:lnSpc>
                 <a:spcPct val="100000"/>
               </a:lnSpc>
@@ -2094,7 +2942,7 @@
                 <a:srgbClr val="000000"/>
               </a:buClr>
               <a:buFont typeface="Arial"/>
-              <a:buChar char="–"/>
+              <a:buChar char="•"/>
             </a:pPr>
             <a:r>
               <a:rPr lang="en-US" sz="2400" b="0" u="none" strike="noStrike">
@@ -2105,7 +2953,7 @@
                 <a:uFillTx/>
                 <a:latin typeface="Calibri"/>
               </a:rPr>
-              <a:t>Second level</a:t>
+              <a:t>Third level</a:t>
             </a:r>
             <a:endParaRPr lang="en-US" sz="2400" b="0" u="none" strike="noStrike">
               <a:solidFill>
@@ -2117,7 +2965,7 @@
             </a:endParaRPr>
           </a:p>
           <a:p>
-            <a:pPr marL="1143000" lvl="2" indent="-228600" algn="l" defTabSz="457200">
+            <a:pPr marL="1600200" lvl="3" indent="-228600" algn="l" defTabSz="457200">
               <a:lnSpc>
                 <a:spcPct val="100000"/>
               </a:lnSpc>
@@ -2128,7 +2976,7 @@
                 <a:srgbClr val="000000"/>
               </a:buClr>
               <a:buFont typeface="Arial"/>
-              <a:buChar char="•"/>
+              <a:buChar char="–"/>
             </a:pPr>
             <a:r>
               <a:rPr lang="en-US" sz="2000" b="0" u="none" strike="noStrike">
@@ -2139,7 +2987,7 @@
                 <a:uFillTx/>
                 <a:latin typeface="Calibri"/>
               </a:rPr>
-              <a:t>Third level</a:t>
+              <a:t>Fourth level</a:t>
             </a:r>
             <a:endParaRPr lang="en-US" sz="2000" b="0" u="none" strike="noStrike">
               <a:solidFill>
@@ -2151,46 +2999,12 @@
             </a:endParaRPr>
           </a:p>
           <a:p>
-            <a:pPr marL="1600200" lvl="3" indent="-228600" algn="l" defTabSz="457200">
+            <a:pPr marL="2057400" lvl="4" indent="-228600" algn="l" defTabSz="457200">
               <a:lnSpc>
                 <a:spcPct val="100000"/>
               </a:lnSpc>
               <a:spcBef>
-                <a:spcPts val="360"/>
-              </a:spcBef>
-              <a:buClr>
-                <a:srgbClr val="000000"/>
-              </a:buClr>
-              <a:buFont typeface="Arial"/>
-              <a:buChar char="–"/>
-            </a:pPr>
-            <a:r>
-              <a:rPr lang="en-US" sz="1800" b="0" u="none" strike="noStrike">
-                <a:solidFill>
-                  <a:schemeClr val="dk1"/>
-                </a:solidFill>
-                <a:effectLst/>
-                <a:uFillTx/>
-                <a:latin typeface="Calibri"/>
-              </a:rPr>
-              <a:t>Fourth level</a:t>
-            </a:r>
-            <a:endParaRPr lang="en-US" sz="1800" b="0" u="none" strike="noStrike">
-              <a:solidFill>
-                <a:schemeClr val="dk1"/>
-              </a:solidFill>
-              <a:effectLst/>
-              <a:uFillTx/>
-              <a:latin typeface="Calibri"/>
-            </a:endParaRPr>
-          </a:p>
-          <a:p>
-            <a:pPr marL="2057400" lvl="4" indent="-228600" algn="l" defTabSz="457200">
-              <a:lnSpc>
-                <a:spcPct val="100000"/>
-              </a:lnSpc>
-              <a:spcBef>
-                <a:spcPts val="360"/>
+                <a:spcPts val="400"/>
               </a:spcBef>
               <a:buClr>
                 <a:srgbClr val="000000"/>
@@ -2199,7 +3013,7 @@
               <a:buChar char="»"/>
             </a:pPr>
             <a:r>
-              <a:rPr lang="en-US" sz="1800" b="0" u="none" strike="noStrike">
+              <a:rPr lang="en-US" sz="2000" b="0" u="none" strike="noStrike">
                 <a:solidFill>
                   <a:schemeClr val="dk1"/>
                 </a:solidFill>
@@ -2209,7 +3023,7 @@
               </a:rPr>
               <a:t>Fifth level</a:t>
             </a:r>
-            <a:endParaRPr lang="en-US" sz="1800" b="0" u="none" strike="noStrike">
+            <a:endParaRPr lang="en-US" sz="2000" b="0" u="none" strike="noStrike">
               <a:solidFill>
                 <a:schemeClr val="dk1"/>
               </a:solidFill>
@@ -2222,7 +3036,356 @@
       </p:sp>
       <p:sp>
         <p:nvSpPr>
-          <p:cNvPr id="9" name="PlaceHolder 3"/>
+          <p:cNvPr id="14" name="PlaceHolder 3"/>
+          <p:cNvSpPr>
+            <a:spLocks noGrp="1"/>
+          </p:cNvSpPr>
+          <p:nvPr>
+            <p:ph type="dt" idx="7"/>
+          </p:nvPr>
+        </p:nvSpPr>
+        <p:spPr>
+          <a:xfrm>
+            <a:off x="457200" y="6356520"/>
+            <a:ext cx="2130840" cy="362160"/>
+          </a:xfrm>
+          <a:prstGeom prst="rect">
+            <a:avLst/>
+          </a:prstGeom>
+          <a:noFill/>
+          <a:ln w="0">
+            <a:noFill/>
+          </a:ln>
+        </p:spPr>
+        <p:txBody>
+          <a:bodyPr lIns="91440" tIns="45720" rIns="91440" bIns="45720" anchor="ctr">
+            <a:noAutofit/>
+          </a:bodyPr>
+          <a:lstStyle>
+            <a:lvl1pPr indent="0" algn="l" defTabSz="457200">
+              <a:lnSpc>
+                <a:spcPct val="100000"/>
+              </a:lnSpc>
+              <a:buNone/>
+              <a:tabLst>
+                <a:tab pos="0" algn="l"/>
+              </a:tabLst>
+              <a:defRPr lang="en-US" sz="1200" b="0" u="none" strike="noStrike">
+                <a:solidFill>
+                  <a:schemeClr val="dk1">
+                    <a:tint val="75000"/>
+                  </a:schemeClr>
+                </a:solidFill>
+                <a:effectLst/>
+                <a:uFillTx/>
+                <a:latin typeface="Calibri"/>
+              </a:defRPr>
+            </a:lvl1pPr>
+          </a:lstStyle>
+          <a:p>
+            <a:pPr indent="0" algn="l" defTabSz="457200">
+              <a:lnSpc>
+                <a:spcPct val="100000"/>
+              </a:lnSpc>
+              <a:buNone/>
+              <a:tabLst>
+                <a:tab pos="0" algn="l"/>
+              </a:tabLst>
+            </a:pPr>
+            <a:r>
+              <a:rPr lang="en-US" sz="1200" b="0" u="none" strike="noStrike">
+                <a:solidFill>
+                  <a:schemeClr val="dk1">
+                    <a:tint val="75000"/>
+                  </a:schemeClr>
+                </a:solidFill>
+                <a:effectLst/>
+                <a:uFillTx/>
+                <a:latin typeface="Calibri"/>
+              </a:rPr>
+              <a:t> </a:t>
+            </a:r>
+            <a:endParaRPr lang="en-US" sz="1200" b="0" u="none" strike="noStrike">
+              <a:solidFill>
+                <a:srgbClr val="000000"/>
+              </a:solidFill>
+              <a:effectLst/>
+              <a:uFillTx/>
+              <a:latin typeface="Times New Roman"/>
+            </a:endParaRPr>
+          </a:p>
+        </p:txBody>
+      </p:sp>
+      <p:sp>
+        <p:nvSpPr>
+          <p:cNvPr id="15" name="PlaceHolder 4"/>
+          <p:cNvSpPr>
+            <a:spLocks noGrp="1"/>
+          </p:cNvSpPr>
+          <p:nvPr>
+            <p:ph type="ftr" idx="8"/>
+          </p:nvPr>
+        </p:nvSpPr>
+        <p:spPr>
+          <a:xfrm>
+            <a:off x="3124080" y="6356520"/>
+            <a:ext cx="2892600" cy="362160"/>
+          </a:xfrm>
+          <a:prstGeom prst="rect">
+            <a:avLst/>
+          </a:prstGeom>
+          <a:noFill/>
+          <a:ln w="0">
+            <a:noFill/>
+          </a:ln>
+        </p:spPr>
+        <p:txBody>
+          <a:bodyPr lIns="91440" tIns="45720" rIns="91440" bIns="45720" anchor="ctr">
+            <a:noAutofit/>
+          </a:bodyPr>
+          <a:lstStyle>
+            <a:lvl1pPr indent="0" algn="ctr">
+              <a:lnSpc>
+                <a:spcPct val="100000"/>
+              </a:lnSpc>
+              <a:buNone/>
+              <a:tabLst>
+                <a:tab pos="0" algn="l"/>
+              </a:tabLst>
+              <a:defRPr lang="en-US" sz="1400" b="0" u="none" strike="noStrike">
+                <a:solidFill>
+                  <a:srgbClr val="000000"/>
+                </a:solidFill>
+                <a:effectLst/>
+                <a:uFillTx/>
+                <a:latin typeface="Times New Roman"/>
+              </a:defRPr>
+            </a:lvl1pPr>
+          </a:lstStyle>
+          <a:p>
+            <a:pPr indent="0" algn="ctr">
+              <a:lnSpc>
+                <a:spcPct val="100000"/>
+              </a:lnSpc>
+              <a:buNone/>
+              <a:tabLst>
+                <a:tab pos="0" algn="l"/>
+              </a:tabLst>
+            </a:pPr>
+            <a:r>
+              <a:rPr lang="en-US" sz="1400" b="0" u="none" strike="noStrike">
+                <a:solidFill>
+                  <a:srgbClr val="000000"/>
+                </a:solidFill>
+                <a:effectLst/>
+                <a:uFillTx/>
+                <a:latin typeface="Times New Roman"/>
+              </a:rPr>
+              <a:t> </a:t>
+            </a:r>
+            <a:endParaRPr lang="en-US" sz="1400" b="0" u="none" strike="noStrike">
+              <a:solidFill>
+                <a:srgbClr val="000000"/>
+              </a:solidFill>
+              <a:effectLst/>
+              <a:uFillTx/>
+              <a:latin typeface="Times New Roman"/>
+            </a:endParaRPr>
+          </a:p>
+        </p:txBody>
+      </p:sp>
+      <p:sp>
+        <p:nvSpPr>
+          <p:cNvPr id="16" name="PlaceHolder 5"/>
+          <p:cNvSpPr>
+            <a:spLocks noGrp="1"/>
+          </p:cNvSpPr>
+          <p:nvPr>
+            <p:ph type="sldNum" idx="9"/>
+          </p:nvPr>
+        </p:nvSpPr>
+        <p:spPr>
+          <a:xfrm>
+            <a:off x="6553080" y="6356520"/>
+            <a:ext cx="2130840" cy="362160"/>
+          </a:xfrm>
+          <a:prstGeom prst="rect">
+            <a:avLst/>
+          </a:prstGeom>
+          <a:noFill/>
+          <a:ln w="0">
+            <a:noFill/>
+          </a:ln>
+        </p:spPr>
+        <p:txBody>
+          <a:bodyPr lIns="91440" tIns="45720" rIns="91440" bIns="45720" anchor="ctr">
+            <a:noAutofit/>
+          </a:bodyPr>
+          <a:lstStyle>
+            <a:lvl1pPr indent="0" algn="r" defTabSz="457200">
+              <a:lnSpc>
+                <a:spcPct val="100000"/>
+              </a:lnSpc>
+              <a:buNone/>
+              <a:tabLst>
+                <a:tab pos="0" algn="l"/>
+              </a:tabLst>
+              <a:defRPr lang="en-US" sz="1200" b="0" u="none" strike="noStrike">
+                <a:solidFill>
+                  <a:schemeClr val="dk1">
+                    <a:tint val="75000"/>
+                  </a:schemeClr>
+                </a:solidFill>
+                <a:effectLst/>
+                <a:uFillTx/>
+                <a:latin typeface="Calibri"/>
+              </a:defRPr>
+            </a:lvl1pPr>
+          </a:lstStyle>
+          <a:p>
+            <a:pPr indent="0" algn="r" defTabSz="457200">
+              <a:lnSpc>
+                <a:spcPct val="100000"/>
+              </a:lnSpc>
+              <a:buNone/>
+              <a:tabLst>
+                <a:tab pos="0" algn="l"/>
+              </a:tabLst>
+            </a:pPr>
+            <a:fld id="{86CD0B0A-0B90-4672-A2D7-A1A0DE64A5C5}" type="slidenum">
+              <a:rPr lang="en-US" sz="1200" b="0" u="none" strike="noStrike">
+                <a:solidFill>
+                  <a:schemeClr val="dk1">
+                    <a:tint val="75000"/>
+                  </a:schemeClr>
+                </a:solidFill>
+                <a:effectLst/>
+                <a:uFillTx/>
+                <a:latin typeface="Calibri"/>
+              </a:rPr>
+              <a:t>1</a:t>
+            </a:fld>
+            <a:endParaRPr lang="en-US" sz="1200" b="0" u="none" strike="noStrike">
+              <a:solidFill>
+                <a:srgbClr val="000000"/>
+              </a:solidFill>
+              <a:effectLst/>
+              <a:uFillTx/>
+              <a:latin typeface="Times New Roman"/>
+            </a:endParaRPr>
+          </a:p>
+        </p:txBody>
+      </p:sp>
+    </p:spTree>
+  </p:cSld>
+</p:sldLayout>
+</file>
+
+<file path=ppt/slideLayouts/slideLayout4.xml><?xml version="1.0" encoding="utf-8"?>
+<p:sldLayout xmlns:a="http://schemas.openxmlformats.org/drawingml/2006/main" xmlns:p="http://schemas.openxmlformats.org/presentationml/2006/main" xmlns:r="http://schemas.openxmlformats.org/officeDocument/2006/relationships" xmlns:p14="http://schemas.microsoft.com/office/powerpoint/2010/main" xmlns:p15="http://schemas.microsoft.com/office/powerpoint/2012/main" xmlns:mc="http://schemas.openxmlformats.org/markup-compatibility/2006" type="blank" preserve="1">
+  <p:cSld name="Section Header">
+    <p:bg>
+      <p:bgPr>
+        <a:solidFill>
+          <a:srgbClr val="FFFFFF"/>
+        </a:solidFill>
+      </p:bgPr>
+    </p:bg>
+    <p:spTree>
+      <p:nvGrpSpPr>
+        <p:cNvPr id="1" name=""/>
+        <p:cNvGrpSpPr/>
+        <p:nvPr/>
+      </p:nvGrpSpPr>
+      <p:grpSpPr>
+        <a:xfrm>
+          <a:off x="0" y="0"/>
+          <a:ext cx="0" cy="0"/>
+          <a:chOff x="0" y="0"/>
+          <a:chExt cx="0" cy="0"/>
+        </a:xfrm>
+      </p:grpSpPr>
+      <p:sp>
+        <p:nvSpPr>
+          <p:cNvPr id="17" name="PlaceHolder 1"/>
+          <p:cNvSpPr>
+            <a:spLocks noGrp="1"/>
+          </p:cNvSpPr>
+          <p:nvPr>
+            <p:ph type="title"/>
+          </p:nvPr>
+        </p:nvSpPr>
+        <p:spPr>
+          <a:xfrm>
+            <a:off x="722160" y="4406760"/>
+            <a:ext cx="7769520" cy="1359360"/>
+          </a:xfrm>
+          <a:prstGeom prst="rect">
+            <a:avLst/>
+          </a:prstGeom>
+          <a:noFill/>
+          <a:ln w="0">
+            <a:noFill/>
+          </a:ln>
+        </p:spPr>
+        <p:txBody>
+          <a:bodyPr lIns="91440" tIns="45720" rIns="91440" bIns="45720" anchor="t">
+            <a:noAutofit/>
+          </a:bodyPr>
+          <a:lstStyle>
+            <a:lvl1pPr indent="0" algn="l" defTabSz="457200">
+              <a:lnSpc>
+                <a:spcPct val="100000"/>
+              </a:lnSpc>
+              <a:buNone/>
+              <a:tabLst>
+                <a:tab pos="0" algn="l"/>
+              </a:tabLst>
+              <a:defRPr lang="en-US" sz="4000" b="1" u="none" strike="noStrike" cap="all">
+                <a:solidFill>
+                  <a:schemeClr val="dk1"/>
+                </a:solidFill>
+                <a:effectLst/>
+                <a:uFillTx/>
+                <a:latin typeface="Calibri"/>
+              </a:defRPr>
+            </a:lvl1pPr>
+          </a:lstStyle>
+          <a:p>
+            <a:pPr indent="0" algn="l" defTabSz="457200">
+              <a:lnSpc>
+                <a:spcPct val="100000"/>
+              </a:lnSpc>
+              <a:buNone/>
+              <a:tabLst>
+                <a:tab pos="0" algn="l"/>
+              </a:tabLst>
+            </a:pPr>
+            <a:r>
+              <a:rPr lang="en-US" sz="4000" b="1" u="none" strike="noStrike" cap="all">
+                <a:solidFill>
+                  <a:schemeClr val="dk1"/>
+                </a:solidFill>
+                <a:effectLst/>
+                <a:uFillTx/>
+                <a:latin typeface="Calibri"/>
+              </a:rPr>
+              <a:t>Click to edit Master title style</a:t>
+            </a:r>
+            <a:endParaRPr lang="en-US" sz="4000" b="1" u="none" strike="noStrike" cap="all">
+              <a:solidFill>
+                <a:schemeClr val="dk1"/>
+              </a:solidFill>
+              <a:effectLst/>
+              <a:uFillTx/>
+              <a:latin typeface="Calibri"/>
+            </a:endParaRPr>
+          </a:p>
+        </p:txBody>
+      </p:sp>
+      <p:sp>
+        <p:nvSpPr>
+          <p:cNvPr id="18" name="PlaceHolder 2"/>
           <p:cNvSpPr>
             <a:spLocks noGrp="1"/>
           </p:cNvSpPr>
@@ -2232,8 +3395,447 @@
         </p:nvSpPr>
         <p:spPr>
           <a:xfrm>
-            <a:off x="4648320" y="1600200"/>
-            <a:ext cx="4035960" cy="4523400"/>
+            <a:off x="722160" y="2906640"/>
+            <a:ext cx="7769520" cy="1497240"/>
+          </a:xfrm>
+          <a:prstGeom prst="rect">
+            <a:avLst/>
+          </a:prstGeom>
+          <a:noFill/>
+          <a:ln w="0">
+            <a:noFill/>
+          </a:ln>
+        </p:spPr>
+        <p:txBody>
+          <a:bodyPr lIns="91440" tIns="45720" rIns="91440" bIns="45720" anchor="b">
+            <a:noAutofit/>
+          </a:bodyPr>
+          <a:lstStyle>
+            <a:lvl1pPr indent="0" algn="l" defTabSz="457200">
+              <a:lnSpc>
+                <a:spcPct val="100000"/>
+              </a:lnSpc>
+              <a:spcBef>
+                <a:spcPts val="400"/>
+              </a:spcBef>
+              <a:buNone/>
+              <a:tabLst>
+                <a:tab pos="0" algn="l"/>
+              </a:tabLst>
+              <a:defRPr lang="en-US" sz="2000" b="0" u="none" strike="noStrike">
+                <a:solidFill>
+                  <a:schemeClr val="dk1">
+                    <a:tint val="75000"/>
+                  </a:schemeClr>
+                </a:solidFill>
+                <a:effectLst/>
+                <a:uFillTx/>
+                <a:latin typeface="Calibri"/>
+              </a:defRPr>
+            </a:lvl1pPr>
+          </a:lstStyle>
+          <a:p>
+            <a:pPr indent="0" algn="l" defTabSz="457200">
+              <a:lnSpc>
+                <a:spcPct val="100000"/>
+              </a:lnSpc>
+              <a:spcBef>
+                <a:spcPts val="400"/>
+              </a:spcBef>
+              <a:buNone/>
+              <a:tabLst>
+                <a:tab pos="0" algn="l"/>
+              </a:tabLst>
+            </a:pPr>
+            <a:r>
+              <a:rPr lang="en-US" sz="2000" b="0" u="none" strike="noStrike">
+                <a:solidFill>
+                  <a:schemeClr val="dk1">
+                    <a:tint val="75000"/>
+                  </a:schemeClr>
+                </a:solidFill>
+                <a:effectLst/>
+                <a:uFillTx/>
+                <a:latin typeface="Calibri"/>
+              </a:rPr>
+              <a:t>Click to edit Master text styles</a:t>
+            </a:r>
+            <a:endParaRPr lang="en-US" sz="2000" b="0" u="none" strike="noStrike">
+              <a:solidFill>
+                <a:schemeClr val="dk1">
+                  <a:tint val="75000"/>
+                </a:schemeClr>
+              </a:solidFill>
+              <a:effectLst/>
+              <a:uFillTx/>
+              <a:latin typeface="Calibri"/>
+            </a:endParaRPr>
+          </a:p>
+        </p:txBody>
+      </p:sp>
+      <p:sp>
+        <p:nvSpPr>
+          <p:cNvPr id="19" name="PlaceHolder 3"/>
+          <p:cNvSpPr>
+            <a:spLocks noGrp="1"/>
+          </p:cNvSpPr>
+          <p:nvPr>
+            <p:ph type="dt" idx="10"/>
+          </p:nvPr>
+        </p:nvSpPr>
+        <p:spPr>
+          <a:xfrm>
+            <a:off x="457200" y="6356520"/>
+            <a:ext cx="2130840" cy="362160"/>
+          </a:xfrm>
+          <a:prstGeom prst="rect">
+            <a:avLst/>
+          </a:prstGeom>
+          <a:noFill/>
+          <a:ln w="0">
+            <a:noFill/>
+          </a:ln>
+        </p:spPr>
+        <p:txBody>
+          <a:bodyPr lIns="91440" tIns="45720" rIns="91440" bIns="45720" anchor="ctr">
+            <a:noAutofit/>
+          </a:bodyPr>
+          <a:lstStyle>
+            <a:lvl1pPr indent="0" algn="l" defTabSz="457200">
+              <a:lnSpc>
+                <a:spcPct val="100000"/>
+              </a:lnSpc>
+              <a:buNone/>
+              <a:tabLst>
+                <a:tab pos="0" algn="l"/>
+              </a:tabLst>
+              <a:defRPr lang="en-US" sz="1200" b="0" u="none" strike="noStrike">
+                <a:solidFill>
+                  <a:schemeClr val="dk1">
+                    <a:tint val="75000"/>
+                  </a:schemeClr>
+                </a:solidFill>
+                <a:effectLst/>
+                <a:uFillTx/>
+                <a:latin typeface="Calibri"/>
+              </a:defRPr>
+            </a:lvl1pPr>
+          </a:lstStyle>
+          <a:p>
+            <a:pPr indent="0" algn="l" defTabSz="457200">
+              <a:lnSpc>
+                <a:spcPct val="100000"/>
+              </a:lnSpc>
+              <a:buNone/>
+              <a:tabLst>
+                <a:tab pos="0" algn="l"/>
+              </a:tabLst>
+            </a:pPr>
+            <a:r>
+              <a:rPr lang="en-US" sz="1200" b="0" u="none" strike="noStrike">
+                <a:solidFill>
+                  <a:schemeClr val="dk1">
+                    <a:tint val="75000"/>
+                  </a:schemeClr>
+                </a:solidFill>
+                <a:effectLst/>
+                <a:uFillTx/>
+                <a:latin typeface="Calibri"/>
+              </a:rPr>
+              <a:t> </a:t>
+            </a:r>
+            <a:endParaRPr lang="en-US" sz="1200" b="0" u="none" strike="noStrike">
+              <a:solidFill>
+                <a:srgbClr val="000000"/>
+              </a:solidFill>
+              <a:effectLst/>
+              <a:uFillTx/>
+              <a:latin typeface="Times New Roman"/>
+            </a:endParaRPr>
+          </a:p>
+        </p:txBody>
+      </p:sp>
+      <p:sp>
+        <p:nvSpPr>
+          <p:cNvPr id="20" name="PlaceHolder 4"/>
+          <p:cNvSpPr>
+            <a:spLocks noGrp="1"/>
+          </p:cNvSpPr>
+          <p:nvPr>
+            <p:ph type="ftr" idx="11"/>
+          </p:nvPr>
+        </p:nvSpPr>
+        <p:spPr>
+          <a:xfrm>
+            <a:off x="3124080" y="6356520"/>
+            <a:ext cx="2892600" cy="362160"/>
+          </a:xfrm>
+          <a:prstGeom prst="rect">
+            <a:avLst/>
+          </a:prstGeom>
+          <a:noFill/>
+          <a:ln w="0">
+            <a:noFill/>
+          </a:ln>
+        </p:spPr>
+        <p:txBody>
+          <a:bodyPr lIns="91440" tIns="45720" rIns="91440" bIns="45720" anchor="ctr">
+            <a:noAutofit/>
+          </a:bodyPr>
+          <a:lstStyle>
+            <a:lvl1pPr indent="0" algn="ctr">
+              <a:lnSpc>
+                <a:spcPct val="100000"/>
+              </a:lnSpc>
+              <a:buNone/>
+              <a:tabLst>
+                <a:tab pos="0" algn="l"/>
+              </a:tabLst>
+              <a:defRPr lang="en-US" sz="1400" b="0" u="none" strike="noStrike">
+                <a:solidFill>
+                  <a:srgbClr val="000000"/>
+                </a:solidFill>
+                <a:effectLst/>
+                <a:uFillTx/>
+                <a:latin typeface="Times New Roman"/>
+              </a:defRPr>
+            </a:lvl1pPr>
+          </a:lstStyle>
+          <a:p>
+            <a:pPr indent="0" algn="ctr">
+              <a:lnSpc>
+                <a:spcPct val="100000"/>
+              </a:lnSpc>
+              <a:buNone/>
+              <a:tabLst>
+                <a:tab pos="0" algn="l"/>
+              </a:tabLst>
+            </a:pPr>
+            <a:r>
+              <a:rPr lang="en-US" sz="1400" b="0" u="none" strike="noStrike">
+                <a:solidFill>
+                  <a:srgbClr val="000000"/>
+                </a:solidFill>
+                <a:effectLst/>
+                <a:uFillTx/>
+                <a:latin typeface="Times New Roman"/>
+              </a:rPr>
+              <a:t> </a:t>
+            </a:r>
+            <a:endParaRPr lang="en-US" sz="1400" b="0" u="none" strike="noStrike">
+              <a:solidFill>
+                <a:srgbClr val="000000"/>
+              </a:solidFill>
+              <a:effectLst/>
+              <a:uFillTx/>
+              <a:latin typeface="Times New Roman"/>
+            </a:endParaRPr>
+          </a:p>
+        </p:txBody>
+      </p:sp>
+      <p:sp>
+        <p:nvSpPr>
+          <p:cNvPr id="21" name="PlaceHolder 5"/>
+          <p:cNvSpPr>
+            <a:spLocks noGrp="1"/>
+          </p:cNvSpPr>
+          <p:nvPr>
+            <p:ph type="sldNum" idx="12"/>
+          </p:nvPr>
+        </p:nvSpPr>
+        <p:spPr>
+          <a:xfrm>
+            <a:off x="6553080" y="6356520"/>
+            <a:ext cx="2130840" cy="362160"/>
+          </a:xfrm>
+          <a:prstGeom prst="rect">
+            <a:avLst/>
+          </a:prstGeom>
+          <a:noFill/>
+          <a:ln w="0">
+            <a:noFill/>
+          </a:ln>
+        </p:spPr>
+        <p:txBody>
+          <a:bodyPr lIns="91440" tIns="45720" rIns="91440" bIns="45720" anchor="ctr">
+            <a:noAutofit/>
+          </a:bodyPr>
+          <a:lstStyle>
+            <a:lvl1pPr indent="0" algn="r" defTabSz="457200">
+              <a:lnSpc>
+                <a:spcPct val="100000"/>
+              </a:lnSpc>
+              <a:buNone/>
+              <a:tabLst>
+                <a:tab pos="0" algn="l"/>
+              </a:tabLst>
+              <a:defRPr lang="en-US" sz="1200" b="0" u="none" strike="noStrike">
+                <a:solidFill>
+                  <a:schemeClr val="dk1">
+                    <a:tint val="75000"/>
+                  </a:schemeClr>
+                </a:solidFill>
+                <a:effectLst/>
+                <a:uFillTx/>
+                <a:latin typeface="Calibri"/>
+              </a:defRPr>
+            </a:lvl1pPr>
+          </a:lstStyle>
+          <a:p>
+            <a:pPr indent="0" algn="r" defTabSz="457200">
+              <a:lnSpc>
+                <a:spcPct val="100000"/>
+              </a:lnSpc>
+              <a:buNone/>
+              <a:tabLst>
+                <a:tab pos="0" algn="l"/>
+              </a:tabLst>
+            </a:pPr>
+            <a:fld id="{D06F3DF7-9EE3-4D01-A9B7-BCC27F8AA299}" type="slidenum">
+              <a:rPr lang="en-US" sz="1200" b="0" u="none" strike="noStrike">
+                <a:solidFill>
+                  <a:schemeClr val="dk1">
+                    <a:tint val="75000"/>
+                  </a:schemeClr>
+                </a:solidFill>
+                <a:effectLst/>
+                <a:uFillTx/>
+                <a:latin typeface="Calibri"/>
+              </a:rPr>
+              <a:t>1</a:t>
+            </a:fld>
+            <a:endParaRPr lang="en-US" sz="1200" b="0" u="none" strike="noStrike">
+              <a:solidFill>
+                <a:srgbClr val="000000"/>
+              </a:solidFill>
+              <a:effectLst/>
+              <a:uFillTx/>
+              <a:latin typeface="Times New Roman"/>
+            </a:endParaRPr>
+          </a:p>
+        </p:txBody>
+      </p:sp>
+    </p:spTree>
+  </p:cSld>
+</p:sldLayout>
+</file>
+
+<file path=ppt/slideLayouts/slideLayout5.xml><?xml version="1.0" encoding="utf-8"?>
+<p:sldLayout xmlns:a="http://schemas.openxmlformats.org/drawingml/2006/main" xmlns:p="http://schemas.openxmlformats.org/presentationml/2006/main" xmlns:r="http://schemas.openxmlformats.org/officeDocument/2006/relationships" xmlns:p14="http://schemas.microsoft.com/office/powerpoint/2010/main" xmlns:p15="http://schemas.microsoft.com/office/powerpoint/2012/main" xmlns:mc="http://schemas.openxmlformats.org/markup-compatibility/2006" type="twoObj" preserve="1">
+  <p:cSld name="Two Content">
+    <p:bg>
+      <p:bgPr>
+        <a:solidFill>
+          <a:srgbClr val="FFFFFF"/>
+        </a:solidFill>
+      </p:bgPr>
+    </p:bg>
+    <p:spTree>
+      <p:nvGrpSpPr>
+        <p:cNvPr id="1" name=""/>
+        <p:cNvGrpSpPr/>
+        <p:nvPr/>
+      </p:nvGrpSpPr>
+      <p:grpSpPr>
+        <a:xfrm>
+          <a:off x="0" y="0"/>
+          <a:ext cx="0" cy="0"/>
+          <a:chOff x="0" y="0"/>
+          <a:chExt cx="0" cy="0"/>
+        </a:xfrm>
+      </p:grpSpPr>
+      <p:sp>
+        <p:nvSpPr>
+          <p:cNvPr id="22" name="PlaceHolder 1"/>
+          <p:cNvSpPr>
+            <a:spLocks noGrp="1"/>
+          </p:cNvSpPr>
+          <p:nvPr>
+            <p:ph type="title"/>
+          </p:nvPr>
+        </p:nvSpPr>
+        <p:spPr>
+          <a:xfrm>
+            <a:off x="457200" y="274680"/>
+            <a:ext cx="8226720" cy="1140120"/>
+          </a:xfrm>
+          <a:prstGeom prst="rect">
+            <a:avLst/>
+          </a:prstGeom>
+          <a:noFill/>
+          <a:ln w="0">
+            <a:noFill/>
+          </a:ln>
+        </p:spPr>
+        <p:txBody>
+          <a:bodyPr lIns="91440" tIns="45720" rIns="91440" bIns="45720" anchor="ctr">
+            <a:noAutofit/>
+          </a:bodyPr>
+          <a:lstStyle>
+            <a:lvl1pPr indent="0" algn="ctr" defTabSz="457200">
+              <a:lnSpc>
+                <a:spcPct val="100000"/>
+              </a:lnSpc>
+              <a:buNone/>
+              <a:tabLst>
+                <a:tab pos="0" algn="l"/>
+              </a:tabLst>
+              <a:defRPr lang="en-US" sz="4400" b="0" u="none" strike="noStrike">
+                <a:solidFill>
+                  <a:schemeClr val="dk1"/>
+                </a:solidFill>
+                <a:effectLst/>
+                <a:uFillTx/>
+                <a:latin typeface="Calibri"/>
+              </a:defRPr>
+            </a:lvl1pPr>
+          </a:lstStyle>
+          <a:p>
+            <a:pPr indent="0" algn="ctr" defTabSz="457200">
+              <a:lnSpc>
+                <a:spcPct val="100000"/>
+              </a:lnSpc>
+              <a:buNone/>
+              <a:tabLst>
+                <a:tab pos="0" algn="l"/>
+              </a:tabLst>
+            </a:pPr>
+            <a:r>
+              <a:rPr lang="en-US" sz="4400" b="0" u="none" strike="noStrike">
+                <a:solidFill>
+                  <a:schemeClr val="dk1"/>
+                </a:solidFill>
+                <a:effectLst/>
+                <a:uFillTx/>
+                <a:latin typeface="Calibri"/>
+              </a:rPr>
+              <a:t>Click to edit Master title style</a:t>
+            </a:r>
+            <a:endParaRPr lang="en-US" sz="4400" b="0" u="none" strike="noStrike">
+              <a:solidFill>
+                <a:schemeClr val="dk1"/>
+              </a:solidFill>
+              <a:effectLst/>
+              <a:uFillTx/>
+              <a:latin typeface="Calibri"/>
+            </a:endParaRPr>
+          </a:p>
+        </p:txBody>
+      </p:sp>
+      <p:sp>
+        <p:nvSpPr>
+          <p:cNvPr id="23" name="PlaceHolder 2"/>
+          <p:cNvSpPr>
+            <a:spLocks noGrp="1"/>
+          </p:cNvSpPr>
+          <p:nvPr>
+            <p:ph type="body"/>
+          </p:nvPr>
+        </p:nvSpPr>
+        <p:spPr>
+          <a:xfrm>
+            <a:off x="457200" y="1600200"/>
+            <a:ext cx="4035600" cy="4523040"/>
           </a:xfrm>
           <a:prstGeom prst="rect">
             <a:avLst/>
@@ -2528,18 +4130,324 @@
       </p:sp>
       <p:sp>
         <p:nvSpPr>
-          <p:cNvPr id="10" name="PlaceHolder 4"/>
+          <p:cNvPr id="24" name="PlaceHolder 3"/>
           <p:cNvSpPr>
             <a:spLocks noGrp="1"/>
           </p:cNvSpPr>
           <p:nvPr>
-            <p:ph type="dt" idx="4"/>
+            <p:ph type="body"/>
+          </p:nvPr>
+        </p:nvSpPr>
+        <p:spPr>
+          <a:xfrm>
+            <a:off x="4648320" y="1600200"/>
+            <a:ext cx="4035600" cy="4523040"/>
+          </a:xfrm>
+          <a:prstGeom prst="rect">
+            <a:avLst/>
+          </a:prstGeom>
+          <a:noFill/>
+          <a:ln w="0">
+            <a:noFill/>
+          </a:ln>
+        </p:spPr>
+        <p:txBody>
+          <a:bodyPr lIns="91440" tIns="45720" rIns="91440" bIns="45720" anchor="t">
+            <a:noAutofit/>
+          </a:bodyPr>
+          <a:lstStyle>
+            <a:lvl1pPr algn="l" defTabSz="457200">
+              <a:lnSpc>
+                <a:spcPct val="100000"/>
+              </a:lnSpc>
+              <a:spcBef>
+                <a:spcPts val="561"/>
+              </a:spcBef>
+              <a:buClr>
+                <a:srgbClr val="000000"/>
+              </a:buClr>
+              <a:buFont typeface="Arial"/>
+              <a:buChar char="•"/>
+              <a:defRPr lang="en-US" sz="2800" b="0" u="none" strike="noStrike">
+                <a:solidFill>
+                  <a:schemeClr val="dk1"/>
+                </a:solidFill>
+                <a:effectLst/>
+                <a:uFillTx/>
+                <a:latin typeface="Calibri"/>
+              </a:defRPr>
+            </a:lvl1pPr>
+            <a:lvl2pPr lvl="1" algn="l" defTabSz="457200">
+              <a:lnSpc>
+                <a:spcPct val="100000"/>
+              </a:lnSpc>
+              <a:spcBef>
+                <a:spcPts val="479"/>
+              </a:spcBef>
+              <a:buClr>
+                <a:srgbClr val="000000"/>
+              </a:buClr>
+              <a:buFont typeface="Arial"/>
+              <a:buChar char="–"/>
+              <a:defRPr lang="en-US" sz="2400" b="0" u="none" strike="noStrike">
+                <a:solidFill>
+                  <a:schemeClr val="dk1"/>
+                </a:solidFill>
+                <a:effectLst/>
+                <a:uFillTx/>
+                <a:latin typeface="Calibri"/>
+              </a:defRPr>
+            </a:lvl2pPr>
+            <a:lvl3pPr lvl="2" algn="l" defTabSz="457200">
+              <a:lnSpc>
+                <a:spcPct val="100000"/>
+              </a:lnSpc>
+              <a:spcBef>
+                <a:spcPts val="400"/>
+              </a:spcBef>
+              <a:buClr>
+                <a:srgbClr val="000000"/>
+              </a:buClr>
+              <a:buFont typeface="Arial"/>
+              <a:buChar char="•"/>
+              <a:defRPr lang="en-US" sz="2000" b="0" u="none" strike="noStrike">
+                <a:solidFill>
+                  <a:schemeClr val="dk1"/>
+                </a:solidFill>
+                <a:effectLst/>
+                <a:uFillTx/>
+                <a:latin typeface="Calibri"/>
+              </a:defRPr>
+            </a:lvl3pPr>
+            <a:lvl4pPr lvl="3" algn="l" defTabSz="457200">
+              <a:lnSpc>
+                <a:spcPct val="100000"/>
+              </a:lnSpc>
+              <a:spcBef>
+                <a:spcPts val="360"/>
+              </a:spcBef>
+              <a:buClr>
+                <a:srgbClr val="000000"/>
+              </a:buClr>
+              <a:buFont typeface="Arial"/>
+              <a:buChar char="–"/>
+              <a:defRPr lang="en-US" sz="1800" b="0" u="none" strike="noStrike">
+                <a:solidFill>
+                  <a:schemeClr val="dk1"/>
+                </a:solidFill>
+                <a:effectLst/>
+                <a:uFillTx/>
+                <a:latin typeface="Calibri"/>
+              </a:defRPr>
+            </a:lvl4pPr>
+            <a:lvl5pPr lvl="4" algn="l" defTabSz="457200">
+              <a:lnSpc>
+                <a:spcPct val="100000"/>
+              </a:lnSpc>
+              <a:spcBef>
+                <a:spcPts val="360"/>
+              </a:spcBef>
+              <a:buClr>
+                <a:srgbClr val="000000"/>
+              </a:buClr>
+              <a:buFont typeface="Arial"/>
+              <a:buChar char="»"/>
+              <a:defRPr lang="en-US" sz="1800" b="0" u="none" strike="noStrike">
+                <a:solidFill>
+                  <a:schemeClr val="dk1"/>
+                </a:solidFill>
+                <a:effectLst/>
+                <a:uFillTx/>
+                <a:latin typeface="Calibri"/>
+              </a:defRPr>
+            </a:lvl5pPr>
+          </a:lstStyle>
+          <a:p>
+            <a:pPr marL="343080" indent="-343080" algn="l" defTabSz="457200">
+              <a:lnSpc>
+                <a:spcPct val="100000"/>
+              </a:lnSpc>
+              <a:spcBef>
+                <a:spcPts val="561"/>
+              </a:spcBef>
+              <a:buClr>
+                <a:srgbClr val="000000"/>
+              </a:buClr>
+              <a:buFont typeface="Arial"/>
+              <a:buChar char="•"/>
+            </a:pPr>
+            <a:r>
+              <a:rPr lang="en-US" sz="2800" b="0" u="none" strike="noStrike">
+                <a:solidFill>
+                  <a:schemeClr val="dk1"/>
+                </a:solidFill>
+                <a:effectLst/>
+                <a:uFillTx/>
+                <a:latin typeface="Calibri"/>
+              </a:rPr>
+              <a:t>Click to edit Master text styles</a:t>
+            </a:r>
+            <a:endParaRPr lang="en-US" sz="2800" b="0" u="none" strike="noStrike">
+              <a:solidFill>
+                <a:schemeClr val="dk1"/>
+              </a:solidFill>
+              <a:effectLst/>
+              <a:uFillTx/>
+              <a:latin typeface="Calibri"/>
+            </a:endParaRPr>
+          </a:p>
+          <a:p>
+            <a:pPr marL="743040" lvl="1" indent="-285840" algn="l" defTabSz="457200">
+              <a:lnSpc>
+                <a:spcPct val="100000"/>
+              </a:lnSpc>
+              <a:spcBef>
+                <a:spcPts val="479"/>
+              </a:spcBef>
+              <a:buClr>
+                <a:srgbClr val="000000"/>
+              </a:buClr>
+              <a:buFont typeface="Arial"/>
+              <a:buChar char="–"/>
+            </a:pPr>
+            <a:r>
+              <a:rPr lang="en-US" sz="2400" b="0" u="none" strike="noStrike">
+                <a:solidFill>
+                  <a:schemeClr val="dk1"/>
+                </a:solidFill>
+                <a:effectLst/>
+                <a:uFillTx/>
+                <a:latin typeface="Calibri"/>
+              </a:rPr>
+              <a:t>Second level</a:t>
+            </a:r>
+            <a:endParaRPr lang="en-US" sz="2400" b="0" u="none" strike="noStrike">
+              <a:solidFill>
+                <a:schemeClr val="dk1"/>
+              </a:solidFill>
+              <a:effectLst/>
+              <a:uFillTx/>
+              <a:latin typeface="Calibri"/>
+            </a:endParaRPr>
+          </a:p>
+          <a:p>
+            <a:pPr marL="1143000" lvl="2" indent="-228600" algn="l" defTabSz="457200">
+              <a:lnSpc>
+                <a:spcPct val="100000"/>
+              </a:lnSpc>
+              <a:spcBef>
+                <a:spcPts val="400"/>
+              </a:spcBef>
+              <a:buClr>
+                <a:srgbClr val="000000"/>
+              </a:buClr>
+              <a:buFont typeface="Arial"/>
+              <a:buChar char="•"/>
+            </a:pPr>
+            <a:r>
+              <a:rPr lang="en-US" sz="2000" b="0" u="none" strike="noStrike">
+                <a:solidFill>
+                  <a:schemeClr val="dk1"/>
+                </a:solidFill>
+                <a:effectLst/>
+                <a:uFillTx/>
+                <a:latin typeface="Calibri"/>
+              </a:rPr>
+              <a:t>Third level</a:t>
+            </a:r>
+            <a:endParaRPr lang="en-US" sz="2000" b="0" u="none" strike="noStrike">
+              <a:solidFill>
+                <a:schemeClr val="dk1"/>
+              </a:solidFill>
+              <a:effectLst/>
+              <a:uFillTx/>
+              <a:latin typeface="Calibri"/>
+            </a:endParaRPr>
+          </a:p>
+          <a:p>
+            <a:pPr marL="1600200" lvl="3" indent="-228600" algn="l" defTabSz="457200">
+              <a:lnSpc>
+                <a:spcPct val="100000"/>
+              </a:lnSpc>
+              <a:spcBef>
+                <a:spcPts val="360"/>
+              </a:spcBef>
+              <a:buClr>
+                <a:srgbClr val="000000"/>
+              </a:buClr>
+              <a:buFont typeface="Arial"/>
+              <a:buChar char="–"/>
+            </a:pPr>
+            <a:r>
+              <a:rPr lang="en-US" sz="1800" b="0" u="none" strike="noStrike">
+                <a:solidFill>
+                  <a:schemeClr val="dk1"/>
+                </a:solidFill>
+                <a:effectLst/>
+                <a:uFillTx/>
+                <a:latin typeface="Calibri"/>
+              </a:rPr>
+              <a:t>Fourth level</a:t>
+            </a:r>
+            <a:endParaRPr lang="en-US" sz="1800" b="0" u="none" strike="noStrike">
+              <a:solidFill>
+                <a:schemeClr val="dk1"/>
+              </a:solidFill>
+              <a:effectLst/>
+              <a:uFillTx/>
+              <a:latin typeface="Calibri"/>
+            </a:endParaRPr>
+          </a:p>
+          <a:p>
+            <a:pPr marL="2057400" lvl="4" indent="-228600" algn="l" defTabSz="457200">
+              <a:lnSpc>
+                <a:spcPct val="100000"/>
+              </a:lnSpc>
+              <a:spcBef>
+                <a:spcPts val="360"/>
+              </a:spcBef>
+              <a:buClr>
+                <a:srgbClr val="000000"/>
+              </a:buClr>
+              <a:buFont typeface="Arial"/>
+              <a:buChar char="»"/>
+            </a:pPr>
+            <a:r>
+              <a:rPr lang="en-US" sz="1800" b="0" u="none" strike="noStrike">
+                <a:solidFill>
+                  <a:schemeClr val="dk1"/>
+                </a:solidFill>
+                <a:effectLst/>
+                <a:uFillTx/>
+                <a:latin typeface="Calibri"/>
+              </a:rPr>
+              <a:t>Fifth level</a:t>
+            </a:r>
+            <a:endParaRPr lang="en-US" sz="1800" b="0" u="none" strike="noStrike">
+              <a:solidFill>
+                <a:schemeClr val="dk1"/>
+              </a:solidFill>
+              <a:effectLst/>
+              <a:uFillTx/>
+              <a:latin typeface="Calibri"/>
+            </a:endParaRPr>
+          </a:p>
+        </p:txBody>
+      </p:sp>
+      <p:sp>
+        <p:nvSpPr>
+          <p:cNvPr id="25" name="PlaceHolder 4"/>
+          <p:cNvSpPr>
+            <a:spLocks noGrp="1"/>
+          </p:cNvSpPr>
+          <p:nvPr>
+            <p:ph type="dt" idx="13"/>
           </p:nvPr>
         </p:nvSpPr>
         <p:spPr>
           <a:xfrm>
             <a:off x="457200" y="6356520"/>
-            <a:ext cx="2131200" cy="362520"/>
+            <a:ext cx="2130840" cy="362160"/>
           </a:xfrm>
           <a:prstGeom prst="rect">
             <a:avLst/>
@@ -2595,7 +4503,7 @@
                 <a:uFillTx/>
                 <a:latin typeface="Calibri"/>
               </a:rPr>
-              <a:t>&lt;date/time&gt;</a:t>
+              <a:t> </a:t>
             </a:r>
             <a:endParaRPr lang="en-US" sz="1200" b="0" u="none" strike="noStrike">
               <a:solidFill>
@@ -2610,18 +4518,18 @@
       </p:sp>
       <p:sp>
         <p:nvSpPr>
-          <p:cNvPr id="11" name="PlaceHolder 5"/>
+          <p:cNvPr id="26" name="PlaceHolder 5"/>
           <p:cNvSpPr>
             <a:spLocks noGrp="1"/>
           </p:cNvSpPr>
           <p:nvPr>
-            <p:ph type="ftr" idx="5"/>
+            <p:ph type="ftr" idx="14"/>
           </p:nvPr>
         </p:nvSpPr>
         <p:spPr>
           <a:xfrm>
             <a:off x="3124080" y="6356520"/>
-            <a:ext cx="2892960" cy="362520"/>
+            <a:ext cx="2892600" cy="362160"/>
           </a:xfrm>
           <a:prstGeom prst="rect">
             <a:avLst/>
@@ -2673,7 +4581,7 @@
                 <a:uFillTx/>
                 <a:latin typeface="Times New Roman"/>
               </a:rPr>
-              <a:t>&lt;footer&gt;</a:t>
+              <a:t> </a:t>
             </a:r>
             <a:endParaRPr lang="en-US" sz="1400" b="0" u="none" strike="noStrike">
               <a:solidFill>
@@ -2688,18 +4596,18 @@
       </p:sp>
       <p:sp>
         <p:nvSpPr>
-          <p:cNvPr id="12" name="PlaceHolder 6"/>
+          <p:cNvPr id="27" name="PlaceHolder 6"/>
           <p:cNvSpPr>
             <a:spLocks noGrp="1"/>
           </p:cNvSpPr>
           <p:nvPr>
-            <p:ph type="sldNum" idx="6"/>
+            <p:ph type="sldNum" idx="15"/>
           </p:nvPr>
         </p:nvSpPr>
         <p:spPr>
           <a:xfrm>
             <a:off x="6553080" y="6356520"/>
-            <a:ext cx="2131200" cy="362520"/>
+            <a:ext cx="2130840" cy="362160"/>
           </a:xfrm>
           <a:prstGeom prst="rect">
             <a:avLst/>
@@ -2744,7 +4652,7 @@
                 <a:tab pos="0" algn="l"/>
               </a:tabLst>
             </a:pPr>
-            <a:fld id="{3548D910-EB21-4684-8555-4E89BB6E2800}" type="slidenum">
+            <a:fld id="{A488B21E-8388-4640-B04E-44FA8A480372}" type="slidenum">
               <a:rPr lang="en-US" sz="1200" b="0" u="none" strike="noStrike">
                 <a:solidFill>
                   <a:schemeClr val="dk1">
@@ -2755,7 +4663,7 @@
                 <a:uFillTx/>
                 <a:latin typeface="Calibri"/>
               </a:rPr>
-              <a:t>&lt;number&gt;</a:t>
+              <a:t>1</a:t>
             </a:fld>
             <a:endParaRPr lang="en-US" sz="1200" b="0" u="none" strike="noStrike">
               <a:solidFill>
@@ -2773,7 +4681,7 @@
 </p:sldLayout>
 </file>
 
-<file path=ppt/slideLayouts/slideLayout3.xml><?xml version="1.0" encoding="utf-8"?>
+<file path=ppt/slideLayouts/slideLayout6.xml><?xml version="1.0" encoding="utf-8"?>
 <p:sldLayout xmlns:a="http://schemas.openxmlformats.org/drawingml/2006/main" xmlns:p="http://schemas.openxmlformats.org/presentationml/2006/main" xmlns:r="http://schemas.openxmlformats.org/officeDocument/2006/relationships" xmlns:p14="http://schemas.microsoft.com/office/powerpoint/2010/main" xmlns:p15="http://schemas.microsoft.com/office/powerpoint/2012/main" xmlns:mc="http://schemas.openxmlformats.org/markup-compatibility/2006" type="blank" preserve="1">
   <p:cSld name="Comparison">
     <p:bg>
@@ -2799,7 +4707,7 @@
       </p:grpSpPr>
       <p:sp>
         <p:nvSpPr>
-          <p:cNvPr id="13" name="PlaceHolder 1"/>
+          <p:cNvPr id="28" name="PlaceHolder 1"/>
           <p:cNvSpPr>
             <a:spLocks noGrp="1"/>
           </p:cNvSpPr>
@@ -2810,7 +4718,7 @@
         <p:spPr>
           <a:xfrm>
             <a:off x="457200" y="274680"/>
-            <a:ext cx="8227080" cy="1140480"/>
+            <a:ext cx="8226720" cy="1140120"/>
           </a:xfrm>
           <a:prstGeom prst="rect">
             <a:avLst/>
@@ -2862,40 +4770,7 @@
                 <a:uFillTx/>
                 <a:latin typeface="Calibri"/>
               </a:rPr>
-              <a:t>Click to </a:t>
-            </a:r>
-            <a:r>
-              <a:rPr lang="en-US" sz="4400" b="0" u="none" strike="noStrike">
-                <a:solidFill>
-                  <a:schemeClr val="dk1"/>
-                </a:solidFill>
-                <a:effectLst/>
-                <a:uFillTx/>
-                <a:latin typeface="Calibri"/>
-              </a:rPr>
-              <a:t>edit </a:t>
-            </a:r>
-            <a:r>
-              <a:rPr lang="en-US" sz="4400" b="0" u="none" strike="noStrike">
-                <a:solidFill>
-                  <a:schemeClr val="dk1"/>
-                </a:solidFill>
-                <a:effectLst/>
-                <a:uFillTx/>
-                <a:latin typeface="Calibri"/>
-              </a:rPr>
-              <a:t>Master </a:t>
-            </a:r>
-            <a:r>
-              <a:rPr lang="en-US" sz="4400" b="0" u="none" strike="noStrike">
-                <a:solidFill>
-                  <a:schemeClr val="dk1"/>
-                </a:solidFill>
-                <a:effectLst/>
-                <a:uFillTx/>
-                <a:latin typeface="Calibri"/>
-              </a:rPr>
-              <a:t>title style</a:t>
+              <a:t>Click to edit Master title style</a:t>
             </a:r>
             <a:endParaRPr lang="en-US" sz="4400" b="0" u="none" strike="noStrike">
               <a:solidFill>
@@ -2910,7 +4785,7 @@
       </p:sp>
       <p:sp>
         <p:nvSpPr>
-          <p:cNvPr id="14" name="PlaceHolder 2"/>
+          <p:cNvPr id="29" name="PlaceHolder 2"/>
           <p:cNvSpPr>
             <a:spLocks noGrp="1"/>
           </p:cNvSpPr>
@@ -2921,7 +4796,7 @@
         <p:spPr>
           <a:xfrm>
             <a:off x="457200" y="1535040"/>
-            <a:ext cx="4037760" cy="637200"/>
+            <a:ext cx="4037400" cy="636840"/>
           </a:xfrm>
           <a:prstGeom prst="rect">
             <a:avLst/>
@@ -2994,7 +4869,7 @@
       </p:sp>
       <p:sp>
         <p:nvSpPr>
-          <p:cNvPr id="15" name="PlaceHolder 3"/>
+          <p:cNvPr id="30" name="PlaceHolder 3"/>
           <p:cNvSpPr>
             <a:spLocks noGrp="1"/>
           </p:cNvSpPr>
@@ -3005,7 +4880,7 @@
         <p:spPr>
           <a:xfrm>
             <a:off x="457200" y="2174760"/>
-            <a:ext cx="4037760" cy="3948840"/>
+            <a:ext cx="4037400" cy="3948480"/>
           </a:xfrm>
           <a:prstGeom prst="rect">
             <a:avLst/>
@@ -3330,7 +5205,7 @@
       </p:sp>
       <p:sp>
         <p:nvSpPr>
-          <p:cNvPr id="16" name="PlaceHolder 4"/>
+          <p:cNvPr id="31" name="PlaceHolder 4"/>
           <p:cNvSpPr>
             <a:spLocks noGrp="1"/>
           </p:cNvSpPr>
@@ -3341,7 +5216,7 @@
         <p:spPr>
           <a:xfrm>
             <a:off x="4645080" y="1535040"/>
-            <a:ext cx="4039200" cy="637200"/>
+            <a:ext cx="4038840" cy="636840"/>
           </a:xfrm>
           <a:prstGeom prst="rect">
             <a:avLst/>
@@ -3414,7 +5289,7 @@
       </p:sp>
       <p:sp>
         <p:nvSpPr>
-          <p:cNvPr id="17" name="PlaceHolder 5"/>
+          <p:cNvPr id="32" name="PlaceHolder 5"/>
           <p:cNvSpPr>
             <a:spLocks noGrp="1"/>
           </p:cNvSpPr>
@@ -3425,7 +5300,7 @@
         <p:spPr>
           <a:xfrm>
             <a:off x="4645080" y="2174760"/>
-            <a:ext cx="4039200" cy="3948840"/>
+            <a:ext cx="4038840" cy="3948480"/>
           </a:xfrm>
           <a:prstGeom prst="rect">
             <a:avLst/>
@@ -3750,18 +5625,18 @@
       </p:sp>
       <p:sp>
         <p:nvSpPr>
-          <p:cNvPr id="18" name="PlaceHolder 6"/>
+          <p:cNvPr id="33" name="PlaceHolder 6"/>
           <p:cNvSpPr>
             <a:spLocks noGrp="1"/>
           </p:cNvSpPr>
           <p:nvPr>
-            <p:ph type="dt" idx="7"/>
+            <p:ph type="dt" idx="16"/>
           </p:nvPr>
         </p:nvSpPr>
         <p:spPr>
           <a:xfrm>
             <a:off x="457200" y="6356520"/>
-            <a:ext cx="2131200" cy="362520"/>
+            <a:ext cx="2130840" cy="362160"/>
           </a:xfrm>
           <a:prstGeom prst="rect">
             <a:avLst/>
@@ -3817,7 +5692,7 @@
                 <a:uFillTx/>
                 <a:latin typeface="Calibri"/>
               </a:rPr>
-              <a:t>&lt;date/time&gt;</a:t>
+              <a:t> </a:t>
             </a:r>
             <a:endParaRPr lang="en-US" sz="1200" b="0" u="none" strike="noStrike">
               <a:solidFill>
@@ -3832,18 +5707,18 @@
       </p:sp>
       <p:sp>
         <p:nvSpPr>
-          <p:cNvPr id="19" name="PlaceHolder 7"/>
+          <p:cNvPr id="34" name="PlaceHolder 7"/>
           <p:cNvSpPr>
             <a:spLocks noGrp="1"/>
           </p:cNvSpPr>
           <p:nvPr>
-            <p:ph type="ftr" idx="8"/>
+            <p:ph type="ftr" idx="17"/>
           </p:nvPr>
         </p:nvSpPr>
         <p:spPr>
           <a:xfrm>
             <a:off x="3124080" y="6356520"/>
-            <a:ext cx="2892960" cy="362520"/>
+            <a:ext cx="2892600" cy="362160"/>
           </a:xfrm>
           <a:prstGeom prst="rect">
             <a:avLst/>
@@ -3895,7 +5770,7 @@
                 <a:uFillTx/>
                 <a:latin typeface="Times New Roman"/>
               </a:rPr>
-              <a:t>&lt;footer&gt;</a:t>
+              <a:t> </a:t>
             </a:r>
             <a:endParaRPr lang="en-US" sz="1400" b="0" u="none" strike="noStrike">
               <a:solidFill>
@@ -3910,18 +5785,18 @@
       </p:sp>
       <p:sp>
         <p:nvSpPr>
-          <p:cNvPr id="20" name="PlaceHolder 8"/>
+          <p:cNvPr id="35" name="PlaceHolder 8"/>
           <p:cNvSpPr>
             <a:spLocks noGrp="1"/>
           </p:cNvSpPr>
           <p:nvPr>
-            <p:ph type="sldNum" idx="9"/>
+            <p:ph type="sldNum" idx="18"/>
           </p:nvPr>
         </p:nvSpPr>
         <p:spPr>
           <a:xfrm>
             <a:off x="6553080" y="6356520"/>
-            <a:ext cx="2131200" cy="362520"/>
+            <a:ext cx="2130840" cy="362160"/>
           </a:xfrm>
           <a:prstGeom prst="rect">
             <a:avLst/>
@@ -3966,7 +5841,7 @@
                 <a:tab pos="0" algn="l"/>
               </a:tabLst>
             </a:pPr>
-            <a:fld id="{9957542A-2A29-4DD1-84EE-3036B82F4F66}" type="slidenum">
+            <a:fld id="{E6D19335-46EB-4C54-B6D4-AFC3EDB470A5}" type="slidenum">
               <a:rPr lang="en-US" sz="1200" b="0" u="none" strike="noStrike">
                 <a:solidFill>
                   <a:schemeClr val="dk1">
@@ -3977,1872 +5852,7 @@
                 <a:uFillTx/>
                 <a:latin typeface="Calibri"/>
               </a:rPr>
-              <a:t>&lt;number&gt;</a:t>
-            </a:fld>
-            <a:endParaRPr lang="en-US" sz="1200" b="0" u="none" strike="noStrike">
-              <a:solidFill>
-                <a:srgbClr val="000000"/>
-              </a:solidFill>
-              <a:effectLst/>
-              <a:uFillTx/>
-              <a:latin typeface="Times New Roman"/>
-            </a:endParaRPr>
-          </a:p>
-        </p:txBody>
-      </p:sp>
-    </p:spTree>
-  </p:cSld>
-</p:sldLayout>
-</file>
-
-<file path=ppt/slideLayouts/slideLayout4.xml><?xml version="1.0" encoding="utf-8"?>
-<p:sldLayout xmlns:a="http://schemas.openxmlformats.org/drawingml/2006/main" xmlns:p="http://schemas.openxmlformats.org/presentationml/2006/main" xmlns:r="http://schemas.openxmlformats.org/officeDocument/2006/relationships" xmlns:p14="http://schemas.microsoft.com/office/powerpoint/2010/main" xmlns:p15="http://schemas.microsoft.com/office/powerpoint/2012/main" xmlns:mc="http://schemas.openxmlformats.org/markup-compatibility/2006" type="titleOnly" preserve="1">
-  <p:cSld name="Title Only">
-    <p:bg>
-      <p:bgPr>
-        <a:solidFill>
-          <a:srgbClr val="FFFFFF"/>
-        </a:solidFill>
-      </p:bgPr>
-    </p:bg>
-    <p:spTree>
-      <p:nvGrpSpPr>
-        <p:cNvPr id="1" name=""/>
-        <p:cNvGrpSpPr/>
-        <p:nvPr/>
-      </p:nvGrpSpPr>
-      <p:grpSpPr>
-        <a:xfrm>
-          <a:off x="0" y="0"/>
-          <a:ext cx="0" cy="0"/>
-          <a:chOff x="0" y="0"/>
-          <a:chExt cx="0" cy="0"/>
-        </a:xfrm>
-      </p:grpSpPr>
-      <p:sp>
-        <p:nvSpPr>
-          <p:cNvPr id="21" name="PlaceHolder 1"/>
-          <p:cNvSpPr>
-            <a:spLocks noGrp="1"/>
-          </p:cNvSpPr>
-          <p:nvPr>
-            <p:ph type="title"/>
-          </p:nvPr>
-        </p:nvSpPr>
-        <p:spPr>
-          <a:xfrm>
-            <a:off x="457200" y="274680"/>
-            <a:ext cx="8227080" cy="1140480"/>
-          </a:xfrm>
-          <a:prstGeom prst="rect">
-            <a:avLst/>
-          </a:prstGeom>
-          <a:noFill/>
-          <a:ln w="0">
-            <a:noFill/>
-          </a:ln>
-        </p:spPr>
-        <p:txBody>
-          <a:bodyPr lIns="91440" tIns="45720" rIns="91440" bIns="45720" anchor="ctr">
-            <a:noAutofit/>
-          </a:bodyPr>
-          <a:lstStyle>
-            <a:lvl1pPr indent="0" algn="ctr" defTabSz="457200">
-              <a:lnSpc>
-                <a:spcPct val="100000"/>
-              </a:lnSpc>
-              <a:buNone/>
-              <a:tabLst>
-                <a:tab pos="0" algn="l"/>
-              </a:tabLst>
-              <a:defRPr lang="en-US" sz="4400" b="0" u="none" strike="noStrike">
-                <a:solidFill>
-                  <a:schemeClr val="dk1"/>
-                </a:solidFill>
-                <a:effectLst/>
-                <a:uFillTx/>
-                <a:latin typeface="Calibri"/>
-              </a:defRPr>
-            </a:lvl1pPr>
-          </a:lstStyle>
-          <a:p>
-            <a:pPr indent="0" algn="ctr" defTabSz="457200">
-              <a:lnSpc>
-                <a:spcPct val="100000"/>
-              </a:lnSpc>
-              <a:buNone/>
-              <a:tabLst>
-                <a:tab pos="0" algn="l"/>
-              </a:tabLst>
-            </a:pPr>
-            <a:r>
-              <a:rPr lang="en-US" sz="4400" b="0" u="none" strike="noStrike">
-                <a:solidFill>
-                  <a:schemeClr val="dk1"/>
-                </a:solidFill>
-                <a:effectLst/>
-                <a:uFillTx/>
-                <a:latin typeface="Calibri"/>
-              </a:rPr>
-              <a:t>Click to edit Master title style</a:t>
-            </a:r>
-            <a:endParaRPr lang="en-US" sz="4400" b="0" u="none" strike="noStrike">
-              <a:solidFill>
-                <a:schemeClr val="dk1"/>
-              </a:solidFill>
-              <a:effectLst/>
-              <a:uFillTx/>
-              <a:latin typeface="Calibri"/>
-            </a:endParaRPr>
-          </a:p>
-        </p:txBody>
-      </p:sp>
-      <p:sp>
-        <p:nvSpPr>
-          <p:cNvPr id="22" name="PlaceHolder 2"/>
-          <p:cNvSpPr>
-            <a:spLocks noGrp="1"/>
-          </p:cNvSpPr>
-          <p:nvPr>
-            <p:ph type="dt" idx="10"/>
-          </p:nvPr>
-        </p:nvSpPr>
-        <p:spPr>
-          <a:xfrm>
-            <a:off x="457200" y="6356520"/>
-            <a:ext cx="2131200" cy="362520"/>
-          </a:xfrm>
-          <a:prstGeom prst="rect">
-            <a:avLst/>
-          </a:prstGeom>
-          <a:noFill/>
-          <a:ln w="0">
-            <a:noFill/>
-          </a:ln>
-        </p:spPr>
-        <p:txBody>
-          <a:bodyPr lIns="91440" tIns="45720" rIns="91440" bIns="45720" anchor="ctr">
-            <a:noAutofit/>
-          </a:bodyPr>
-          <a:lstStyle>
-            <a:lvl1pPr indent="0" algn="l" defTabSz="457200">
-              <a:lnSpc>
-                <a:spcPct val="100000"/>
-              </a:lnSpc>
-              <a:buNone/>
-              <a:tabLst>
-                <a:tab pos="0" algn="l"/>
-              </a:tabLst>
-              <a:defRPr lang="en-US" sz="1200" b="0" u="none" strike="noStrike">
-                <a:solidFill>
-                  <a:schemeClr val="dk1">
-                    <a:tint val="75000"/>
-                  </a:schemeClr>
-                </a:solidFill>
-                <a:effectLst/>
-                <a:uFillTx/>
-                <a:latin typeface="Calibri"/>
-              </a:defRPr>
-            </a:lvl1pPr>
-          </a:lstStyle>
-          <a:p>
-            <a:pPr indent="0" algn="l" defTabSz="457200">
-              <a:lnSpc>
-                <a:spcPct val="100000"/>
-              </a:lnSpc>
-              <a:buNone/>
-              <a:tabLst>
-                <a:tab pos="0" algn="l"/>
-              </a:tabLst>
-            </a:pPr>
-            <a:r>
-              <a:rPr lang="en-US" sz="1200" b="0" u="none" strike="noStrike">
-                <a:solidFill>
-                  <a:schemeClr val="dk1">
-                    <a:tint val="75000"/>
-                  </a:schemeClr>
-                </a:solidFill>
-                <a:effectLst/>
-                <a:uFillTx/>
-                <a:latin typeface="Calibri"/>
-              </a:rPr>
-              <a:t>&lt;date/time&gt;</a:t>
-            </a:r>
-            <a:endParaRPr lang="en-US" sz="1200" b="0" u="none" strike="noStrike">
-              <a:solidFill>
-                <a:srgbClr val="000000"/>
-              </a:solidFill>
-              <a:effectLst/>
-              <a:uFillTx/>
-              <a:latin typeface="Times New Roman"/>
-            </a:endParaRPr>
-          </a:p>
-        </p:txBody>
-      </p:sp>
-      <p:sp>
-        <p:nvSpPr>
-          <p:cNvPr id="23" name="PlaceHolder 3"/>
-          <p:cNvSpPr>
-            <a:spLocks noGrp="1"/>
-          </p:cNvSpPr>
-          <p:nvPr>
-            <p:ph type="ftr" idx="11"/>
-          </p:nvPr>
-        </p:nvSpPr>
-        <p:spPr>
-          <a:xfrm>
-            <a:off x="3124080" y="6356520"/>
-            <a:ext cx="2892960" cy="362520"/>
-          </a:xfrm>
-          <a:prstGeom prst="rect">
-            <a:avLst/>
-          </a:prstGeom>
-          <a:noFill/>
-          <a:ln w="0">
-            <a:noFill/>
-          </a:ln>
-        </p:spPr>
-        <p:txBody>
-          <a:bodyPr lIns="91440" tIns="45720" rIns="91440" bIns="45720" anchor="ctr">
-            <a:noAutofit/>
-          </a:bodyPr>
-          <a:lstStyle>
-            <a:lvl1pPr indent="0" algn="ctr">
-              <a:lnSpc>
-                <a:spcPct val="100000"/>
-              </a:lnSpc>
-              <a:buNone/>
-              <a:tabLst>
-                <a:tab pos="0" algn="l"/>
-              </a:tabLst>
-              <a:defRPr lang="en-US" sz="1400" b="0" u="none" strike="noStrike">
-                <a:solidFill>
-                  <a:srgbClr val="000000"/>
-                </a:solidFill>
-                <a:effectLst/>
-                <a:uFillTx/>
-                <a:latin typeface="Times New Roman"/>
-              </a:defRPr>
-            </a:lvl1pPr>
-          </a:lstStyle>
-          <a:p>
-            <a:pPr indent="0" algn="ctr">
-              <a:lnSpc>
-                <a:spcPct val="100000"/>
-              </a:lnSpc>
-              <a:buNone/>
-              <a:tabLst>
-                <a:tab pos="0" algn="l"/>
-              </a:tabLst>
-            </a:pPr>
-            <a:r>
-              <a:rPr lang="en-US" sz="1400" b="0" u="none" strike="noStrike">
-                <a:solidFill>
-                  <a:srgbClr val="000000"/>
-                </a:solidFill>
-                <a:effectLst/>
-                <a:uFillTx/>
-                <a:latin typeface="Times New Roman"/>
-              </a:rPr>
-              <a:t>&lt;footer&gt;</a:t>
-            </a:r>
-            <a:endParaRPr lang="en-US" sz="1400" b="0" u="none" strike="noStrike">
-              <a:solidFill>
-                <a:srgbClr val="000000"/>
-              </a:solidFill>
-              <a:effectLst/>
-              <a:uFillTx/>
-              <a:latin typeface="Times New Roman"/>
-            </a:endParaRPr>
-          </a:p>
-        </p:txBody>
-      </p:sp>
-      <p:sp>
-        <p:nvSpPr>
-          <p:cNvPr id="24" name="PlaceHolder 4"/>
-          <p:cNvSpPr>
-            <a:spLocks noGrp="1"/>
-          </p:cNvSpPr>
-          <p:nvPr>
-            <p:ph type="sldNum" idx="12"/>
-          </p:nvPr>
-        </p:nvSpPr>
-        <p:spPr>
-          <a:xfrm>
-            <a:off x="6553080" y="6356520"/>
-            <a:ext cx="2131200" cy="362520"/>
-          </a:xfrm>
-          <a:prstGeom prst="rect">
-            <a:avLst/>
-          </a:prstGeom>
-          <a:noFill/>
-          <a:ln w="0">
-            <a:noFill/>
-          </a:ln>
-        </p:spPr>
-        <p:txBody>
-          <a:bodyPr lIns="91440" tIns="45720" rIns="91440" bIns="45720" anchor="ctr">
-            <a:noAutofit/>
-          </a:bodyPr>
-          <a:lstStyle>
-            <a:lvl1pPr indent="0" algn="r" defTabSz="457200">
-              <a:lnSpc>
-                <a:spcPct val="100000"/>
-              </a:lnSpc>
-              <a:buNone/>
-              <a:tabLst>
-                <a:tab pos="0" algn="l"/>
-              </a:tabLst>
-              <a:defRPr lang="en-US" sz="1200" b="0" u="none" strike="noStrike">
-                <a:solidFill>
-                  <a:schemeClr val="dk1">
-                    <a:tint val="75000"/>
-                  </a:schemeClr>
-                </a:solidFill>
-                <a:effectLst/>
-                <a:uFillTx/>
-                <a:latin typeface="Calibri"/>
-              </a:defRPr>
-            </a:lvl1pPr>
-          </a:lstStyle>
-          <a:p>
-            <a:pPr indent="0" algn="r" defTabSz="457200">
-              <a:lnSpc>
-                <a:spcPct val="100000"/>
-              </a:lnSpc>
-              <a:buNone/>
-              <a:tabLst>
-                <a:tab pos="0" algn="l"/>
-              </a:tabLst>
-            </a:pPr>
-            <a:fld id="{D0785AB8-FD3A-424A-BA5D-C6FC2A3B10C6}" type="slidenum">
-              <a:rPr lang="en-US" sz="1200" b="0" u="none" strike="noStrike">
-                <a:solidFill>
-                  <a:schemeClr val="dk1">
-                    <a:tint val="75000"/>
-                  </a:schemeClr>
-                </a:solidFill>
-                <a:effectLst/>
-                <a:uFillTx/>
-                <a:latin typeface="Calibri"/>
-              </a:rPr>
-              <a:t>&lt;number&gt;</a:t>
-            </a:fld>
-            <a:endParaRPr lang="en-US" sz="1200" b="0" u="none" strike="noStrike">
-              <a:solidFill>
-                <a:srgbClr val="000000"/>
-              </a:solidFill>
-              <a:effectLst/>
-              <a:uFillTx/>
-              <a:latin typeface="Times New Roman"/>
-            </a:endParaRPr>
-          </a:p>
-        </p:txBody>
-      </p:sp>
-    </p:spTree>
-  </p:cSld>
-</p:sldLayout>
-</file>
-
-<file path=ppt/slideLayouts/slideLayout5.xml><?xml version="1.0" encoding="utf-8"?>
-<p:sldLayout xmlns:a="http://schemas.openxmlformats.org/drawingml/2006/main" xmlns:p="http://schemas.openxmlformats.org/presentationml/2006/main" xmlns:r="http://schemas.openxmlformats.org/officeDocument/2006/relationships" xmlns:p14="http://schemas.microsoft.com/office/powerpoint/2010/main" xmlns:p15="http://schemas.microsoft.com/office/powerpoint/2012/main" xmlns:mc="http://schemas.openxmlformats.org/markup-compatibility/2006" type="blank" preserve="1">
-  <p:cSld name="Blank">
-    <p:bg>
-      <p:bgPr>
-        <a:solidFill>
-          <a:srgbClr val="FFFFFF"/>
-        </a:solidFill>
-      </p:bgPr>
-    </p:bg>
-    <p:spTree>
-      <p:nvGrpSpPr>
-        <p:cNvPr id="1" name=""/>
-        <p:cNvGrpSpPr/>
-        <p:nvPr/>
-      </p:nvGrpSpPr>
-      <p:grpSpPr>
-        <a:xfrm>
-          <a:off x="0" y="0"/>
-          <a:ext cx="0" cy="0"/>
-          <a:chOff x="0" y="0"/>
-          <a:chExt cx="0" cy="0"/>
-        </a:xfrm>
-      </p:grpSpPr>
-      <p:sp>
-        <p:nvSpPr>
-          <p:cNvPr id="25" name="PlaceHolder 1"/>
-          <p:cNvSpPr>
-            <a:spLocks noGrp="1"/>
-          </p:cNvSpPr>
-          <p:nvPr>
-            <p:ph type="dt" idx="13"/>
-          </p:nvPr>
-        </p:nvSpPr>
-        <p:spPr>
-          <a:xfrm>
-            <a:off x="457200" y="6356520"/>
-            <a:ext cx="2131200" cy="362520"/>
-          </a:xfrm>
-          <a:prstGeom prst="rect">
-            <a:avLst/>
-          </a:prstGeom>
-          <a:noFill/>
-          <a:ln w="0">
-            <a:noFill/>
-          </a:ln>
-        </p:spPr>
-        <p:txBody>
-          <a:bodyPr lIns="91440" tIns="45720" rIns="91440" bIns="45720" anchor="ctr">
-            <a:noAutofit/>
-          </a:bodyPr>
-          <a:lstStyle>
-            <a:lvl1pPr indent="0" algn="l" defTabSz="457200">
-              <a:lnSpc>
-                <a:spcPct val="100000"/>
-              </a:lnSpc>
-              <a:buNone/>
-              <a:tabLst>
-                <a:tab pos="0" algn="l"/>
-              </a:tabLst>
-              <a:defRPr lang="en-US" sz="1200" b="0" u="none" strike="noStrike">
-                <a:solidFill>
-                  <a:schemeClr val="dk1">
-                    <a:tint val="75000"/>
-                  </a:schemeClr>
-                </a:solidFill>
-                <a:effectLst/>
-                <a:uFillTx/>
-                <a:latin typeface="Calibri"/>
-              </a:defRPr>
-            </a:lvl1pPr>
-          </a:lstStyle>
-          <a:p>
-            <a:pPr indent="0" algn="l" defTabSz="457200">
-              <a:lnSpc>
-                <a:spcPct val="100000"/>
-              </a:lnSpc>
-              <a:buNone/>
-              <a:tabLst>
-                <a:tab pos="0" algn="l"/>
-              </a:tabLst>
-            </a:pPr>
-            <a:r>
-              <a:rPr lang="en-US" sz="1200" b="0" u="none" strike="noStrike">
-                <a:solidFill>
-                  <a:schemeClr val="dk1">
-                    <a:tint val="75000"/>
-                  </a:schemeClr>
-                </a:solidFill>
-                <a:effectLst/>
-                <a:uFillTx/>
-                <a:latin typeface="Calibri"/>
-              </a:rPr>
-              <a:t>&lt;date/time&gt;</a:t>
-            </a:r>
-            <a:endParaRPr lang="en-US" sz="1200" b="0" u="none" strike="noStrike">
-              <a:solidFill>
-                <a:srgbClr val="000000"/>
-              </a:solidFill>
-              <a:effectLst/>
-              <a:uFillTx/>
-              <a:latin typeface="Times New Roman"/>
-            </a:endParaRPr>
-          </a:p>
-        </p:txBody>
-      </p:sp>
-      <p:sp>
-        <p:nvSpPr>
-          <p:cNvPr id="26" name="PlaceHolder 2"/>
-          <p:cNvSpPr>
-            <a:spLocks noGrp="1"/>
-          </p:cNvSpPr>
-          <p:nvPr>
-            <p:ph type="ftr" idx="14"/>
-          </p:nvPr>
-        </p:nvSpPr>
-        <p:spPr>
-          <a:xfrm>
-            <a:off x="3124080" y="6356520"/>
-            <a:ext cx="2892960" cy="362520"/>
-          </a:xfrm>
-          <a:prstGeom prst="rect">
-            <a:avLst/>
-          </a:prstGeom>
-          <a:noFill/>
-          <a:ln w="0">
-            <a:noFill/>
-          </a:ln>
-        </p:spPr>
-        <p:txBody>
-          <a:bodyPr lIns="91440" tIns="45720" rIns="91440" bIns="45720" anchor="ctr">
-            <a:noAutofit/>
-          </a:bodyPr>
-          <a:lstStyle>
-            <a:lvl1pPr indent="0" algn="ctr">
-              <a:lnSpc>
-                <a:spcPct val="100000"/>
-              </a:lnSpc>
-              <a:buNone/>
-              <a:tabLst>
-                <a:tab pos="0" algn="l"/>
-              </a:tabLst>
-              <a:defRPr lang="en-US" sz="1400" b="0" u="none" strike="noStrike">
-                <a:solidFill>
-                  <a:srgbClr val="000000"/>
-                </a:solidFill>
-                <a:effectLst/>
-                <a:uFillTx/>
-                <a:latin typeface="Times New Roman"/>
-              </a:defRPr>
-            </a:lvl1pPr>
-          </a:lstStyle>
-          <a:p>
-            <a:pPr indent="0" algn="ctr">
-              <a:lnSpc>
-                <a:spcPct val="100000"/>
-              </a:lnSpc>
-              <a:buNone/>
-              <a:tabLst>
-                <a:tab pos="0" algn="l"/>
-              </a:tabLst>
-            </a:pPr>
-            <a:r>
-              <a:rPr lang="en-US" sz="1400" b="0" u="none" strike="noStrike">
-                <a:solidFill>
-                  <a:srgbClr val="000000"/>
-                </a:solidFill>
-                <a:effectLst/>
-                <a:uFillTx/>
-                <a:latin typeface="Times New Roman"/>
-              </a:rPr>
-              <a:t>&lt;footer&gt;</a:t>
-            </a:r>
-            <a:endParaRPr lang="en-US" sz="1400" b="0" u="none" strike="noStrike">
-              <a:solidFill>
-                <a:srgbClr val="000000"/>
-              </a:solidFill>
-              <a:effectLst/>
-              <a:uFillTx/>
-              <a:latin typeface="Times New Roman"/>
-            </a:endParaRPr>
-          </a:p>
-        </p:txBody>
-      </p:sp>
-      <p:sp>
-        <p:nvSpPr>
-          <p:cNvPr id="27" name="PlaceHolder 3"/>
-          <p:cNvSpPr>
-            <a:spLocks noGrp="1"/>
-          </p:cNvSpPr>
-          <p:nvPr>
-            <p:ph type="sldNum" idx="15"/>
-          </p:nvPr>
-        </p:nvSpPr>
-        <p:spPr>
-          <a:xfrm>
-            <a:off x="6553080" y="6356520"/>
-            <a:ext cx="2131200" cy="362520"/>
-          </a:xfrm>
-          <a:prstGeom prst="rect">
-            <a:avLst/>
-          </a:prstGeom>
-          <a:noFill/>
-          <a:ln w="0">
-            <a:noFill/>
-          </a:ln>
-        </p:spPr>
-        <p:txBody>
-          <a:bodyPr lIns="91440" tIns="45720" rIns="91440" bIns="45720" anchor="ctr">
-            <a:noAutofit/>
-          </a:bodyPr>
-          <a:lstStyle>
-            <a:lvl1pPr indent="0" algn="r" defTabSz="457200">
-              <a:lnSpc>
-                <a:spcPct val="100000"/>
-              </a:lnSpc>
-              <a:buNone/>
-              <a:tabLst>
-                <a:tab pos="0" algn="l"/>
-              </a:tabLst>
-              <a:defRPr lang="en-US" sz="1200" b="0" u="none" strike="noStrike">
-                <a:solidFill>
-                  <a:schemeClr val="dk1">
-                    <a:tint val="75000"/>
-                  </a:schemeClr>
-                </a:solidFill>
-                <a:effectLst/>
-                <a:uFillTx/>
-                <a:latin typeface="Calibri"/>
-              </a:defRPr>
-            </a:lvl1pPr>
-          </a:lstStyle>
-          <a:p>
-            <a:pPr indent="0" algn="r" defTabSz="457200">
-              <a:lnSpc>
-                <a:spcPct val="100000"/>
-              </a:lnSpc>
-              <a:buNone/>
-              <a:tabLst>
-                <a:tab pos="0" algn="l"/>
-              </a:tabLst>
-            </a:pPr>
-            <a:fld id="{18C1982D-294F-4644-AB58-73A1BF0CBCB6}" type="slidenum">
-              <a:rPr lang="en-US" sz="1200" b="0" u="none" strike="noStrike">
-                <a:solidFill>
-                  <a:schemeClr val="dk1">
-                    <a:tint val="75000"/>
-                  </a:schemeClr>
-                </a:solidFill>
-                <a:effectLst/>
-                <a:uFillTx/>
-                <a:latin typeface="Calibri"/>
-              </a:rPr>
-              <a:t>&lt;number&gt;</a:t>
-            </a:fld>
-            <a:endParaRPr lang="en-US" sz="1200" b="0" u="none" strike="noStrike">
-              <a:solidFill>
-                <a:srgbClr val="000000"/>
-              </a:solidFill>
-              <a:effectLst/>
-              <a:uFillTx/>
-              <a:latin typeface="Times New Roman"/>
-            </a:endParaRPr>
-          </a:p>
-        </p:txBody>
-      </p:sp>
-      <p:sp>
-        <p:nvSpPr>
-          <p:cNvPr id="28" name="PlaceHolder 4"/>
-          <p:cNvSpPr>
-            <a:spLocks noGrp="1"/>
-          </p:cNvSpPr>
-          <p:nvPr>
-            <p:ph type="title"/>
-          </p:nvPr>
-        </p:nvSpPr>
-        <p:spPr>
-          <a:xfrm>
-            <a:off x="609480" y="273600"/>
-            <a:ext cx="10970280" cy="1142640"/>
-          </a:xfrm>
-          <a:prstGeom prst="rect">
-            <a:avLst/>
-          </a:prstGeom>
-          <a:noFill/>
-          <a:ln w="0">
-            <a:noFill/>
-          </a:ln>
-        </p:spPr>
-        <p:txBody>
-          <a:bodyPr lIns="0" tIns="0" rIns="0" bIns="0" anchor="ctr">
-            <a:noAutofit/>
-          </a:bodyPr>
-          <a:lstStyle>
-            <a:lvl1pPr indent="0" algn="ctr" defTabSz="457200">
-              <a:lnSpc>
-                <a:spcPct val="100000"/>
-              </a:lnSpc>
-              <a:buNone/>
-              <a:tabLst>
-                <a:tab pos="0" algn="l"/>
-              </a:tabLst>
-              <a:defRPr lang="en-US" sz="4400" b="0" u="none" strike="noStrike">
-                <a:solidFill>
-                  <a:schemeClr val="dk1"/>
-                </a:solidFill>
-                <a:effectLst/>
-                <a:uFillTx/>
-                <a:latin typeface="Calibri"/>
-              </a:defRPr>
-            </a:lvl1pPr>
-          </a:lstStyle>
-          <a:p>
-            <a:pPr indent="0" algn="ctr" defTabSz="457200">
-              <a:lnSpc>
-                <a:spcPct val="100000"/>
-              </a:lnSpc>
-              <a:buNone/>
-              <a:tabLst>
-                <a:tab pos="0" algn="l"/>
-              </a:tabLst>
-            </a:pPr>
-            <a:r>
-              <a:rPr lang="en-US" sz="4400" b="0" u="none" strike="noStrike">
-                <a:solidFill>
-                  <a:schemeClr val="dk1"/>
-                </a:solidFill>
-                <a:effectLst/>
-                <a:uFillTx/>
-                <a:latin typeface="Calibri"/>
-              </a:rPr>
-              <a:t>Click to edit the title text format</a:t>
-            </a:r>
-            <a:endParaRPr lang="en-US" sz="4400" b="0" u="none" strike="noStrike">
-              <a:solidFill>
-                <a:schemeClr val="dk1"/>
-              </a:solidFill>
-              <a:effectLst/>
-              <a:uFillTx/>
-              <a:latin typeface="Calibri"/>
-            </a:endParaRPr>
-          </a:p>
-        </p:txBody>
-      </p:sp>
-      <p:sp>
-        <p:nvSpPr>
-          <p:cNvPr id="29" name="PlaceHolder 5"/>
-          <p:cNvSpPr>
-            <a:spLocks noGrp="1"/>
-          </p:cNvSpPr>
-          <p:nvPr>
-            <p:ph type="body"/>
-          </p:nvPr>
-        </p:nvSpPr>
-        <p:spPr>
-          <a:xfrm>
-            <a:off x="609480" y="1604520"/>
-            <a:ext cx="10970280" cy="3975120"/>
-          </a:xfrm>
-          <a:prstGeom prst="rect">
-            <a:avLst/>
-          </a:prstGeom>
-          <a:noFill/>
-          <a:ln w="0">
-            <a:noFill/>
-          </a:ln>
-        </p:spPr>
-        <p:txBody>
-          <a:bodyPr lIns="0" tIns="0" rIns="0" bIns="0" anchor="t">
-            <a:normAutofit/>
-          </a:bodyPr>
-          <a:lstStyle>
-            <a:lvl1pPr algn="l" defTabSz="457200">
-              <a:lnSpc>
-                <a:spcPct val="100000"/>
-              </a:lnSpc>
-              <a:spcBef>
-                <a:spcPts val="641"/>
-              </a:spcBef>
-              <a:buClr>
-                <a:srgbClr val="000000"/>
-              </a:buClr>
-              <a:buFont typeface="Arial"/>
-              <a:buChar char="•"/>
-              <a:defRPr lang="en-US" sz="3200" b="0" u="none" strike="noStrike">
-                <a:solidFill>
-                  <a:schemeClr val="dk1"/>
-                </a:solidFill>
-                <a:effectLst/>
-                <a:uFillTx/>
-                <a:latin typeface="Calibri"/>
-              </a:defRPr>
-            </a:lvl1pPr>
-            <a:lvl2pPr lvl="1" algn="l" defTabSz="457200">
-              <a:lnSpc>
-                <a:spcPct val="100000"/>
-              </a:lnSpc>
-              <a:spcBef>
-                <a:spcPts val="561"/>
-              </a:spcBef>
-              <a:buClr>
-                <a:srgbClr val="000000"/>
-              </a:buClr>
-              <a:buSzPct val="75000"/>
-              <a:buFont typeface="Symbol" charset="2"/>
-              <a:buChar char=""/>
-              <a:defRPr lang="en-US" sz="2800" b="0" u="none" strike="noStrike">
-                <a:solidFill>
-                  <a:schemeClr val="dk1"/>
-                </a:solidFill>
-                <a:effectLst/>
-                <a:uFillTx/>
-                <a:latin typeface="Calibri"/>
-              </a:defRPr>
-            </a:lvl2pPr>
-            <a:lvl3pPr lvl="2" algn="l" defTabSz="457200">
-              <a:lnSpc>
-                <a:spcPct val="100000"/>
-              </a:lnSpc>
-              <a:spcBef>
-                <a:spcPts val="479"/>
-              </a:spcBef>
-              <a:buClr>
-                <a:srgbClr val="000000"/>
-              </a:buClr>
-              <a:buSzPct val="45000"/>
-              <a:buFont typeface="Wingdings" charset="2"/>
-              <a:buChar char=""/>
-              <a:defRPr lang="en-US" sz="2400" b="0" u="none" strike="noStrike">
-                <a:solidFill>
-                  <a:schemeClr val="dk1"/>
-                </a:solidFill>
-                <a:effectLst/>
-                <a:uFillTx/>
-                <a:latin typeface="Calibri"/>
-              </a:defRPr>
-            </a:lvl3pPr>
-            <a:lvl4pPr lvl="3" algn="l" defTabSz="457200">
-              <a:lnSpc>
-                <a:spcPct val="100000"/>
-              </a:lnSpc>
-              <a:spcBef>
-                <a:spcPts val="400"/>
-              </a:spcBef>
-              <a:buClr>
-                <a:srgbClr val="000000"/>
-              </a:buClr>
-              <a:buSzPct val="75000"/>
-              <a:buFont typeface="Symbol" charset="2"/>
-              <a:buChar char=""/>
-              <a:defRPr lang="en-US" sz="2000" b="0" u="none" strike="noStrike">
-                <a:solidFill>
-                  <a:schemeClr val="dk1"/>
-                </a:solidFill>
-                <a:effectLst/>
-                <a:uFillTx/>
-                <a:latin typeface="Calibri"/>
-              </a:defRPr>
-            </a:lvl4pPr>
-            <a:lvl5pPr lvl="4" algn="l" defTabSz="457200">
-              <a:lnSpc>
-                <a:spcPct val="100000"/>
-              </a:lnSpc>
-              <a:spcBef>
-                <a:spcPts val="400"/>
-              </a:spcBef>
-              <a:buClr>
-                <a:srgbClr val="000000"/>
-              </a:buClr>
-              <a:buSzPct val="45000"/>
-              <a:buFont typeface="Wingdings" charset="2"/>
-              <a:buChar char=""/>
-              <a:defRPr lang="en-US" sz="2000" b="0" u="none" strike="noStrike">
-                <a:solidFill>
-                  <a:schemeClr val="dk1"/>
-                </a:solidFill>
-                <a:effectLst/>
-                <a:uFillTx/>
-                <a:latin typeface="Calibri"/>
-              </a:defRPr>
-            </a:lvl5pPr>
-            <a:lvl6pPr lvl="5" algn="l" defTabSz="457200">
-              <a:lnSpc>
-                <a:spcPct val="100000"/>
-              </a:lnSpc>
-              <a:spcBef>
-                <a:spcPts val="283"/>
-              </a:spcBef>
-              <a:buClr>
-                <a:srgbClr val="000000"/>
-              </a:buClr>
-              <a:buSzPct val="45000"/>
-              <a:buFont typeface="Wingdings" charset="2"/>
-              <a:buChar char=""/>
-              <a:defRPr lang="en-US" sz="2000" b="0" u="none" strike="noStrike">
-                <a:solidFill>
-                  <a:schemeClr val="dk1"/>
-                </a:solidFill>
-                <a:effectLst/>
-                <a:uFillTx/>
-                <a:latin typeface="Calibri"/>
-              </a:defRPr>
-            </a:lvl6pPr>
-            <a:lvl7pPr lvl="6" algn="l" defTabSz="457200">
-              <a:lnSpc>
-                <a:spcPct val="100000"/>
-              </a:lnSpc>
-              <a:spcBef>
-                <a:spcPts val="283"/>
-              </a:spcBef>
-              <a:buClr>
-                <a:srgbClr val="000000"/>
-              </a:buClr>
-              <a:buSzPct val="45000"/>
-              <a:buFont typeface="Wingdings" charset="2"/>
-              <a:buChar char=""/>
-              <a:defRPr lang="en-US" sz="2000" b="0" u="none" strike="noStrike">
-                <a:solidFill>
-                  <a:schemeClr val="dk1"/>
-                </a:solidFill>
-                <a:effectLst/>
-                <a:uFillTx/>
-                <a:latin typeface="Calibri"/>
-              </a:defRPr>
-            </a:lvl7pPr>
-          </a:lstStyle>
-          <a:p>
-            <a:pPr marL="343080" indent="-343080" algn="l" defTabSz="457200">
-              <a:lnSpc>
-                <a:spcPct val="100000"/>
-              </a:lnSpc>
-              <a:spcBef>
-                <a:spcPts val="641"/>
-              </a:spcBef>
-              <a:buClr>
-                <a:srgbClr val="000000"/>
-              </a:buClr>
-              <a:buFont typeface="Arial"/>
-              <a:buChar char="•"/>
-            </a:pPr>
-            <a:r>
-              <a:rPr lang="en-US" sz="3200" b="0" u="none" strike="noStrike">
-                <a:solidFill>
-                  <a:schemeClr val="dk1"/>
-                </a:solidFill>
-                <a:effectLst/>
-                <a:uFillTx/>
-                <a:latin typeface="Calibri"/>
-              </a:rPr>
-              <a:t>Click to edit the outline text format</a:t>
-            </a:r>
-            <a:endParaRPr lang="en-US" sz="3200" b="0" u="none" strike="noStrike">
-              <a:solidFill>
-                <a:schemeClr val="dk1"/>
-              </a:solidFill>
-              <a:effectLst/>
-              <a:uFillTx/>
-              <a:latin typeface="Calibri"/>
-            </a:endParaRPr>
-          </a:p>
-          <a:p>
-            <a:pPr marL="864000" lvl="1" indent="-324000" algn="l" defTabSz="457200">
-              <a:lnSpc>
-                <a:spcPct val="100000"/>
-              </a:lnSpc>
-              <a:spcBef>
-                <a:spcPts val="561"/>
-              </a:spcBef>
-              <a:buClr>
-                <a:srgbClr val="000000"/>
-              </a:buClr>
-              <a:buSzPct val="75000"/>
-              <a:buFont typeface="Symbol" charset="2"/>
-              <a:buChar char=""/>
-            </a:pPr>
-            <a:r>
-              <a:rPr lang="en-US" sz="2800" b="0" u="none" strike="noStrike">
-                <a:solidFill>
-                  <a:schemeClr val="dk1"/>
-                </a:solidFill>
-                <a:effectLst/>
-                <a:uFillTx/>
-                <a:latin typeface="Calibri"/>
-              </a:rPr>
-              <a:t>Second Outline Level</a:t>
-            </a:r>
-            <a:endParaRPr lang="en-US" sz="2800" b="0" u="none" strike="noStrike">
-              <a:solidFill>
-                <a:schemeClr val="dk1"/>
-              </a:solidFill>
-              <a:effectLst/>
-              <a:uFillTx/>
-              <a:latin typeface="Calibri"/>
-            </a:endParaRPr>
-          </a:p>
-          <a:p>
-            <a:pPr marL="1296000" lvl="2" indent="-288000" algn="l" defTabSz="457200">
-              <a:lnSpc>
-                <a:spcPct val="100000"/>
-              </a:lnSpc>
-              <a:spcBef>
-                <a:spcPts val="479"/>
-              </a:spcBef>
-              <a:buClr>
-                <a:srgbClr val="000000"/>
-              </a:buClr>
-              <a:buSzPct val="45000"/>
-              <a:buFont typeface="Wingdings" charset="2"/>
-              <a:buChar char=""/>
-            </a:pPr>
-            <a:r>
-              <a:rPr lang="en-US" sz="2400" b="0" u="none" strike="noStrike">
-                <a:solidFill>
-                  <a:schemeClr val="dk1"/>
-                </a:solidFill>
-                <a:effectLst/>
-                <a:uFillTx/>
-                <a:latin typeface="Calibri"/>
-              </a:rPr>
-              <a:t>Third Outline Level</a:t>
-            </a:r>
-            <a:endParaRPr lang="en-US" sz="2400" b="0" u="none" strike="noStrike">
-              <a:solidFill>
-                <a:schemeClr val="dk1"/>
-              </a:solidFill>
-              <a:effectLst/>
-              <a:uFillTx/>
-              <a:latin typeface="Calibri"/>
-            </a:endParaRPr>
-          </a:p>
-          <a:p>
-            <a:pPr marL="1728000" lvl="3" indent="-216000" algn="l" defTabSz="457200">
-              <a:lnSpc>
-                <a:spcPct val="100000"/>
-              </a:lnSpc>
-              <a:spcBef>
-                <a:spcPts val="400"/>
-              </a:spcBef>
-              <a:buClr>
-                <a:srgbClr val="000000"/>
-              </a:buClr>
-              <a:buSzPct val="75000"/>
-              <a:buFont typeface="Symbol" charset="2"/>
-              <a:buChar char=""/>
-            </a:pPr>
-            <a:r>
-              <a:rPr lang="en-US" sz="2000" b="0" u="none" strike="noStrike">
-                <a:solidFill>
-                  <a:schemeClr val="dk1"/>
-                </a:solidFill>
-                <a:effectLst/>
-                <a:uFillTx/>
-                <a:latin typeface="Calibri"/>
-              </a:rPr>
-              <a:t>Fourth Outline Level</a:t>
-            </a:r>
-            <a:endParaRPr lang="en-US" sz="2000" b="0" u="none" strike="noStrike">
-              <a:solidFill>
-                <a:schemeClr val="dk1"/>
-              </a:solidFill>
-              <a:effectLst/>
-              <a:uFillTx/>
-              <a:latin typeface="Calibri"/>
-            </a:endParaRPr>
-          </a:p>
-          <a:p>
-            <a:pPr marL="2160000" lvl="4" indent="-216000" algn="l" defTabSz="457200">
-              <a:lnSpc>
-                <a:spcPct val="100000"/>
-              </a:lnSpc>
-              <a:spcBef>
-                <a:spcPts val="400"/>
-              </a:spcBef>
-              <a:buClr>
-                <a:srgbClr val="000000"/>
-              </a:buClr>
-              <a:buSzPct val="45000"/>
-              <a:buFont typeface="Wingdings" charset="2"/>
-              <a:buChar char=""/>
-            </a:pPr>
-            <a:r>
-              <a:rPr lang="en-US" sz="2000" b="0" u="none" strike="noStrike">
-                <a:solidFill>
-                  <a:schemeClr val="dk1"/>
-                </a:solidFill>
-                <a:effectLst/>
-                <a:uFillTx/>
-                <a:latin typeface="Calibri"/>
-              </a:rPr>
-              <a:t>Fifth Outline Level</a:t>
-            </a:r>
-            <a:endParaRPr lang="en-US" sz="2000" b="0" u="none" strike="noStrike">
-              <a:solidFill>
-                <a:schemeClr val="dk1"/>
-              </a:solidFill>
-              <a:effectLst/>
-              <a:uFillTx/>
-              <a:latin typeface="Calibri"/>
-            </a:endParaRPr>
-          </a:p>
-          <a:p>
-            <a:pPr marL="2592000" lvl="5" indent="-216000" algn="l" defTabSz="457200">
-              <a:lnSpc>
-                <a:spcPct val="100000"/>
-              </a:lnSpc>
-              <a:spcBef>
-                <a:spcPts val="283"/>
-              </a:spcBef>
-              <a:buClr>
-                <a:srgbClr val="000000"/>
-              </a:buClr>
-              <a:buSzPct val="45000"/>
-              <a:buFont typeface="Wingdings" charset="2"/>
-              <a:buChar char=""/>
-            </a:pPr>
-            <a:r>
-              <a:rPr lang="en-US" sz="2000" b="0" u="none" strike="noStrike">
-                <a:solidFill>
-                  <a:schemeClr val="dk1"/>
-                </a:solidFill>
-                <a:effectLst/>
-                <a:uFillTx/>
-                <a:latin typeface="Calibri"/>
-              </a:rPr>
-              <a:t>Sixth Outline Level</a:t>
-            </a:r>
-            <a:endParaRPr lang="en-US" sz="2000" b="0" u="none" strike="noStrike">
-              <a:solidFill>
-                <a:schemeClr val="dk1"/>
-              </a:solidFill>
-              <a:effectLst/>
-              <a:uFillTx/>
-              <a:latin typeface="Calibri"/>
-            </a:endParaRPr>
-          </a:p>
-          <a:p>
-            <a:pPr marL="3024000" lvl="6" indent="-216000" algn="l" defTabSz="457200">
-              <a:lnSpc>
-                <a:spcPct val="100000"/>
-              </a:lnSpc>
-              <a:spcBef>
-                <a:spcPts val="283"/>
-              </a:spcBef>
-              <a:buClr>
-                <a:srgbClr val="000000"/>
-              </a:buClr>
-              <a:buSzPct val="45000"/>
-              <a:buFont typeface="Wingdings" charset="2"/>
-              <a:buChar char=""/>
-            </a:pPr>
-            <a:r>
-              <a:rPr lang="en-US" sz="2000" b="0" u="none" strike="noStrike">
-                <a:solidFill>
-                  <a:schemeClr val="dk1"/>
-                </a:solidFill>
-                <a:effectLst/>
-                <a:uFillTx/>
-                <a:latin typeface="Calibri"/>
-              </a:rPr>
-              <a:t>Seventh Outline Level</a:t>
-            </a:r>
-            <a:endParaRPr lang="en-US" sz="2000" b="0" u="none" strike="noStrike">
-              <a:solidFill>
-                <a:schemeClr val="dk1"/>
-              </a:solidFill>
-              <a:effectLst/>
-              <a:uFillTx/>
-              <a:latin typeface="Calibri"/>
-            </a:endParaRPr>
-          </a:p>
-        </p:txBody>
-      </p:sp>
-    </p:spTree>
-  </p:cSld>
-</p:sldLayout>
-</file>
-
-<file path=ppt/slideLayouts/slideLayout6.xml><?xml version="1.0" encoding="utf-8"?>
-<p:sldLayout xmlns:a="http://schemas.openxmlformats.org/drawingml/2006/main" xmlns:p="http://schemas.openxmlformats.org/presentationml/2006/main" xmlns:r="http://schemas.openxmlformats.org/officeDocument/2006/relationships" xmlns:p14="http://schemas.microsoft.com/office/powerpoint/2010/main" xmlns:p15="http://schemas.microsoft.com/office/powerpoint/2012/main" xmlns:mc="http://schemas.openxmlformats.org/markup-compatibility/2006" type="blank" preserve="1">
-  <p:cSld name="Content with Caption">
-    <p:bg>
-      <p:bgPr>
-        <a:solidFill>
-          <a:srgbClr val="FFFFFF"/>
-        </a:solidFill>
-      </p:bgPr>
-    </p:bg>
-    <p:spTree>
-      <p:nvGrpSpPr>
-        <p:cNvPr id="1" name=""/>
-        <p:cNvGrpSpPr/>
-        <p:nvPr/>
-      </p:nvGrpSpPr>
-      <p:grpSpPr>
-        <a:xfrm>
-          <a:off x="0" y="0"/>
-          <a:ext cx="0" cy="0"/>
-          <a:chOff x="0" y="0"/>
-          <a:chExt cx="0" cy="0"/>
-        </a:xfrm>
-      </p:grpSpPr>
-      <p:sp>
-        <p:nvSpPr>
-          <p:cNvPr id="30" name="PlaceHolder 1"/>
-          <p:cNvSpPr>
-            <a:spLocks noGrp="1"/>
-          </p:cNvSpPr>
-          <p:nvPr>
-            <p:ph type="title"/>
-          </p:nvPr>
-        </p:nvSpPr>
-        <p:spPr>
-          <a:xfrm>
-            <a:off x="457200" y="272880"/>
-            <a:ext cx="3005640" cy="1159560"/>
-          </a:xfrm>
-          <a:prstGeom prst="rect">
-            <a:avLst/>
-          </a:prstGeom>
-          <a:noFill/>
-          <a:ln w="0">
-            <a:noFill/>
-          </a:ln>
-        </p:spPr>
-        <p:txBody>
-          <a:bodyPr lIns="91440" tIns="45720" rIns="91440" bIns="45720" anchor="b">
-            <a:noAutofit/>
-          </a:bodyPr>
-          <a:lstStyle>
-            <a:lvl1pPr indent="0" algn="l" defTabSz="457200">
-              <a:lnSpc>
-                <a:spcPct val="100000"/>
-              </a:lnSpc>
-              <a:buNone/>
-              <a:tabLst>
-                <a:tab pos="0" algn="l"/>
-              </a:tabLst>
-              <a:defRPr lang="en-US" sz="2000" b="1" u="none" strike="noStrike">
-                <a:solidFill>
-                  <a:schemeClr val="dk1"/>
-                </a:solidFill>
-                <a:effectLst/>
-                <a:uFillTx/>
-                <a:latin typeface="Calibri"/>
-              </a:defRPr>
-            </a:lvl1pPr>
-          </a:lstStyle>
-          <a:p>
-            <a:pPr indent="0" algn="l" defTabSz="457200">
-              <a:lnSpc>
-                <a:spcPct val="100000"/>
-              </a:lnSpc>
-              <a:buNone/>
-              <a:tabLst>
-                <a:tab pos="0" algn="l"/>
-              </a:tabLst>
-            </a:pPr>
-            <a:r>
-              <a:rPr lang="en-US" sz="2000" b="1" u="none" strike="noStrike">
-                <a:solidFill>
-                  <a:schemeClr val="dk1"/>
-                </a:solidFill>
-                <a:effectLst/>
-                <a:uFillTx/>
-                <a:latin typeface="Calibri"/>
-              </a:rPr>
-              <a:t>Click to edit Master title style</a:t>
-            </a:r>
-            <a:endParaRPr lang="en-US" sz="2000" b="1" u="none" strike="noStrike">
-              <a:solidFill>
-                <a:schemeClr val="dk1"/>
-              </a:solidFill>
-              <a:effectLst/>
-              <a:uFillTx/>
-              <a:latin typeface="Calibri"/>
-            </a:endParaRPr>
-          </a:p>
-        </p:txBody>
-      </p:sp>
-      <p:sp>
-        <p:nvSpPr>
-          <p:cNvPr id="31" name="PlaceHolder 2"/>
-          <p:cNvSpPr>
-            <a:spLocks noGrp="1"/>
-          </p:cNvSpPr>
-          <p:nvPr>
-            <p:ph type="body"/>
-          </p:nvPr>
-        </p:nvSpPr>
-        <p:spPr>
-          <a:xfrm>
-            <a:off x="3575160" y="272880"/>
-            <a:ext cx="5109120" cy="5850720"/>
-          </a:xfrm>
-          <a:prstGeom prst="rect">
-            <a:avLst/>
-          </a:prstGeom>
-          <a:noFill/>
-          <a:ln w="0">
-            <a:noFill/>
-          </a:ln>
-        </p:spPr>
-        <p:txBody>
-          <a:bodyPr lIns="91440" tIns="45720" rIns="91440" bIns="45720" anchor="t">
-            <a:noAutofit/>
-          </a:bodyPr>
-          <a:lstStyle>
-            <a:lvl1pPr algn="l" defTabSz="457200">
-              <a:lnSpc>
-                <a:spcPct val="100000"/>
-              </a:lnSpc>
-              <a:spcBef>
-                <a:spcPts val="641"/>
-              </a:spcBef>
-              <a:buClr>
-                <a:srgbClr val="000000"/>
-              </a:buClr>
-              <a:buFont typeface="Arial"/>
-              <a:buChar char="•"/>
-              <a:defRPr lang="en-US" sz="3200" b="0" u="none" strike="noStrike">
-                <a:solidFill>
-                  <a:schemeClr val="dk1"/>
-                </a:solidFill>
-                <a:effectLst/>
-                <a:uFillTx/>
-                <a:latin typeface="Calibri"/>
-              </a:defRPr>
-            </a:lvl1pPr>
-            <a:lvl2pPr lvl="1" algn="l" defTabSz="457200">
-              <a:lnSpc>
-                <a:spcPct val="100000"/>
-              </a:lnSpc>
-              <a:spcBef>
-                <a:spcPts val="561"/>
-              </a:spcBef>
-              <a:buClr>
-                <a:srgbClr val="000000"/>
-              </a:buClr>
-              <a:buFont typeface="Arial"/>
-              <a:buChar char="–"/>
-              <a:defRPr lang="en-US" sz="2800" b="0" u="none" strike="noStrike">
-                <a:solidFill>
-                  <a:schemeClr val="dk1"/>
-                </a:solidFill>
-                <a:effectLst/>
-                <a:uFillTx/>
-                <a:latin typeface="Calibri"/>
-              </a:defRPr>
-            </a:lvl2pPr>
-            <a:lvl3pPr lvl="2" algn="l" defTabSz="457200">
-              <a:lnSpc>
-                <a:spcPct val="100000"/>
-              </a:lnSpc>
-              <a:spcBef>
-                <a:spcPts val="479"/>
-              </a:spcBef>
-              <a:buClr>
-                <a:srgbClr val="000000"/>
-              </a:buClr>
-              <a:buFont typeface="Arial"/>
-              <a:buChar char="•"/>
-              <a:defRPr lang="en-US" sz="2400" b="0" u="none" strike="noStrike">
-                <a:solidFill>
-                  <a:schemeClr val="dk1"/>
-                </a:solidFill>
-                <a:effectLst/>
-                <a:uFillTx/>
-                <a:latin typeface="Calibri"/>
-              </a:defRPr>
-            </a:lvl3pPr>
-            <a:lvl4pPr lvl="3" algn="l" defTabSz="457200">
-              <a:lnSpc>
-                <a:spcPct val="100000"/>
-              </a:lnSpc>
-              <a:spcBef>
-                <a:spcPts val="400"/>
-              </a:spcBef>
-              <a:buClr>
-                <a:srgbClr val="000000"/>
-              </a:buClr>
-              <a:buFont typeface="Arial"/>
-              <a:buChar char="–"/>
-              <a:defRPr lang="en-US" sz="2000" b="0" u="none" strike="noStrike">
-                <a:solidFill>
-                  <a:schemeClr val="dk1"/>
-                </a:solidFill>
-                <a:effectLst/>
-                <a:uFillTx/>
-                <a:latin typeface="Calibri"/>
-              </a:defRPr>
-            </a:lvl4pPr>
-            <a:lvl5pPr lvl="4" algn="l" defTabSz="457200">
-              <a:lnSpc>
-                <a:spcPct val="100000"/>
-              </a:lnSpc>
-              <a:spcBef>
-                <a:spcPts val="400"/>
-              </a:spcBef>
-              <a:buClr>
-                <a:srgbClr val="000000"/>
-              </a:buClr>
-              <a:buFont typeface="Arial"/>
-              <a:buChar char="»"/>
-              <a:defRPr lang="en-US" sz="2000" b="0" u="none" strike="noStrike">
-                <a:solidFill>
-                  <a:schemeClr val="dk1"/>
-                </a:solidFill>
-                <a:effectLst/>
-                <a:uFillTx/>
-                <a:latin typeface="Calibri"/>
-              </a:defRPr>
-            </a:lvl5pPr>
-          </a:lstStyle>
-          <a:p>
-            <a:pPr marL="343080" indent="-343080" algn="l" defTabSz="457200">
-              <a:lnSpc>
-                <a:spcPct val="100000"/>
-              </a:lnSpc>
-              <a:spcBef>
-                <a:spcPts val="641"/>
-              </a:spcBef>
-              <a:buClr>
-                <a:srgbClr val="000000"/>
-              </a:buClr>
-              <a:buFont typeface="Arial"/>
-              <a:buChar char="•"/>
-            </a:pPr>
-            <a:r>
-              <a:rPr lang="en-US" sz="3200" b="0" u="none" strike="noStrike">
-                <a:solidFill>
-                  <a:schemeClr val="dk1"/>
-                </a:solidFill>
-                <a:effectLst/>
-                <a:uFillTx/>
-                <a:latin typeface="Calibri"/>
-              </a:rPr>
-              <a:t>Click to edit Master text styles</a:t>
-            </a:r>
-            <a:endParaRPr lang="en-US" sz="3200" b="0" u="none" strike="noStrike">
-              <a:solidFill>
-                <a:schemeClr val="dk1"/>
-              </a:solidFill>
-              <a:effectLst/>
-              <a:uFillTx/>
-              <a:latin typeface="Calibri"/>
-            </a:endParaRPr>
-          </a:p>
-          <a:p>
-            <a:pPr marL="743040" lvl="1" indent="-285840" algn="l" defTabSz="457200">
-              <a:lnSpc>
-                <a:spcPct val="100000"/>
-              </a:lnSpc>
-              <a:spcBef>
-                <a:spcPts val="561"/>
-              </a:spcBef>
-              <a:buClr>
-                <a:srgbClr val="000000"/>
-              </a:buClr>
-              <a:buFont typeface="Arial"/>
-              <a:buChar char="–"/>
-            </a:pPr>
-            <a:r>
-              <a:rPr lang="en-US" sz="2800" b="0" u="none" strike="noStrike">
-                <a:solidFill>
-                  <a:schemeClr val="dk1"/>
-                </a:solidFill>
-                <a:effectLst/>
-                <a:uFillTx/>
-                <a:latin typeface="Calibri"/>
-              </a:rPr>
-              <a:t>Second level</a:t>
-            </a:r>
-            <a:endParaRPr lang="en-US" sz="2800" b="0" u="none" strike="noStrike">
-              <a:solidFill>
-                <a:schemeClr val="dk1"/>
-              </a:solidFill>
-              <a:effectLst/>
-              <a:uFillTx/>
-              <a:latin typeface="Calibri"/>
-            </a:endParaRPr>
-          </a:p>
-          <a:p>
-            <a:pPr marL="1143000" lvl="2" indent="-228600" algn="l" defTabSz="457200">
-              <a:lnSpc>
-                <a:spcPct val="100000"/>
-              </a:lnSpc>
-              <a:spcBef>
-                <a:spcPts val="479"/>
-              </a:spcBef>
-              <a:buClr>
-                <a:srgbClr val="000000"/>
-              </a:buClr>
-              <a:buFont typeface="Arial"/>
-              <a:buChar char="•"/>
-            </a:pPr>
-            <a:r>
-              <a:rPr lang="en-US" sz="2400" b="0" u="none" strike="noStrike">
-                <a:solidFill>
-                  <a:schemeClr val="dk1"/>
-                </a:solidFill>
-                <a:effectLst/>
-                <a:uFillTx/>
-                <a:latin typeface="Calibri"/>
-              </a:rPr>
-              <a:t>Third level</a:t>
-            </a:r>
-            <a:endParaRPr lang="en-US" sz="2400" b="0" u="none" strike="noStrike">
-              <a:solidFill>
-                <a:schemeClr val="dk1"/>
-              </a:solidFill>
-              <a:effectLst/>
-              <a:uFillTx/>
-              <a:latin typeface="Calibri"/>
-            </a:endParaRPr>
-          </a:p>
-          <a:p>
-            <a:pPr marL="1600200" lvl="3" indent="-228600" algn="l" defTabSz="457200">
-              <a:lnSpc>
-                <a:spcPct val="100000"/>
-              </a:lnSpc>
-              <a:spcBef>
-                <a:spcPts val="400"/>
-              </a:spcBef>
-              <a:buClr>
-                <a:srgbClr val="000000"/>
-              </a:buClr>
-              <a:buFont typeface="Arial"/>
-              <a:buChar char="–"/>
-            </a:pPr>
-            <a:r>
-              <a:rPr lang="en-US" sz="2000" b="0" u="none" strike="noStrike">
-                <a:solidFill>
-                  <a:schemeClr val="dk1"/>
-                </a:solidFill>
-                <a:effectLst/>
-                <a:uFillTx/>
-                <a:latin typeface="Calibri"/>
-              </a:rPr>
-              <a:t>Fourth level</a:t>
-            </a:r>
-            <a:endParaRPr lang="en-US" sz="2000" b="0" u="none" strike="noStrike">
-              <a:solidFill>
-                <a:schemeClr val="dk1"/>
-              </a:solidFill>
-              <a:effectLst/>
-              <a:uFillTx/>
-              <a:latin typeface="Calibri"/>
-            </a:endParaRPr>
-          </a:p>
-          <a:p>
-            <a:pPr marL="2057400" lvl="4" indent="-228600" algn="l" defTabSz="457200">
-              <a:lnSpc>
-                <a:spcPct val="100000"/>
-              </a:lnSpc>
-              <a:spcBef>
-                <a:spcPts val="400"/>
-              </a:spcBef>
-              <a:buClr>
-                <a:srgbClr val="000000"/>
-              </a:buClr>
-              <a:buFont typeface="Arial"/>
-              <a:buChar char="»"/>
-            </a:pPr>
-            <a:r>
-              <a:rPr lang="en-US" sz="2000" b="0" u="none" strike="noStrike">
-                <a:solidFill>
-                  <a:schemeClr val="dk1"/>
-                </a:solidFill>
-                <a:effectLst/>
-                <a:uFillTx/>
-                <a:latin typeface="Calibri"/>
-              </a:rPr>
-              <a:t>Fifth level</a:t>
-            </a:r>
-            <a:endParaRPr lang="en-US" sz="2000" b="0" u="none" strike="noStrike">
-              <a:solidFill>
-                <a:schemeClr val="dk1"/>
-              </a:solidFill>
-              <a:effectLst/>
-              <a:uFillTx/>
-              <a:latin typeface="Calibri"/>
-            </a:endParaRPr>
-          </a:p>
-        </p:txBody>
-      </p:sp>
-      <p:sp>
-        <p:nvSpPr>
-          <p:cNvPr id="32" name="PlaceHolder 3"/>
-          <p:cNvSpPr>
-            <a:spLocks noGrp="1"/>
-          </p:cNvSpPr>
-          <p:nvPr>
-            <p:ph type="body"/>
-          </p:nvPr>
-        </p:nvSpPr>
-        <p:spPr>
-          <a:xfrm>
-            <a:off x="457200" y="1434960"/>
-            <a:ext cx="3005640" cy="4688640"/>
-          </a:xfrm>
-          <a:prstGeom prst="rect">
-            <a:avLst/>
-          </a:prstGeom>
-          <a:noFill/>
-          <a:ln w="0">
-            <a:noFill/>
-          </a:ln>
-        </p:spPr>
-        <p:txBody>
-          <a:bodyPr lIns="91440" tIns="45720" rIns="91440" bIns="45720" anchor="t">
-            <a:noAutofit/>
-          </a:bodyPr>
-          <a:lstStyle>
-            <a:lvl1pPr indent="0" algn="l" defTabSz="457200">
-              <a:lnSpc>
-                <a:spcPct val="100000"/>
-              </a:lnSpc>
-              <a:spcBef>
-                <a:spcPts val="281"/>
-              </a:spcBef>
-              <a:buNone/>
-              <a:tabLst>
-                <a:tab pos="0" algn="l"/>
-              </a:tabLst>
-              <a:defRPr lang="en-US" sz="1400" b="0" u="none" strike="noStrike">
-                <a:solidFill>
-                  <a:schemeClr val="dk1"/>
-                </a:solidFill>
-                <a:effectLst/>
-                <a:uFillTx/>
-                <a:latin typeface="Calibri"/>
-              </a:defRPr>
-            </a:lvl1pPr>
-          </a:lstStyle>
-          <a:p>
-            <a:pPr indent="0" algn="l" defTabSz="457200">
-              <a:lnSpc>
-                <a:spcPct val="100000"/>
-              </a:lnSpc>
-              <a:spcBef>
-                <a:spcPts val="281"/>
-              </a:spcBef>
-              <a:buNone/>
-              <a:tabLst>
-                <a:tab pos="0" algn="l"/>
-              </a:tabLst>
-            </a:pPr>
-            <a:r>
-              <a:rPr lang="en-US" sz="1400" b="0" u="none" strike="noStrike">
-                <a:solidFill>
-                  <a:schemeClr val="dk1"/>
-                </a:solidFill>
-                <a:effectLst/>
-                <a:uFillTx/>
-                <a:latin typeface="Calibri"/>
-              </a:rPr>
-              <a:t>Click to edit Master text styles</a:t>
-            </a:r>
-            <a:endParaRPr lang="en-US" sz="1400" b="0" u="none" strike="noStrike">
-              <a:solidFill>
-                <a:schemeClr val="dk1"/>
-              </a:solidFill>
-              <a:effectLst/>
-              <a:uFillTx/>
-              <a:latin typeface="Calibri"/>
-            </a:endParaRPr>
-          </a:p>
-        </p:txBody>
-      </p:sp>
-      <p:sp>
-        <p:nvSpPr>
-          <p:cNvPr id="33" name="PlaceHolder 4"/>
-          <p:cNvSpPr>
-            <a:spLocks noGrp="1"/>
-          </p:cNvSpPr>
-          <p:nvPr>
-            <p:ph type="dt" idx="16"/>
-          </p:nvPr>
-        </p:nvSpPr>
-        <p:spPr>
-          <a:xfrm>
-            <a:off x="457200" y="6356520"/>
-            <a:ext cx="2131200" cy="362520"/>
-          </a:xfrm>
-          <a:prstGeom prst="rect">
-            <a:avLst/>
-          </a:prstGeom>
-          <a:noFill/>
-          <a:ln w="0">
-            <a:noFill/>
-          </a:ln>
-        </p:spPr>
-        <p:txBody>
-          <a:bodyPr lIns="91440" tIns="45720" rIns="91440" bIns="45720" anchor="ctr">
-            <a:noAutofit/>
-          </a:bodyPr>
-          <a:lstStyle>
-            <a:lvl1pPr indent="0" algn="l" defTabSz="457200">
-              <a:lnSpc>
-                <a:spcPct val="100000"/>
-              </a:lnSpc>
-              <a:buNone/>
-              <a:tabLst>
-                <a:tab pos="0" algn="l"/>
-              </a:tabLst>
-              <a:defRPr lang="en-US" sz="1200" b="0" u="none" strike="noStrike">
-                <a:solidFill>
-                  <a:schemeClr val="dk1">
-                    <a:tint val="75000"/>
-                  </a:schemeClr>
-                </a:solidFill>
-                <a:effectLst/>
-                <a:uFillTx/>
-                <a:latin typeface="Calibri"/>
-              </a:defRPr>
-            </a:lvl1pPr>
-          </a:lstStyle>
-          <a:p>
-            <a:pPr indent="0" algn="l" defTabSz="457200">
-              <a:lnSpc>
-                <a:spcPct val="100000"/>
-              </a:lnSpc>
-              <a:buNone/>
-              <a:tabLst>
-                <a:tab pos="0" algn="l"/>
-              </a:tabLst>
-            </a:pPr>
-            <a:r>
-              <a:rPr lang="en-US" sz="1200" b="0" u="none" strike="noStrike">
-                <a:solidFill>
-                  <a:schemeClr val="dk1">
-                    <a:tint val="75000"/>
-                  </a:schemeClr>
-                </a:solidFill>
-                <a:effectLst/>
-                <a:uFillTx/>
-                <a:latin typeface="Calibri"/>
-              </a:rPr>
-              <a:t>&lt;date/time&gt;</a:t>
-            </a:r>
-            <a:endParaRPr lang="en-US" sz="1200" b="0" u="none" strike="noStrike">
-              <a:solidFill>
-                <a:srgbClr val="000000"/>
-              </a:solidFill>
-              <a:effectLst/>
-              <a:uFillTx/>
-              <a:latin typeface="Times New Roman"/>
-            </a:endParaRPr>
-          </a:p>
-        </p:txBody>
-      </p:sp>
-      <p:sp>
-        <p:nvSpPr>
-          <p:cNvPr id="34" name="PlaceHolder 5"/>
-          <p:cNvSpPr>
-            <a:spLocks noGrp="1"/>
-          </p:cNvSpPr>
-          <p:nvPr>
-            <p:ph type="ftr" idx="17"/>
-          </p:nvPr>
-        </p:nvSpPr>
-        <p:spPr>
-          <a:xfrm>
-            <a:off x="3124080" y="6356520"/>
-            <a:ext cx="2892960" cy="362520"/>
-          </a:xfrm>
-          <a:prstGeom prst="rect">
-            <a:avLst/>
-          </a:prstGeom>
-          <a:noFill/>
-          <a:ln w="0">
-            <a:noFill/>
-          </a:ln>
-        </p:spPr>
-        <p:txBody>
-          <a:bodyPr lIns="91440" tIns="45720" rIns="91440" bIns="45720" anchor="ctr">
-            <a:noAutofit/>
-          </a:bodyPr>
-          <a:lstStyle>
-            <a:lvl1pPr indent="0" algn="ctr">
-              <a:lnSpc>
-                <a:spcPct val="100000"/>
-              </a:lnSpc>
-              <a:buNone/>
-              <a:tabLst>
-                <a:tab pos="0" algn="l"/>
-              </a:tabLst>
-              <a:defRPr lang="en-US" sz="1400" b="0" u="none" strike="noStrike">
-                <a:solidFill>
-                  <a:srgbClr val="000000"/>
-                </a:solidFill>
-                <a:effectLst/>
-                <a:uFillTx/>
-                <a:latin typeface="Times New Roman"/>
-              </a:defRPr>
-            </a:lvl1pPr>
-          </a:lstStyle>
-          <a:p>
-            <a:pPr indent="0" algn="ctr">
-              <a:lnSpc>
-                <a:spcPct val="100000"/>
-              </a:lnSpc>
-              <a:buNone/>
-              <a:tabLst>
-                <a:tab pos="0" algn="l"/>
-              </a:tabLst>
-            </a:pPr>
-            <a:r>
-              <a:rPr lang="en-US" sz="1400" b="0" u="none" strike="noStrike">
-                <a:solidFill>
-                  <a:srgbClr val="000000"/>
-                </a:solidFill>
-                <a:effectLst/>
-                <a:uFillTx/>
-                <a:latin typeface="Times New Roman"/>
-              </a:rPr>
-              <a:t>&lt;footer&gt;</a:t>
-            </a:r>
-            <a:endParaRPr lang="en-US" sz="1400" b="0" u="none" strike="noStrike">
-              <a:solidFill>
-                <a:srgbClr val="000000"/>
-              </a:solidFill>
-              <a:effectLst/>
-              <a:uFillTx/>
-              <a:latin typeface="Times New Roman"/>
-            </a:endParaRPr>
-          </a:p>
-        </p:txBody>
-      </p:sp>
-      <p:sp>
-        <p:nvSpPr>
-          <p:cNvPr id="35" name="PlaceHolder 6"/>
-          <p:cNvSpPr>
-            <a:spLocks noGrp="1"/>
-          </p:cNvSpPr>
-          <p:nvPr>
-            <p:ph type="sldNum" idx="18"/>
-          </p:nvPr>
-        </p:nvSpPr>
-        <p:spPr>
-          <a:xfrm>
-            <a:off x="6553080" y="6356520"/>
-            <a:ext cx="2131200" cy="362520"/>
-          </a:xfrm>
-          <a:prstGeom prst="rect">
-            <a:avLst/>
-          </a:prstGeom>
-          <a:noFill/>
-          <a:ln w="0">
-            <a:noFill/>
-          </a:ln>
-        </p:spPr>
-        <p:txBody>
-          <a:bodyPr lIns="91440" tIns="45720" rIns="91440" bIns="45720" anchor="ctr">
-            <a:noAutofit/>
-          </a:bodyPr>
-          <a:lstStyle>
-            <a:lvl1pPr indent="0" algn="r" defTabSz="457200">
-              <a:lnSpc>
-                <a:spcPct val="100000"/>
-              </a:lnSpc>
-              <a:buNone/>
-              <a:tabLst>
-                <a:tab pos="0" algn="l"/>
-              </a:tabLst>
-              <a:defRPr lang="en-US" sz="1200" b="0" u="none" strike="noStrike">
-                <a:solidFill>
-                  <a:schemeClr val="dk1">
-                    <a:tint val="75000"/>
-                  </a:schemeClr>
-                </a:solidFill>
-                <a:effectLst/>
-                <a:uFillTx/>
-                <a:latin typeface="Calibri"/>
-              </a:defRPr>
-            </a:lvl1pPr>
-          </a:lstStyle>
-          <a:p>
-            <a:pPr indent="0" algn="r" defTabSz="457200">
-              <a:lnSpc>
-                <a:spcPct val="100000"/>
-              </a:lnSpc>
-              <a:buNone/>
-              <a:tabLst>
-                <a:tab pos="0" algn="l"/>
-              </a:tabLst>
-            </a:pPr>
-            <a:fld id="{A965CF30-0DEF-449E-AF1C-58FE0BEC1182}" type="slidenum">
-              <a:rPr lang="en-US" sz="1200" b="0" u="none" strike="noStrike">
-                <a:solidFill>
-                  <a:schemeClr val="dk1">
-                    <a:tint val="75000"/>
-                  </a:schemeClr>
-                </a:solidFill>
-                <a:effectLst/>
-                <a:uFillTx/>
-                <a:latin typeface="Calibri"/>
-              </a:rPr>
-              <a:t>&lt;number&gt;</a:t>
+              <a:t>1</a:t>
             </a:fld>
             <a:endParaRPr lang="en-US" sz="1200" b="0" u="none" strike="noStrike">
               <a:solidFill>
@@ -5861,8 +5871,8 @@
 </file>
 
 <file path=ppt/slideLayouts/slideLayout7.xml><?xml version="1.0" encoding="utf-8"?>
-<p:sldLayout xmlns:a="http://schemas.openxmlformats.org/drawingml/2006/main" xmlns:p="http://schemas.openxmlformats.org/presentationml/2006/main" xmlns:r="http://schemas.openxmlformats.org/officeDocument/2006/relationships" xmlns:p14="http://schemas.microsoft.com/office/powerpoint/2010/main" xmlns:p15="http://schemas.microsoft.com/office/powerpoint/2012/main" xmlns:mc="http://schemas.openxmlformats.org/markup-compatibility/2006" type="blank" preserve="1">
-  <p:cSld name="Picture with Caption">
+<p:sldLayout xmlns:a="http://schemas.openxmlformats.org/drawingml/2006/main" xmlns:p="http://schemas.openxmlformats.org/presentationml/2006/main" xmlns:r="http://schemas.openxmlformats.org/officeDocument/2006/relationships" xmlns:p14="http://schemas.microsoft.com/office/powerpoint/2010/main" xmlns:p15="http://schemas.microsoft.com/office/powerpoint/2012/main" xmlns:mc="http://schemas.openxmlformats.org/markup-compatibility/2006" type="titleOnly" preserve="1">
+  <p:cSld name="Title Only">
     <p:bg>
       <p:bgPr>
         <a:solidFill>
@@ -5896,8 +5906,8 @@
         </p:nvSpPr>
         <p:spPr>
           <a:xfrm>
-            <a:off x="1792440" y="4800600"/>
-            <a:ext cx="5483880" cy="564120"/>
+            <a:off x="457200" y="274680"/>
+            <a:ext cx="8226720" cy="1140120"/>
           </a:xfrm>
           <a:prstGeom prst="rect">
             <a:avLst/>
@@ -5908,11 +5918,11 @@
           </a:ln>
         </p:spPr>
         <p:txBody>
-          <a:bodyPr lIns="91440" tIns="45720" rIns="91440" bIns="45720" anchor="b">
+          <a:bodyPr lIns="91440" tIns="45720" rIns="91440" bIns="45720" anchor="ctr">
             <a:noAutofit/>
           </a:bodyPr>
           <a:lstStyle>
-            <a:lvl1pPr indent="0" algn="l" defTabSz="457200">
+            <a:lvl1pPr indent="0" algn="ctr" defTabSz="457200">
               <a:lnSpc>
                 <a:spcPct val="100000"/>
               </a:lnSpc>
@@ -5920,7 +5930,7 @@
               <a:tabLst>
                 <a:tab pos="0" algn="l"/>
               </a:tabLst>
-              <a:defRPr lang="en-US" sz="2000" b="1" u="none" strike="noStrike">
+              <a:defRPr lang="en-US" sz="4400" b="0" u="none" strike="noStrike">
                 <a:solidFill>
                   <a:schemeClr val="dk1"/>
                 </a:solidFill>
@@ -5931,7 +5941,7 @@
             </a:lvl1pPr>
           </a:lstStyle>
           <a:p>
-            <a:pPr indent="0" algn="l" defTabSz="457200">
+            <a:pPr indent="0" algn="ctr" defTabSz="457200">
               <a:lnSpc>
                 <a:spcPct val="100000"/>
               </a:lnSpc>
@@ -5941,7 +5951,7 @@
               </a:tabLst>
             </a:pPr>
             <a:r>
-              <a:rPr lang="en-US" sz="2000" b="1" u="none" strike="noStrike">
+              <a:rPr lang="en-US" sz="4400" b="0" u="none" strike="noStrike">
                 <a:solidFill>
                   <a:schemeClr val="dk1"/>
                 </a:solidFill>
@@ -5951,7 +5961,7 @@
               </a:rPr>
               <a:t>Click to edit Master title style</a:t>
             </a:r>
-            <a:endParaRPr lang="en-US" sz="2000" b="1" u="none" strike="noStrike">
+            <a:endParaRPr lang="en-US" sz="4400" b="0" u="none" strike="noStrike">
               <a:solidFill>
                 <a:schemeClr val="dk1"/>
               </a:solidFill>
@@ -5965,560 +5975,6 @@
       <p:sp>
         <p:nvSpPr>
           <p:cNvPr id="37" name="PlaceHolder 2"/>
-          <p:cNvSpPr>
-            <a:spLocks noGrp="1"/>
-          </p:cNvSpPr>
-          <p:nvPr>
-            <p:ph type="body"/>
-          </p:nvPr>
-        </p:nvSpPr>
-        <p:spPr>
-          <a:xfrm>
-            <a:off x="1792440" y="612720"/>
-            <a:ext cx="5483880" cy="4112280"/>
-          </a:xfrm>
-          <a:prstGeom prst="rect">
-            <a:avLst/>
-          </a:prstGeom>
-          <a:noFill/>
-          <a:ln w="0">
-            <a:noFill/>
-          </a:ln>
-        </p:spPr>
-        <p:txBody>
-          <a:bodyPr lIns="90000" tIns="45000" rIns="90000" bIns="45000" anchor="t">
-            <a:noAutofit/>
-          </a:bodyPr>
-          <a:lstStyle>
-            <a:lvl1pPr algn="l" defTabSz="457200">
-              <a:lnSpc>
-                <a:spcPct val="100000"/>
-              </a:lnSpc>
-              <a:spcBef>
-                <a:spcPts val="281"/>
-              </a:spcBef>
-              <a:buClr>
-                <a:srgbClr val="000000"/>
-              </a:buClr>
-              <a:buFont typeface="Arial"/>
-              <a:buChar char="•"/>
-              <a:tabLst>
-                <a:tab pos="0" algn="l"/>
-              </a:tabLst>
-              <a:defRPr lang="en-US" sz="3200" b="0" u="none" strike="noStrike">
-                <a:solidFill>
-                  <a:schemeClr val="dk1"/>
-                </a:solidFill>
-                <a:effectLst/>
-                <a:uFillTx/>
-                <a:latin typeface="Calibri"/>
-              </a:defRPr>
-            </a:lvl1pPr>
-            <a:lvl2pPr lvl="1" algn="l" defTabSz="457200">
-              <a:lnSpc>
-                <a:spcPct val="100000"/>
-              </a:lnSpc>
-              <a:spcBef>
-                <a:spcPts val="561"/>
-              </a:spcBef>
-              <a:buClr>
-                <a:srgbClr val="000000"/>
-              </a:buClr>
-              <a:buSzPct val="75000"/>
-              <a:buFont typeface="Symbol" charset="2"/>
-              <a:buChar char=""/>
-              <a:tabLst>
-                <a:tab pos="0" algn="l"/>
-              </a:tabLst>
-              <a:defRPr lang="en-US" sz="3200" b="0" u="none" strike="noStrike">
-                <a:solidFill>
-                  <a:schemeClr val="dk1"/>
-                </a:solidFill>
-                <a:effectLst/>
-                <a:uFillTx/>
-                <a:latin typeface="Calibri"/>
-              </a:defRPr>
-            </a:lvl2pPr>
-            <a:lvl3pPr lvl="2" algn="l" defTabSz="457200">
-              <a:lnSpc>
-                <a:spcPct val="100000"/>
-              </a:lnSpc>
-              <a:spcBef>
-                <a:spcPts val="479"/>
-              </a:spcBef>
-              <a:buClr>
-                <a:srgbClr val="000000"/>
-              </a:buClr>
-              <a:buSzPct val="45000"/>
-              <a:buFont typeface="Wingdings" charset="2"/>
-              <a:buChar char=""/>
-              <a:tabLst>
-                <a:tab pos="0" algn="l"/>
-              </a:tabLst>
-              <a:defRPr lang="en-US" sz="3200" b="0" u="none" strike="noStrike">
-                <a:solidFill>
-                  <a:schemeClr val="dk1"/>
-                </a:solidFill>
-                <a:effectLst/>
-                <a:uFillTx/>
-                <a:latin typeface="Calibri"/>
-              </a:defRPr>
-            </a:lvl3pPr>
-            <a:lvl4pPr lvl="3" algn="l" defTabSz="457200">
-              <a:lnSpc>
-                <a:spcPct val="100000"/>
-              </a:lnSpc>
-              <a:spcBef>
-                <a:spcPts val="400"/>
-              </a:spcBef>
-              <a:buClr>
-                <a:srgbClr val="000000"/>
-              </a:buClr>
-              <a:buSzPct val="75000"/>
-              <a:buFont typeface="Symbol" charset="2"/>
-              <a:buChar char=""/>
-              <a:tabLst>
-                <a:tab pos="0" algn="l"/>
-              </a:tabLst>
-              <a:defRPr lang="en-US" sz="3200" b="0" u="none" strike="noStrike">
-                <a:solidFill>
-                  <a:schemeClr val="dk1"/>
-                </a:solidFill>
-                <a:effectLst/>
-                <a:uFillTx/>
-                <a:latin typeface="Calibri"/>
-              </a:defRPr>
-            </a:lvl4pPr>
-            <a:lvl5pPr lvl="4" algn="l" defTabSz="457200">
-              <a:lnSpc>
-                <a:spcPct val="100000"/>
-              </a:lnSpc>
-              <a:spcBef>
-                <a:spcPts val="400"/>
-              </a:spcBef>
-              <a:buClr>
-                <a:srgbClr val="000000"/>
-              </a:buClr>
-              <a:buSzPct val="45000"/>
-              <a:buFont typeface="Wingdings" charset="2"/>
-              <a:buChar char=""/>
-              <a:tabLst>
-                <a:tab pos="0" algn="l"/>
-              </a:tabLst>
-              <a:defRPr lang="en-US" sz="3200" b="0" u="none" strike="noStrike">
-                <a:solidFill>
-                  <a:schemeClr val="dk1"/>
-                </a:solidFill>
-                <a:effectLst/>
-                <a:uFillTx/>
-                <a:latin typeface="Calibri"/>
-              </a:defRPr>
-            </a:lvl5pPr>
-            <a:lvl6pPr lvl="5" algn="l" defTabSz="457200">
-              <a:lnSpc>
-                <a:spcPct val="100000"/>
-              </a:lnSpc>
-              <a:spcBef>
-                <a:spcPts val="283"/>
-              </a:spcBef>
-              <a:buClr>
-                <a:srgbClr val="000000"/>
-              </a:buClr>
-              <a:buSzPct val="45000"/>
-              <a:buFont typeface="Wingdings" charset="2"/>
-              <a:buChar char=""/>
-              <a:tabLst>
-                <a:tab pos="0" algn="l"/>
-              </a:tabLst>
-              <a:defRPr lang="en-US" sz="3200" b="0" u="none" strike="noStrike">
-                <a:solidFill>
-                  <a:schemeClr val="dk1"/>
-                </a:solidFill>
-                <a:effectLst/>
-                <a:uFillTx/>
-                <a:latin typeface="Calibri"/>
-              </a:defRPr>
-            </a:lvl6pPr>
-            <a:lvl7pPr lvl="6" algn="l" defTabSz="457200">
-              <a:lnSpc>
-                <a:spcPct val="100000"/>
-              </a:lnSpc>
-              <a:spcBef>
-                <a:spcPts val="283"/>
-              </a:spcBef>
-              <a:buClr>
-                <a:srgbClr val="000000"/>
-              </a:buClr>
-              <a:buSzPct val="45000"/>
-              <a:buFont typeface="Wingdings" charset="2"/>
-              <a:buChar char=""/>
-              <a:tabLst>
-                <a:tab pos="0" algn="l"/>
-              </a:tabLst>
-              <a:defRPr lang="en-US" sz="3200" b="0" u="none" strike="noStrike">
-                <a:solidFill>
-                  <a:schemeClr val="dk1"/>
-                </a:solidFill>
-                <a:effectLst/>
-                <a:uFillTx/>
-                <a:latin typeface="Calibri"/>
-              </a:defRPr>
-            </a:lvl7pPr>
-          </a:lstStyle>
-          <a:p>
-            <a:pPr marL="432000" indent="-324000" algn="l" defTabSz="457200">
-              <a:lnSpc>
-                <a:spcPct val="100000"/>
-              </a:lnSpc>
-              <a:spcBef>
-                <a:spcPts val="281"/>
-              </a:spcBef>
-              <a:buClr>
-                <a:srgbClr val="000000"/>
-              </a:buClr>
-              <a:buFont typeface="Arial"/>
-              <a:buChar char="•"/>
-              <a:tabLst>
-                <a:tab pos="0" algn="l"/>
-              </a:tabLst>
-            </a:pPr>
-            <a:r>
-              <a:rPr lang="en-US" sz="3200" b="0" u="none" strike="noStrike">
-                <a:solidFill>
-                  <a:schemeClr val="dk1"/>
-                </a:solidFill>
-                <a:effectLst/>
-                <a:uFillTx/>
-                <a:latin typeface="Calibri"/>
-              </a:rPr>
-              <a:t>Click to edit the outline text format</a:t>
-            </a:r>
-            <a:endParaRPr lang="en-US" sz="3200" b="0" u="none" strike="noStrike">
-              <a:solidFill>
-                <a:schemeClr val="dk1"/>
-              </a:solidFill>
-              <a:effectLst/>
-              <a:uFillTx/>
-              <a:latin typeface="Calibri"/>
-            </a:endParaRPr>
-          </a:p>
-          <a:p>
-            <a:pPr marL="457200" lvl="1" indent="-324000" algn="l" defTabSz="457200">
-              <a:lnSpc>
-                <a:spcPct val="100000"/>
-              </a:lnSpc>
-              <a:spcBef>
-                <a:spcPts val="561"/>
-              </a:spcBef>
-              <a:buClr>
-                <a:srgbClr val="000000"/>
-              </a:buClr>
-              <a:buSzPct val="75000"/>
-              <a:buFont typeface="Symbol" charset="2"/>
-              <a:buChar char=""/>
-              <a:tabLst>
-                <a:tab pos="0" algn="l"/>
-              </a:tabLst>
-            </a:pPr>
-            <a:r>
-              <a:rPr lang="en-US" sz="3200" b="0" u="none" strike="noStrike">
-                <a:solidFill>
-                  <a:schemeClr val="dk1"/>
-                </a:solidFill>
-                <a:effectLst/>
-                <a:uFillTx/>
-                <a:latin typeface="Calibri"/>
-              </a:rPr>
-              <a:t>Second Outline Level</a:t>
-            </a:r>
-            <a:endParaRPr lang="en-US" sz="3200" b="0" u="none" strike="noStrike">
-              <a:solidFill>
-                <a:schemeClr val="dk1"/>
-              </a:solidFill>
-              <a:effectLst/>
-              <a:uFillTx/>
-              <a:latin typeface="Calibri"/>
-            </a:endParaRPr>
-          </a:p>
-          <a:p>
-            <a:pPr marL="914400" lvl="2" indent="-288000" algn="l" defTabSz="457200">
-              <a:lnSpc>
-                <a:spcPct val="100000"/>
-              </a:lnSpc>
-              <a:spcBef>
-                <a:spcPts val="479"/>
-              </a:spcBef>
-              <a:buClr>
-                <a:srgbClr val="000000"/>
-              </a:buClr>
-              <a:buSzPct val="45000"/>
-              <a:buFont typeface="Wingdings" charset="2"/>
-              <a:buChar char=""/>
-              <a:tabLst>
-                <a:tab pos="0" algn="l"/>
-              </a:tabLst>
-            </a:pPr>
-            <a:r>
-              <a:rPr lang="en-US" sz="3200" b="0" u="none" strike="noStrike">
-                <a:solidFill>
-                  <a:schemeClr val="dk1"/>
-                </a:solidFill>
-                <a:effectLst/>
-                <a:uFillTx/>
-                <a:latin typeface="Calibri"/>
-              </a:rPr>
-              <a:t>Third Outline Level</a:t>
-            </a:r>
-            <a:endParaRPr lang="en-US" sz="3200" b="0" u="none" strike="noStrike">
-              <a:solidFill>
-                <a:schemeClr val="dk1"/>
-              </a:solidFill>
-              <a:effectLst/>
-              <a:uFillTx/>
-              <a:latin typeface="Calibri"/>
-            </a:endParaRPr>
-          </a:p>
-          <a:p>
-            <a:pPr marL="1371600" lvl="3" indent="-216000" algn="l" defTabSz="457200">
-              <a:lnSpc>
-                <a:spcPct val="100000"/>
-              </a:lnSpc>
-              <a:spcBef>
-                <a:spcPts val="400"/>
-              </a:spcBef>
-              <a:buClr>
-                <a:srgbClr val="000000"/>
-              </a:buClr>
-              <a:buSzPct val="75000"/>
-              <a:buFont typeface="Symbol" charset="2"/>
-              <a:buChar char=""/>
-              <a:tabLst>
-                <a:tab pos="0" algn="l"/>
-              </a:tabLst>
-            </a:pPr>
-            <a:r>
-              <a:rPr lang="en-US" sz="3200" b="0" u="none" strike="noStrike">
-                <a:solidFill>
-                  <a:schemeClr val="dk1"/>
-                </a:solidFill>
-                <a:effectLst/>
-                <a:uFillTx/>
-                <a:latin typeface="Calibri"/>
-              </a:rPr>
-              <a:t>Fourth Outline Level</a:t>
-            </a:r>
-            <a:endParaRPr lang="en-US" sz="3200" b="0" u="none" strike="noStrike">
-              <a:solidFill>
-                <a:schemeClr val="dk1"/>
-              </a:solidFill>
-              <a:effectLst/>
-              <a:uFillTx/>
-              <a:latin typeface="Calibri"/>
-            </a:endParaRPr>
-          </a:p>
-          <a:p>
-            <a:pPr marL="1828800" lvl="4" indent="-216000" algn="l" defTabSz="457200">
-              <a:lnSpc>
-                <a:spcPct val="100000"/>
-              </a:lnSpc>
-              <a:spcBef>
-                <a:spcPts val="400"/>
-              </a:spcBef>
-              <a:buClr>
-                <a:srgbClr val="000000"/>
-              </a:buClr>
-              <a:buSzPct val="45000"/>
-              <a:buFont typeface="Wingdings" charset="2"/>
-              <a:buChar char=""/>
-              <a:tabLst>
-                <a:tab pos="0" algn="l"/>
-              </a:tabLst>
-            </a:pPr>
-            <a:r>
-              <a:rPr lang="en-US" sz="3200" b="0" u="none" strike="noStrike">
-                <a:solidFill>
-                  <a:schemeClr val="dk1"/>
-                </a:solidFill>
-                <a:effectLst/>
-                <a:uFillTx/>
-                <a:latin typeface="Calibri"/>
-              </a:rPr>
-              <a:t>Fifth Outline Level</a:t>
-            </a:r>
-            <a:endParaRPr lang="en-US" sz="3200" b="0" u="none" strike="noStrike">
-              <a:solidFill>
-                <a:schemeClr val="dk1"/>
-              </a:solidFill>
-              <a:effectLst/>
-              <a:uFillTx/>
-              <a:latin typeface="Calibri"/>
-            </a:endParaRPr>
-          </a:p>
-          <a:p>
-            <a:pPr marL="2286000" lvl="5" indent="-216000" algn="l" defTabSz="457200">
-              <a:lnSpc>
-                <a:spcPct val="100000"/>
-              </a:lnSpc>
-              <a:spcBef>
-                <a:spcPts val="283"/>
-              </a:spcBef>
-              <a:buClr>
-                <a:srgbClr val="000000"/>
-              </a:buClr>
-              <a:buSzPct val="45000"/>
-              <a:buFont typeface="Wingdings" charset="2"/>
-              <a:buChar char=""/>
-              <a:tabLst>
-                <a:tab pos="0" algn="l"/>
-              </a:tabLst>
-            </a:pPr>
-            <a:r>
-              <a:rPr lang="en-US" sz="3200" b="0" u="none" strike="noStrike">
-                <a:solidFill>
-                  <a:schemeClr val="dk1"/>
-                </a:solidFill>
-                <a:effectLst/>
-                <a:uFillTx/>
-                <a:latin typeface="Calibri"/>
-              </a:rPr>
-              <a:t>Sixth Outline Level</a:t>
-            </a:r>
-            <a:endParaRPr lang="en-US" sz="3200" b="0" u="none" strike="noStrike">
-              <a:solidFill>
-                <a:schemeClr val="dk1"/>
-              </a:solidFill>
-              <a:effectLst/>
-              <a:uFillTx/>
-              <a:latin typeface="Calibri"/>
-            </a:endParaRPr>
-          </a:p>
-          <a:p>
-            <a:pPr marL="2743200" lvl="6" indent="-216000" algn="l" defTabSz="457200">
-              <a:lnSpc>
-                <a:spcPct val="100000"/>
-              </a:lnSpc>
-              <a:spcBef>
-                <a:spcPts val="283"/>
-              </a:spcBef>
-              <a:buClr>
-                <a:srgbClr val="000000"/>
-              </a:buClr>
-              <a:buSzPct val="45000"/>
-              <a:buFont typeface="Wingdings" charset="2"/>
-              <a:buChar char=""/>
-              <a:tabLst>
-                <a:tab pos="0" algn="l"/>
-              </a:tabLst>
-            </a:pPr>
-            <a:r>
-              <a:rPr lang="en-US" sz="3200" b="0" u="none" strike="noStrike">
-                <a:solidFill>
-                  <a:schemeClr val="dk1"/>
-                </a:solidFill>
-                <a:effectLst/>
-                <a:uFillTx/>
-                <a:latin typeface="Calibri"/>
-              </a:rPr>
-              <a:t>Seventh Outline Level</a:t>
-            </a:r>
-            <a:endParaRPr lang="en-US" sz="3200" b="0" u="none" strike="noStrike">
-              <a:solidFill>
-                <a:schemeClr val="dk1"/>
-              </a:solidFill>
-              <a:effectLst/>
-              <a:uFillTx/>
-              <a:latin typeface="Calibri"/>
-            </a:endParaRPr>
-          </a:p>
-        </p:txBody>
-      </p:sp>
-      <p:sp>
-        <p:nvSpPr>
-          <p:cNvPr id="38" name="PlaceHolder 3"/>
-          <p:cNvSpPr>
-            <a:spLocks noGrp="1"/>
-          </p:cNvSpPr>
-          <p:nvPr>
-            <p:ph type="body"/>
-          </p:nvPr>
-        </p:nvSpPr>
-        <p:spPr>
-          <a:xfrm>
-            <a:off x="1792440" y="5367240"/>
-            <a:ext cx="5483880" cy="802440"/>
-          </a:xfrm>
-          <a:prstGeom prst="rect">
-            <a:avLst/>
-          </a:prstGeom>
-          <a:noFill/>
-          <a:ln w="0">
-            <a:noFill/>
-          </a:ln>
-        </p:spPr>
-        <p:txBody>
-          <a:bodyPr lIns="91440" tIns="45720" rIns="91440" bIns="45720" anchor="t">
-            <a:noAutofit/>
-          </a:bodyPr>
-          <a:lstStyle>
-            <a:lvl1pPr indent="0" algn="l" defTabSz="457200">
-              <a:lnSpc>
-                <a:spcPct val="100000"/>
-              </a:lnSpc>
-              <a:spcBef>
-                <a:spcPts val="281"/>
-              </a:spcBef>
-              <a:buNone/>
-              <a:tabLst>
-                <a:tab pos="0" algn="l"/>
-              </a:tabLst>
-              <a:defRPr lang="en-US" sz="1400" b="0" u="none" strike="noStrike">
-                <a:solidFill>
-                  <a:schemeClr val="dk1"/>
-                </a:solidFill>
-                <a:effectLst/>
-                <a:uFillTx/>
-                <a:latin typeface="Calibri"/>
-              </a:defRPr>
-            </a:lvl1pPr>
-          </a:lstStyle>
-          <a:p>
-            <a:pPr indent="0" algn="l" defTabSz="457200">
-              <a:lnSpc>
-                <a:spcPct val="100000"/>
-              </a:lnSpc>
-              <a:spcBef>
-                <a:spcPts val="281"/>
-              </a:spcBef>
-              <a:buNone/>
-              <a:tabLst>
-                <a:tab pos="0" algn="l"/>
-              </a:tabLst>
-            </a:pPr>
-            <a:r>
-              <a:rPr lang="en-US" sz="1400" b="0" u="none" strike="noStrike">
-                <a:solidFill>
-                  <a:schemeClr val="dk1"/>
-                </a:solidFill>
-                <a:effectLst/>
-                <a:uFillTx/>
-                <a:latin typeface="Calibri"/>
-              </a:rPr>
-              <a:t>Click to edit Master text styles</a:t>
-            </a:r>
-            <a:endParaRPr lang="en-US" sz="1400" b="0" u="none" strike="noStrike">
-              <a:solidFill>
-                <a:schemeClr val="dk1"/>
-              </a:solidFill>
-              <a:effectLst/>
-              <a:uFillTx/>
-              <a:latin typeface="Calibri"/>
-            </a:endParaRPr>
-          </a:p>
-        </p:txBody>
-      </p:sp>
-      <p:sp>
-        <p:nvSpPr>
-          <p:cNvPr id="39" name="PlaceHolder 4"/>
           <p:cNvSpPr>
             <a:spLocks noGrp="1"/>
           </p:cNvSpPr>
@@ -6529,7 +5985,7 @@
         <p:spPr>
           <a:xfrm>
             <a:off x="457200" y="6356520"/>
-            <a:ext cx="2131200" cy="362520"/>
+            <a:ext cx="2130840" cy="362160"/>
           </a:xfrm>
           <a:prstGeom prst="rect">
             <a:avLst/>
@@ -6585,7 +6041,7 @@
                 <a:uFillTx/>
                 <a:latin typeface="Calibri"/>
               </a:rPr>
-              <a:t>&lt;date/time&gt;</a:t>
+              <a:t> </a:t>
             </a:r>
             <a:endParaRPr lang="en-US" sz="1200" b="0" u="none" strike="noStrike">
               <a:solidFill>
@@ -6600,7 +6056,7 @@
       </p:sp>
       <p:sp>
         <p:nvSpPr>
-          <p:cNvPr id="40" name="PlaceHolder 5"/>
+          <p:cNvPr id="38" name="PlaceHolder 3"/>
           <p:cNvSpPr>
             <a:spLocks noGrp="1"/>
           </p:cNvSpPr>
@@ -6611,7 +6067,7 @@
         <p:spPr>
           <a:xfrm>
             <a:off x="3124080" y="6356520"/>
-            <a:ext cx="2892960" cy="362520"/>
+            <a:ext cx="2892600" cy="362160"/>
           </a:xfrm>
           <a:prstGeom prst="rect">
             <a:avLst/>
@@ -6663,7 +6119,7 @@
                 <a:uFillTx/>
                 <a:latin typeface="Times New Roman"/>
               </a:rPr>
-              <a:t>&lt;footer&gt;</a:t>
+              <a:t> </a:t>
             </a:r>
             <a:endParaRPr lang="en-US" sz="1400" b="0" u="none" strike="noStrike">
               <a:solidFill>
@@ -6678,7 +6134,7 @@
       </p:sp>
       <p:sp>
         <p:nvSpPr>
-          <p:cNvPr id="41" name="PlaceHolder 6"/>
+          <p:cNvPr id="39" name="PlaceHolder 4"/>
           <p:cNvSpPr>
             <a:spLocks noGrp="1"/>
           </p:cNvSpPr>
@@ -6689,7 +6145,7 @@
         <p:spPr>
           <a:xfrm>
             <a:off x="6553080" y="6356520"/>
-            <a:ext cx="2131200" cy="362520"/>
+            <a:ext cx="2130840" cy="362160"/>
           </a:xfrm>
           <a:prstGeom prst="rect">
             <a:avLst/>
@@ -6734,7 +6190,7 @@
                 <a:tab pos="0" algn="l"/>
               </a:tabLst>
             </a:pPr>
-            <a:fld id="{4AEFB721-0F7D-46AF-8EC4-F71B50CB873D}" type="slidenum">
+            <a:fld id="{B410FDB7-8F14-4052-AFEC-494F132DD4FE}" type="slidenum">
               <a:rPr lang="en-US" sz="1200" b="0" u="none" strike="noStrike">
                 <a:solidFill>
                   <a:schemeClr val="dk1">
@@ -6745,7 +6201,7 @@
                 <a:uFillTx/>
                 <a:latin typeface="Calibri"/>
               </a:rPr>
-              <a:t>&lt;number&gt;</a:t>
+              <a:t>1</a:t>
             </a:fld>
             <a:endParaRPr lang="en-US" sz="1200" b="0" u="none" strike="noStrike">
               <a:solidFill>
@@ -6764,8 +6220,8 @@
 </file>
 
 <file path=ppt/slideLayouts/slideLayout8.xml><?xml version="1.0" encoding="utf-8"?>
-<p:sldLayout xmlns:a="http://schemas.openxmlformats.org/drawingml/2006/main" xmlns:p="http://schemas.openxmlformats.org/presentationml/2006/main" xmlns:r="http://schemas.openxmlformats.org/officeDocument/2006/relationships" xmlns:p14="http://schemas.microsoft.com/office/powerpoint/2010/main" xmlns:p15="http://schemas.microsoft.com/office/powerpoint/2012/main" xmlns:mc="http://schemas.openxmlformats.org/markup-compatibility/2006" type="title" preserve="1">
-  <p:cSld name="Title Slide">
+<p:sldLayout xmlns:a="http://schemas.openxmlformats.org/drawingml/2006/main" xmlns:p="http://schemas.openxmlformats.org/presentationml/2006/main" xmlns:r="http://schemas.openxmlformats.org/officeDocument/2006/relationships" xmlns:p14="http://schemas.microsoft.com/office/powerpoint/2010/main" xmlns:p15="http://schemas.microsoft.com/office/powerpoint/2012/main" xmlns:mc="http://schemas.openxmlformats.org/markup-compatibility/2006" type="blank" preserve="1">
+  <p:cSld name="Blank">
     <p:bg>
       <p:bgPr>
         <a:solidFill>
@@ -6789,85 +6245,7 @@
       </p:grpSpPr>
       <p:sp>
         <p:nvSpPr>
-          <p:cNvPr id="42" name="PlaceHolder 1"/>
-          <p:cNvSpPr>
-            <a:spLocks noGrp="1"/>
-          </p:cNvSpPr>
-          <p:nvPr>
-            <p:ph type="title"/>
-          </p:nvPr>
-        </p:nvSpPr>
-        <p:spPr>
-          <a:xfrm>
-            <a:off x="685800" y="2130480"/>
-            <a:ext cx="7769880" cy="1467360"/>
-          </a:xfrm>
-          <a:prstGeom prst="rect">
-            <a:avLst/>
-          </a:prstGeom>
-          <a:noFill/>
-          <a:ln w="0">
-            <a:noFill/>
-          </a:ln>
-        </p:spPr>
-        <p:txBody>
-          <a:bodyPr lIns="91440" tIns="45720" rIns="91440" bIns="45720" anchor="ctr">
-            <a:noAutofit/>
-          </a:bodyPr>
-          <a:lstStyle>
-            <a:lvl1pPr indent="0" algn="ctr" defTabSz="457200">
-              <a:lnSpc>
-                <a:spcPct val="100000"/>
-              </a:lnSpc>
-              <a:buNone/>
-              <a:tabLst>
-                <a:tab pos="0" algn="l"/>
-              </a:tabLst>
-              <a:defRPr lang="en-US" sz="4400" b="0" u="none" strike="noStrike">
-                <a:solidFill>
-                  <a:schemeClr val="dk1"/>
-                </a:solidFill>
-                <a:effectLst/>
-                <a:uFillTx/>
-                <a:latin typeface="Calibri"/>
-              </a:defRPr>
-            </a:lvl1pPr>
-          </a:lstStyle>
-          <a:p>
-            <a:pPr indent="0" algn="ctr" defTabSz="457200">
-              <a:lnSpc>
-                <a:spcPct val="100000"/>
-              </a:lnSpc>
-              <a:buNone/>
-              <a:tabLst>
-                <a:tab pos="0" algn="l"/>
-              </a:tabLst>
-            </a:pPr>
-            <a:r>
-              <a:rPr lang="en-US" sz="4400" b="0" u="none" strike="noStrike">
-                <a:solidFill>
-                  <a:schemeClr val="dk1"/>
-                </a:solidFill>
-                <a:effectLst/>
-                <a:uFillTx/>
-                <a:latin typeface="Calibri"/>
-              </a:rPr>
-              <a:t>Click to edit Master title style</a:t>
-            </a:r>
-            <a:endParaRPr lang="en-US" sz="4400" b="0" u="none" strike="noStrike">
-              <a:solidFill>
-                <a:schemeClr val="dk1"/>
-              </a:solidFill>
-              <a:effectLst/>
-              <a:uFillTx/>
-              <a:latin typeface="Calibri"/>
-            </a:endParaRPr>
-          </a:p>
-        </p:txBody>
-      </p:sp>
-      <p:sp>
-        <p:nvSpPr>
-          <p:cNvPr id="43" name="PlaceHolder 2"/>
+          <p:cNvPr id="40" name="PlaceHolder 1"/>
           <p:cNvSpPr>
             <a:spLocks noGrp="1"/>
           </p:cNvSpPr>
@@ -6878,7 +6256,7 @@
         <p:spPr>
           <a:xfrm>
             <a:off x="457200" y="6356520"/>
-            <a:ext cx="2131200" cy="362520"/>
+            <a:ext cx="2130840" cy="362160"/>
           </a:xfrm>
           <a:prstGeom prst="rect">
             <a:avLst/>
@@ -6934,7 +6312,7 @@
                 <a:uFillTx/>
                 <a:latin typeface="Calibri"/>
               </a:rPr>
-              <a:t>&lt;date/time&gt;</a:t>
+              <a:t> </a:t>
             </a:r>
             <a:endParaRPr lang="en-US" sz="1200" b="0" u="none" strike="noStrike">
               <a:solidFill>
@@ -6949,7 +6327,7 @@
       </p:sp>
       <p:sp>
         <p:nvSpPr>
-          <p:cNvPr id="44" name="PlaceHolder 3"/>
+          <p:cNvPr id="41" name="PlaceHolder 2"/>
           <p:cNvSpPr>
             <a:spLocks noGrp="1"/>
           </p:cNvSpPr>
@@ -6960,7 +6338,7 @@
         <p:spPr>
           <a:xfrm>
             <a:off x="3124080" y="6356520"/>
-            <a:ext cx="2892960" cy="362520"/>
+            <a:ext cx="2892600" cy="362160"/>
           </a:xfrm>
           <a:prstGeom prst="rect">
             <a:avLst/>
@@ -7012,7 +6390,7 @@
                 <a:uFillTx/>
                 <a:latin typeface="Times New Roman"/>
               </a:rPr>
-              <a:t>&lt;footer&gt;</a:t>
+              <a:t> </a:t>
             </a:r>
             <a:endParaRPr lang="en-US" sz="1400" b="0" u="none" strike="noStrike">
               <a:solidFill>
@@ -7027,7 +6405,7 @@
       </p:sp>
       <p:sp>
         <p:nvSpPr>
-          <p:cNvPr id="45" name="PlaceHolder 4"/>
+          <p:cNvPr id="42" name="PlaceHolder 3"/>
           <p:cNvSpPr>
             <a:spLocks noGrp="1"/>
           </p:cNvSpPr>
@@ -7038,7 +6416,7 @@
         <p:spPr>
           <a:xfrm>
             <a:off x="6553080" y="6356520"/>
-            <a:ext cx="2131200" cy="362520"/>
+            <a:ext cx="2130840" cy="362160"/>
           </a:xfrm>
           <a:prstGeom prst="rect">
             <a:avLst/>
@@ -7083,7 +6461,7 @@
                 <a:tab pos="0" algn="l"/>
               </a:tabLst>
             </a:pPr>
-            <a:fld id="{1E1780C1-663E-466E-9AC6-670224D2B3BD}" type="slidenum">
+            <a:fld id="{4460C892-8CB3-49C3-9753-3FE4549D0338}" type="slidenum">
               <a:rPr lang="en-US" sz="1200" b="0" u="none" strike="noStrike">
                 <a:solidFill>
                   <a:schemeClr val="dk1">
@@ -7094,7 +6472,7 @@
                 <a:uFillTx/>
                 <a:latin typeface="Calibri"/>
               </a:rPr>
-              <a:t>&lt;number&gt;</a:t>
+              <a:t>1</a:t>
             </a:fld>
             <a:endParaRPr lang="en-US" sz="1200" b="0" u="none" strike="noStrike">
               <a:solidFill>
@@ -7103,6 +6481,512 @@
               <a:effectLst/>
               <a:uFillTx/>
               <a:latin typeface="Times New Roman"/>
+            </a:endParaRPr>
+          </a:p>
+        </p:txBody>
+      </p:sp>
+      <p:sp>
+        <p:nvSpPr>
+          <p:cNvPr id="43" name="PlaceHolder 4"/>
+          <p:cNvSpPr>
+            <a:spLocks noGrp="1"/>
+          </p:cNvSpPr>
+          <p:nvPr>
+            <p:ph type="title"/>
+          </p:nvPr>
+        </p:nvSpPr>
+        <p:spPr>
+          <a:xfrm>
+            <a:off x="609480" y="273600"/>
+            <a:ext cx="10969920" cy="1142280"/>
+          </a:xfrm>
+          <a:prstGeom prst="rect">
+            <a:avLst/>
+          </a:prstGeom>
+          <a:noFill/>
+          <a:ln w="0">
+            <a:noFill/>
+          </a:ln>
+        </p:spPr>
+        <p:txBody>
+          <a:bodyPr lIns="0" tIns="0" rIns="0" bIns="0" anchor="ctr">
+            <a:noAutofit/>
+          </a:bodyPr>
+          <a:lstStyle>
+            <a:lvl1pPr indent="0" algn="ctr" defTabSz="457200">
+              <a:lnSpc>
+                <a:spcPct val="100000"/>
+              </a:lnSpc>
+              <a:buNone/>
+              <a:tabLst>
+                <a:tab pos="0" algn="l"/>
+              </a:tabLst>
+              <a:defRPr lang="en-US" sz="4400" b="0" u="none" strike="noStrike">
+                <a:solidFill>
+                  <a:schemeClr val="dk1"/>
+                </a:solidFill>
+                <a:effectLst/>
+                <a:uFillTx/>
+                <a:latin typeface="Calibri"/>
+              </a:defRPr>
+            </a:lvl1pPr>
+          </a:lstStyle>
+          <a:p>
+            <a:pPr indent="0" algn="ctr" defTabSz="457200">
+              <a:lnSpc>
+                <a:spcPct val="100000"/>
+              </a:lnSpc>
+              <a:buNone/>
+              <a:tabLst>
+                <a:tab pos="0" algn="l"/>
+              </a:tabLst>
+            </a:pPr>
+            <a:r>
+              <a:rPr lang="en-US" sz="4400" b="0" u="none" strike="noStrike">
+                <a:solidFill>
+                  <a:schemeClr val="dk1"/>
+                </a:solidFill>
+                <a:effectLst/>
+                <a:uFillTx/>
+                <a:latin typeface="Calibri"/>
+              </a:rPr>
+              <a:t>Click to edit the title text format</a:t>
+            </a:r>
+            <a:endParaRPr lang="en-US" sz="4400" b="0" u="none" strike="noStrike">
+              <a:solidFill>
+                <a:schemeClr val="dk1"/>
+              </a:solidFill>
+              <a:effectLst/>
+              <a:uFillTx/>
+              <a:latin typeface="Calibri"/>
+            </a:endParaRPr>
+          </a:p>
+        </p:txBody>
+      </p:sp>
+      <p:sp>
+        <p:nvSpPr>
+          <p:cNvPr id="44" name="PlaceHolder 5"/>
+          <p:cNvSpPr>
+            <a:spLocks noGrp="1"/>
+          </p:cNvSpPr>
+          <p:nvPr>
+            <p:ph type="body"/>
+          </p:nvPr>
+        </p:nvSpPr>
+        <p:spPr>
+          <a:xfrm>
+            <a:off x="609480" y="1604520"/>
+            <a:ext cx="10969920" cy="3974760"/>
+          </a:xfrm>
+          <a:prstGeom prst="rect">
+            <a:avLst/>
+          </a:prstGeom>
+          <a:noFill/>
+          <a:ln w="0">
+            <a:noFill/>
+          </a:ln>
+        </p:spPr>
+        <p:txBody>
+          <a:bodyPr lIns="0" tIns="0" rIns="0" bIns="0" anchor="t">
+            <a:normAutofit/>
+          </a:bodyPr>
+          <a:lstStyle>
+            <a:lvl1pPr algn="l" defTabSz="457200">
+              <a:lnSpc>
+                <a:spcPct val="100000"/>
+              </a:lnSpc>
+              <a:spcBef>
+                <a:spcPts val="641"/>
+              </a:spcBef>
+              <a:buClr>
+                <a:srgbClr val="000000"/>
+              </a:buClr>
+              <a:buFont typeface="Arial"/>
+              <a:buChar char="•"/>
+              <a:defRPr lang="en-US" sz="3200" b="0" u="none" strike="noStrike">
+                <a:solidFill>
+                  <a:schemeClr val="dk1"/>
+                </a:solidFill>
+                <a:effectLst/>
+                <a:uFillTx/>
+                <a:latin typeface="Calibri"/>
+              </a:defRPr>
+            </a:lvl1pPr>
+            <a:lvl2pPr lvl="1" algn="l" defTabSz="457200">
+              <a:lnSpc>
+                <a:spcPct val="100000"/>
+              </a:lnSpc>
+              <a:spcBef>
+                <a:spcPts val="561"/>
+              </a:spcBef>
+              <a:buClr>
+                <a:srgbClr val="000000"/>
+              </a:buClr>
+              <a:buSzPct val="75000"/>
+              <a:buFont typeface="Symbol" charset="2"/>
+              <a:buChar char=""/>
+              <a:defRPr lang="en-US" sz="2800" b="0" u="none" strike="noStrike">
+                <a:solidFill>
+                  <a:schemeClr val="dk1"/>
+                </a:solidFill>
+                <a:effectLst/>
+                <a:uFillTx/>
+                <a:latin typeface="Calibri"/>
+              </a:defRPr>
+            </a:lvl2pPr>
+            <a:lvl3pPr lvl="2" algn="l" defTabSz="457200">
+              <a:lnSpc>
+                <a:spcPct val="100000"/>
+              </a:lnSpc>
+              <a:spcBef>
+                <a:spcPts val="479"/>
+              </a:spcBef>
+              <a:buClr>
+                <a:srgbClr val="000000"/>
+              </a:buClr>
+              <a:buSzPct val="45000"/>
+              <a:buFont typeface="Wingdings" charset="2"/>
+              <a:buChar char=""/>
+              <a:defRPr lang="en-US" sz="2400" b="0" u="none" strike="noStrike">
+                <a:solidFill>
+                  <a:schemeClr val="dk1"/>
+                </a:solidFill>
+                <a:effectLst/>
+                <a:uFillTx/>
+                <a:latin typeface="Calibri"/>
+              </a:defRPr>
+            </a:lvl3pPr>
+            <a:lvl4pPr lvl="3" algn="l" defTabSz="457200">
+              <a:lnSpc>
+                <a:spcPct val="100000"/>
+              </a:lnSpc>
+              <a:spcBef>
+                <a:spcPts val="400"/>
+              </a:spcBef>
+              <a:buClr>
+                <a:srgbClr val="000000"/>
+              </a:buClr>
+              <a:buSzPct val="75000"/>
+              <a:buFont typeface="Symbol" charset="2"/>
+              <a:buChar char=""/>
+              <a:defRPr lang="en-US" sz="2000" b="0" u="none" strike="noStrike">
+                <a:solidFill>
+                  <a:schemeClr val="dk1"/>
+                </a:solidFill>
+                <a:effectLst/>
+                <a:uFillTx/>
+                <a:latin typeface="Calibri"/>
+              </a:defRPr>
+            </a:lvl4pPr>
+            <a:lvl5pPr lvl="4" algn="l" defTabSz="457200">
+              <a:lnSpc>
+                <a:spcPct val="100000"/>
+              </a:lnSpc>
+              <a:spcBef>
+                <a:spcPts val="400"/>
+              </a:spcBef>
+              <a:buClr>
+                <a:srgbClr val="000000"/>
+              </a:buClr>
+              <a:buSzPct val="45000"/>
+              <a:buFont typeface="Wingdings" charset="2"/>
+              <a:buChar char=""/>
+              <a:defRPr lang="en-US" sz="2000" b="0" u="none" strike="noStrike">
+                <a:solidFill>
+                  <a:schemeClr val="dk1"/>
+                </a:solidFill>
+                <a:effectLst/>
+                <a:uFillTx/>
+                <a:latin typeface="Calibri"/>
+              </a:defRPr>
+            </a:lvl5pPr>
+            <a:lvl6pPr lvl="5" algn="l" defTabSz="457200">
+              <a:lnSpc>
+                <a:spcPct val="100000"/>
+              </a:lnSpc>
+              <a:spcBef>
+                <a:spcPts val="283"/>
+              </a:spcBef>
+              <a:buClr>
+                <a:srgbClr val="000000"/>
+              </a:buClr>
+              <a:buSzPct val="45000"/>
+              <a:buFont typeface="Wingdings" charset="2"/>
+              <a:buChar char=""/>
+              <a:defRPr lang="en-US" sz="2000" b="0" u="none" strike="noStrike">
+                <a:solidFill>
+                  <a:schemeClr val="dk1"/>
+                </a:solidFill>
+                <a:effectLst/>
+                <a:uFillTx/>
+                <a:latin typeface="Calibri"/>
+              </a:defRPr>
+            </a:lvl6pPr>
+            <a:lvl7pPr lvl="6" algn="l" defTabSz="457200">
+              <a:lnSpc>
+                <a:spcPct val="100000"/>
+              </a:lnSpc>
+              <a:spcBef>
+                <a:spcPts val="283"/>
+              </a:spcBef>
+              <a:buClr>
+                <a:srgbClr val="000000"/>
+              </a:buClr>
+              <a:buSzPct val="45000"/>
+              <a:buFont typeface="Wingdings" charset="2"/>
+              <a:buChar char=""/>
+              <a:defRPr lang="en-US" sz="2000" b="0" u="none" strike="noStrike">
+                <a:solidFill>
+                  <a:schemeClr val="dk1"/>
+                </a:solidFill>
+                <a:effectLst/>
+                <a:uFillTx/>
+                <a:latin typeface="Calibri"/>
+              </a:defRPr>
+            </a:lvl7pPr>
+          </a:lstStyle>
+          <a:p>
+            <a:pPr marL="343080" indent="-343080" algn="l" defTabSz="457200">
+              <a:lnSpc>
+                <a:spcPct val="100000"/>
+              </a:lnSpc>
+              <a:spcBef>
+                <a:spcPts val="641"/>
+              </a:spcBef>
+              <a:buClr>
+                <a:srgbClr val="000000"/>
+              </a:buClr>
+              <a:buFont typeface="Arial"/>
+              <a:buChar char="•"/>
+            </a:pPr>
+            <a:r>
+              <a:rPr lang="en-US" sz="3200" b="0" u="none" strike="noStrike">
+                <a:solidFill>
+                  <a:schemeClr val="dk1"/>
+                </a:solidFill>
+                <a:effectLst/>
+                <a:uFillTx/>
+                <a:latin typeface="Calibri"/>
+              </a:rPr>
+              <a:t>Click to edit the outline text format</a:t>
+            </a:r>
+            <a:endParaRPr lang="en-US" sz="3200" b="0" u="none" strike="noStrike">
+              <a:solidFill>
+                <a:schemeClr val="dk1"/>
+              </a:solidFill>
+              <a:effectLst/>
+              <a:uFillTx/>
+              <a:latin typeface="Calibri"/>
+            </a:endParaRPr>
+          </a:p>
+          <a:p>
+            <a:pPr marL="864000" lvl="1" indent="-324000" algn="l" defTabSz="457200">
+              <a:lnSpc>
+                <a:spcPct val="100000"/>
+              </a:lnSpc>
+              <a:spcBef>
+                <a:spcPts val="561"/>
+              </a:spcBef>
+              <a:buClr>
+                <a:srgbClr val="000000"/>
+              </a:buClr>
+              <a:buSzPct val="75000"/>
+              <a:buFont typeface="Symbol" charset="2"/>
+              <a:buChar char=""/>
+            </a:pPr>
+            <a:r>
+              <a:rPr lang="en-US" sz="2800" b="0" u="none" strike="noStrike">
+                <a:solidFill>
+                  <a:schemeClr val="dk1"/>
+                </a:solidFill>
+                <a:effectLst/>
+                <a:uFillTx/>
+                <a:latin typeface="Calibri"/>
+              </a:rPr>
+              <a:t>Second Outline Level</a:t>
+            </a:r>
+            <a:endParaRPr lang="en-US" sz="2800" b="0" u="none" strike="noStrike">
+              <a:solidFill>
+                <a:schemeClr val="dk1"/>
+              </a:solidFill>
+              <a:effectLst/>
+              <a:uFillTx/>
+              <a:latin typeface="Calibri"/>
+            </a:endParaRPr>
+          </a:p>
+          <a:p>
+            <a:pPr marL="1296000" lvl="2" indent="-288000" algn="l" defTabSz="457200">
+              <a:lnSpc>
+                <a:spcPct val="100000"/>
+              </a:lnSpc>
+              <a:spcBef>
+                <a:spcPts val="479"/>
+              </a:spcBef>
+              <a:buClr>
+                <a:srgbClr val="000000"/>
+              </a:buClr>
+              <a:buSzPct val="45000"/>
+              <a:buFont typeface="Wingdings" charset="2"/>
+              <a:buChar char=""/>
+            </a:pPr>
+            <a:r>
+              <a:rPr lang="en-US" sz="2400" b="0" u="none" strike="noStrike">
+                <a:solidFill>
+                  <a:schemeClr val="dk1"/>
+                </a:solidFill>
+                <a:effectLst/>
+                <a:uFillTx/>
+                <a:latin typeface="Calibri"/>
+              </a:rPr>
+              <a:t>Third Outline Level</a:t>
+            </a:r>
+            <a:endParaRPr lang="en-US" sz="2400" b="0" u="none" strike="noStrike">
+              <a:solidFill>
+                <a:schemeClr val="dk1"/>
+              </a:solidFill>
+              <a:effectLst/>
+              <a:uFillTx/>
+              <a:latin typeface="Calibri"/>
+            </a:endParaRPr>
+          </a:p>
+          <a:p>
+            <a:pPr marL="1728000" lvl="3" indent="-216000" algn="l" defTabSz="457200">
+              <a:lnSpc>
+                <a:spcPct val="100000"/>
+              </a:lnSpc>
+              <a:spcBef>
+                <a:spcPts val="400"/>
+              </a:spcBef>
+              <a:buClr>
+                <a:srgbClr val="000000"/>
+              </a:buClr>
+              <a:buSzPct val="75000"/>
+              <a:buFont typeface="Symbol" charset="2"/>
+              <a:buChar char=""/>
+            </a:pPr>
+            <a:r>
+              <a:rPr lang="en-US" sz="2000" b="0" u="none" strike="noStrike">
+                <a:solidFill>
+                  <a:schemeClr val="dk1"/>
+                </a:solidFill>
+                <a:effectLst/>
+                <a:uFillTx/>
+                <a:latin typeface="Calibri"/>
+              </a:rPr>
+              <a:t>Fourth Outline Level</a:t>
+            </a:r>
+            <a:endParaRPr lang="en-US" sz="2000" b="0" u="none" strike="noStrike">
+              <a:solidFill>
+                <a:schemeClr val="dk1"/>
+              </a:solidFill>
+              <a:effectLst/>
+              <a:uFillTx/>
+              <a:latin typeface="Calibri"/>
+            </a:endParaRPr>
+          </a:p>
+          <a:p>
+            <a:pPr marL="2160000" lvl="4" indent="-216000" algn="l" defTabSz="457200">
+              <a:lnSpc>
+                <a:spcPct val="100000"/>
+              </a:lnSpc>
+              <a:spcBef>
+                <a:spcPts val="400"/>
+              </a:spcBef>
+              <a:buClr>
+                <a:srgbClr val="000000"/>
+              </a:buClr>
+              <a:buSzPct val="45000"/>
+              <a:buFont typeface="Wingdings" charset="2"/>
+              <a:buChar char=""/>
+            </a:pPr>
+            <a:r>
+              <a:rPr lang="en-US" sz="2000" b="0" u="none" strike="noStrike">
+                <a:solidFill>
+                  <a:schemeClr val="dk1"/>
+                </a:solidFill>
+                <a:effectLst/>
+                <a:uFillTx/>
+                <a:latin typeface="Calibri"/>
+              </a:rPr>
+              <a:t>Fifth Outline Level</a:t>
+            </a:r>
+            <a:endParaRPr lang="en-US" sz="2000" b="0" u="none" strike="noStrike">
+              <a:solidFill>
+                <a:schemeClr val="dk1"/>
+              </a:solidFill>
+              <a:effectLst/>
+              <a:uFillTx/>
+              <a:latin typeface="Calibri"/>
+            </a:endParaRPr>
+          </a:p>
+          <a:p>
+            <a:pPr marL="2592000" lvl="5" indent="-216000" algn="l" defTabSz="457200">
+              <a:lnSpc>
+                <a:spcPct val="100000"/>
+              </a:lnSpc>
+              <a:spcBef>
+                <a:spcPts val="283"/>
+              </a:spcBef>
+              <a:buClr>
+                <a:srgbClr val="000000"/>
+              </a:buClr>
+              <a:buSzPct val="45000"/>
+              <a:buFont typeface="Wingdings" charset="2"/>
+              <a:buChar char=""/>
+            </a:pPr>
+            <a:r>
+              <a:rPr lang="en-US" sz="2000" b="0" u="none" strike="noStrike">
+                <a:solidFill>
+                  <a:schemeClr val="dk1"/>
+                </a:solidFill>
+                <a:effectLst/>
+                <a:uFillTx/>
+                <a:latin typeface="Calibri"/>
+              </a:rPr>
+              <a:t>Sixth Outline Level</a:t>
+            </a:r>
+            <a:endParaRPr lang="en-US" sz="2000" b="0" u="none" strike="noStrike">
+              <a:solidFill>
+                <a:schemeClr val="dk1"/>
+              </a:solidFill>
+              <a:effectLst/>
+              <a:uFillTx/>
+              <a:latin typeface="Calibri"/>
+            </a:endParaRPr>
+          </a:p>
+          <a:p>
+            <a:pPr marL="3024000" lvl="6" indent="-216000" algn="l" defTabSz="457200">
+              <a:lnSpc>
+                <a:spcPct val="100000"/>
+              </a:lnSpc>
+              <a:spcBef>
+                <a:spcPts val="283"/>
+              </a:spcBef>
+              <a:buClr>
+                <a:srgbClr val="000000"/>
+              </a:buClr>
+              <a:buSzPct val="45000"/>
+              <a:buFont typeface="Wingdings" charset="2"/>
+              <a:buChar char=""/>
+            </a:pPr>
+            <a:r>
+              <a:rPr lang="en-US" sz="2000" b="0" u="none" strike="noStrike">
+                <a:solidFill>
+                  <a:schemeClr val="dk1"/>
+                </a:solidFill>
+                <a:effectLst/>
+                <a:uFillTx/>
+                <a:latin typeface="Calibri"/>
+              </a:rPr>
+              <a:t>Seventh Outline Level</a:t>
+            </a:r>
+            <a:endParaRPr lang="en-US" sz="2000" b="0" u="none" strike="noStrike">
+              <a:solidFill>
+                <a:schemeClr val="dk1"/>
+              </a:solidFill>
+              <a:effectLst/>
+              <a:uFillTx/>
+              <a:latin typeface="Calibri"/>
             </a:endParaRPr>
           </a:p>
         </p:txBody>
@@ -7113,8 +6997,8 @@
 </file>
 
 <file path=ppt/slideLayouts/slideLayout9.xml><?xml version="1.0" encoding="utf-8"?>
-<p:sldLayout xmlns:a="http://schemas.openxmlformats.org/drawingml/2006/main" xmlns:p="http://schemas.openxmlformats.org/presentationml/2006/main" xmlns:r="http://schemas.openxmlformats.org/officeDocument/2006/relationships" xmlns:p14="http://schemas.microsoft.com/office/powerpoint/2010/main" xmlns:p15="http://schemas.microsoft.com/office/powerpoint/2012/main" xmlns:mc="http://schemas.openxmlformats.org/markup-compatibility/2006" type="vertTx" preserve="1">
-  <p:cSld name="Title and Vertical Text">
+<p:sldLayout xmlns:a="http://schemas.openxmlformats.org/drawingml/2006/main" xmlns:p="http://schemas.openxmlformats.org/presentationml/2006/main" xmlns:r="http://schemas.openxmlformats.org/officeDocument/2006/relationships" xmlns:p14="http://schemas.microsoft.com/office/powerpoint/2010/main" xmlns:p15="http://schemas.microsoft.com/office/powerpoint/2012/main" xmlns:mc="http://schemas.openxmlformats.org/markup-compatibility/2006" type="blank" preserve="1">
+  <p:cSld name="Content with Caption">
     <p:bg>
       <p:bgPr>
         <a:solidFill>
@@ -7138,7 +7022,7 @@
       </p:grpSpPr>
       <p:sp>
         <p:nvSpPr>
-          <p:cNvPr id="46" name="PlaceHolder 1"/>
+          <p:cNvPr id="45" name="PlaceHolder 1"/>
           <p:cNvSpPr>
             <a:spLocks noGrp="1"/>
           </p:cNvSpPr>
@@ -7148,8 +7032,8 @@
         </p:nvSpPr>
         <p:spPr>
           <a:xfrm>
-            <a:off x="457200" y="274680"/>
-            <a:ext cx="8227080" cy="1140480"/>
+            <a:off x="457200" y="272880"/>
+            <a:ext cx="3005280" cy="1159200"/>
           </a:xfrm>
           <a:prstGeom prst="rect">
             <a:avLst/>
@@ -7160,11 +7044,11 @@
           </a:ln>
         </p:spPr>
         <p:txBody>
-          <a:bodyPr lIns="91440" tIns="45720" rIns="91440" bIns="45720" anchor="ctr">
+          <a:bodyPr lIns="91440" tIns="45720" rIns="91440" bIns="45720" anchor="b">
             <a:noAutofit/>
           </a:bodyPr>
           <a:lstStyle>
-            <a:lvl1pPr indent="0" algn="ctr" defTabSz="457200">
+            <a:lvl1pPr indent="0" algn="l" defTabSz="457200">
               <a:lnSpc>
                 <a:spcPct val="100000"/>
               </a:lnSpc>
@@ -7172,7 +7056,7 @@
               <a:tabLst>
                 <a:tab pos="0" algn="l"/>
               </a:tabLst>
-              <a:defRPr lang="en-US" sz="4400" b="0" u="none" strike="noStrike">
+              <a:defRPr lang="en-US" sz="2000" b="1" u="none" strike="noStrike">
                 <a:solidFill>
                   <a:schemeClr val="dk1"/>
                 </a:solidFill>
@@ -7183,7 +7067,7 @@
             </a:lvl1pPr>
           </a:lstStyle>
           <a:p>
-            <a:pPr indent="0" algn="ctr" defTabSz="457200">
+            <a:pPr indent="0" algn="l" defTabSz="457200">
               <a:lnSpc>
                 <a:spcPct val="100000"/>
               </a:lnSpc>
@@ -7193,7 +7077,7 @@
               </a:tabLst>
             </a:pPr>
             <a:r>
-              <a:rPr lang="en-US" sz="4400" b="0" u="none" strike="noStrike">
+              <a:rPr lang="en-US" sz="2000" b="1" u="none" strike="noStrike">
                 <a:solidFill>
                   <a:schemeClr val="dk1"/>
                 </a:solidFill>
@@ -7203,7 +7087,7 @@
               </a:rPr>
               <a:t>Click to edit Master title style</a:t>
             </a:r>
-            <a:endParaRPr lang="en-US" sz="4400" b="0" u="none" strike="noStrike">
+            <a:endParaRPr lang="en-US" sz="2000" b="1" u="none" strike="noStrike">
               <a:solidFill>
                 <a:schemeClr val="dk1"/>
               </a:solidFill>
@@ -7216,7 +7100,7 @@
       </p:sp>
       <p:sp>
         <p:nvSpPr>
-          <p:cNvPr id="47" name="PlaceHolder 2"/>
+          <p:cNvPr id="46" name="PlaceHolder 2"/>
           <p:cNvSpPr>
             <a:spLocks noGrp="1"/>
           </p:cNvSpPr>
@@ -7226,8 +7110,8 @@
         </p:nvSpPr>
         <p:spPr>
           <a:xfrm>
-            <a:off x="457200" y="1600200"/>
-            <a:ext cx="8227080" cy="4523400"/>
+            <a:off x="3575160" y="272880"/>
+            <a:ext cx="5108760" cy="5850360"/>
           </a:xfrm>
           <a:prstGeom prst="rect">
             <a:avLst/>
@@ -7238,7 +7122,7 @@
           </a:ln>
         </p:spPr>
         <p:txBody>
-          <a:bodyPr lIns="91440" tIns="45720" rIns="91440" bIns="45720" anchor="t" vert="eaVert">
+          <a:bodyPr lIns="91440" tIns="45720" rIns="91440" bIns="45720" anchor="t">
             <a:noAutofit/>
           </a:bodyPr>
           <a:lstStyle>
@@ -7522,7 +7406,91 @@
       </p:sp>
       <p:sp>
         <p:nvSpPr>
-          <p:cNvPr id="48" name="PlaceHolder 3"/>
+          <p:cNvPr id="47" name="PlaceHolder 3"/>
+          <p:cNvSpPr>
+            <a:spLocks noGrp="1"/>
+          </p:cNvSpPr>
+          <p:nvPr>
+            <p:ph type="body"/>
+          </p:nvPr>
+        </p:nvSpPr>
+        <p:spPr>
+          <a:xfrm>
+            <a:off x="457200" y="1434960"/>
+            <a:ext cx="3005280" cy="4688280"/>
+          </a:xfrm>
+          <a:prstGeom prst="rect">
+            <a:avLst/>
+          </a:prstGeom>
+          <a:noFill/>
+          <a:ln w="0">
+            <a:noFill/>
+          </a:ln>
+        </p:spPr>
+        <p:txBody>
+          <a:bodyPr lIns="91440" tIns="45720" rIns="91440" bIns="45720" anchor="t">
+            <a:noAutofit/>
+          </a:bodyPr>
+          <a:lstStyle>
+            <a:lvl1pPr indent="0" algn="l" defTabSz="457200">
+              <a:lnSpc>
+                <a:spcPct val="100000"/>
+              </a:lnSpc>
+              <a:spcBef>
+                <a:spcPts val="281"/>
+              </a:spcBef>
+              <a:buNone/>
+              <a:tabLst>
+                <a:tab pos="0" algn="l"/>
+              </a:tabLst>
+              <a:defRPr lang="en-US" sz="1400" b="0" u="none" strike="noStrike">
+                <a:solidFill>
+                  <a:schemeClr val="dk1"/>
+                </a:solidFill>
+                <a:effectLst/>
+                <a:uFillTx/>
+                <a:latin typeface="Calibri"/>
+              </a:defRPr>
+            </a:lvl1pPr>
+          </a:lstStyle>
+          <a:p>
+            <a:pPr indent="0" algn="l" defTabSz="457200">
+              <a:lnSpc>
+                <a:spcPct val="100000"/>
+              </a:lnSpc>
+              <a:spcBef>
+                <a:spcPts val="281"/>
+              </a:spcBef>
+              <a:buNone/>
+              <a:tabLst>
+                <a:tab pos="0" algn="l"/>
+              </a:tabLst>
+            </a:pPr>
+            <a:r>
+              <a:rPr lang="en-US" sz="1400" b="0" u="none" strike="noStrike">
+                <a:solidFill>
+                  <a:schemeClr val="dk1"/>
+                </a:solidFill>
+                <a:effectLst/>
+                <a:uFillTx/>
+                <a:latin typeface="Calibri"/>
+              </a:rPr>
+              <a:t>Click to edit Master text styles</a:t>
+            </a:r>
+            <a:endParaRPr lang="en-US" sz="1400" b="0" u="none" strike="noStrike">
+              <a:solidFill>
+                <a:schemeClr val="dk1"/>
+              </a:solidFill>
+              <a:effectLst/>
+              <a:uFillTx/>
+              <a:latin typeface="Calibri"/>
+            </a:endParaRPr>
+          </a:p>
+        </p:txBody>
+      </p:sp>
+      <p:sp>
+        <p:nvSpPr>
+          <p:cNvPr id="48" name="PlaceHolder 4"/>
           <p:cNvSpPr>
             <a:spLocks noGrp="1"/>
           </p:cNvSpPr>
@@ -7533,7 +7501,7 @@
         <p:spPr>
           <a:xfrm>
             <a:off x="457200" y="6356520"/>
-            <a:ext cx="2131200" cy="362520"/>
+            <a:ext cx="2130840" cy="362160"/>
           </a:xfrm>
           <a:prstGeom prst="rect">
             <a:avLst/>
@@ -7604,7 +7572,7 @@
       </p:sp>
       <p:sp>
         <p:nvSpPr>
-          <p:cNvPr id="49" name="PlaceHolder 4"/>
+          <p:cNvPr id="49" name="PlaceHolder 5"/>
           <p:cNvSpPr>
             <a:spLocks noGrp="1"/>
           </p:cNvSpPr>
@@ -7615,7 +7583,7 @@
         <p:spPr>
           <a:xfrm>
             <a:off x="3124080" y="6356520"/>
-            <a:ext cx="2892960" cy="362520"/>
+            <a:ext cx="2892600" cy="362160"/>
           </a:xfrm>
           <a:prstGeom prst="rect">
             <a:avLst/>
@@ -7682,7 +7650,7 @@
       </p:sp>
       <p:sp>
         <p:nvSpPr>
-          <p:cNvPr id="50" name="PlaceHolder 5"/>
+          <p:cNvPr id="50" name="PlaceHolder 6"/>
           <p:cNvSpPr>
             <a:spLocks noGrp="1"/>
           </p:cNvSpPr>
@@ -7693,7 +7661,7 @@
         <p:spPr>
           <a:xfrm>
             <a:off x="6553080" y="6356520"/>
-            <a:ext cx="2131200" cy="362520"/>
+            <a:ext cx="2130840" cy="362160"/>
           </a:xfrm>
           <a:prstGeom prst="rect">
             <a:avLst/>
@@ -7738,7 +7706,7 @@
                 <a:tab pos="0" algn="l"/>
               </a:tabLst>
             </a:pPr>
-            <a:fld id="{40E6F383-8DC2-4275-8700-0FF6887F91D2}" type="slidenum">
+            <a:fld id="{1805B633-355D-4E1C-B4EA-C5F402A933DB}" type="slidenum">
               <a:rPr lang="en-US" sz="1200" b="0" u="none" strike="noStrike">
                 <a:solidFill>
                   <a:schemeClr val="dk1">
@@ -7827,6 +7795,460 @@
           <a:chExt cx="0" cy="0"/>
         </a:xfrm>
       </p:grpSpPr>
+      <p:sp>
+        <p:nvSpPr>
+          <p:cNvPr id="61" name="PlaceHolder 1"/>
+          <p:cNvSpPr>
+            <a:spLocks noGrp="1"/>
+          </p:cNvSpPr>
+          <p:nvPr>
+            <p:ph type="title"/>
+          </p:nvPr>
+        </p:nvSpPr>
+        <p:spPr>
+          <a:xfrm>
+            <a:off x="609480" y="273600"/>
+            <a:ext cx="10972440" cy="1144800"/>
+          </a:xfrm>
+          <a:prstGeom prst="rect">
+            <a:avLst/>
+          </a:prstGeom>
+          <a:noFill/>
+          <a:ln w="0">
+            <a:noFill/>
+          </a:ln>
+        </p:spPr>
+        <p:txBody>
+          <a:bodyPr lIns="0" tIns="0" rIns="0" bIns="0" anchor="ctr">
+            <a:noAutofit/>
+          </a:bodyPr>
+          <a:lstStyle>
+            <a:lvl1pPr indent="0" algn="ctr">
+              <a:buNone/>
+              <a:defRPr lang="en-US" sz="4400" b="0" u="none" strike="noStrike">
+                <a:solidFill>
+                  <a:srgbClr val="000000"/>
+                </a:solidFill>
+                <a:effectLst/>
+                <a:uFillTx/>
+                <a:latin typeface="Arial"/>
+              </a:defRPr>
+            </a:lvl1pPr>
+          </a:lstStyle>
+          <a:p>
+            <a:pPr indent="0" algn="ctr">
+              <a:buNone/>
+            </a:pPr>
+            <a:r>
+              <a:rPr lang="en-US" sz="4400" b="0" u="none" strike="noStrike">
+                <a:solidFill>
+                  <a:srgbClr val="000000"/>
+                </a:solidFill>
+                <a:effectLst/>
+                <a:uFillTx/>
+                <a:latin typeface="Arial"/>
+              </a:rPr>
+              <a:t>Click to edit the title text format</a:t>
+            </a:r>
+            <a:endParaRPr lang="en-US" sz="4400" b="0" u="none" strike="noStrike">
+              <a:solidFill>
+                <a:srgbClr val="000000"/>
+              </a:solidFill>
+              <a:effectLst/>
+              <a:uFillTx/>
+              <a:latin typeface="Arial"/>
+            </a:endParaRPr>
+          </a:p>
+        </p:txBody>
+      </p:sp>
+      <p:sp>
+        <p:nvSpPr>
+          <p:cNvPr id="62" name="PlaceHolder 2"/>
+          <p:cNvSpPr>
+            <a:spLocks noGrp="1"/>
+          </p:cNvSpPr>
+          <p:nvPr>
+            <p:ph type="body"/>
+          </p:nvPr>
+        </p:nvSpPr>
+        <p:spPr>
+          <a:xfrm>
+            <a:off x="609480" y="1604520"/>
+            <a:ext cx="10972440" cy="3977280"/>
+          </a:xfrm>
+          <a:prstGeom prst="rect">
+            <a:avLst/>
+          </a:prstGeom>
+          <a:noFill/>
+          <a:ln w="0">
+            <a:noFill/>
+          </a:ln>
+        </p:spPr>
+        <p:txBody>
+          <a:bodyPr lIns="0" tIns="0" rIns="0" bIns="0" anchor="t">
+            <a:normAutofit/>
+          </a:bodyPr>
+          <a:lstStyle>
+            <a:lvl1pPr algn="l">
+              <a:spcBef>
+                <a:spcPts val="1417"/>
+              </a:spcBef>
+              <a:buClr>
+                <a:srgbClr val="000000"/>
+              </a:buClr>
+              <a:buSzPct val="45000"/>
+              <a:buFont typeface="Wingdings" charset="2"/>
+              <a:buChar char=""/>
+              <a:defRPr lang="en-US" sz="3200" b="0" u="none" strike="noStrike">
+                <a:solidFill>
+                  <a:srgbClr val="000000"/>
+                </a:solidFill>
+                <a:effectLst/>
+                <a:uFillTx/>
+                <a:latin typeface="Arial"/>
+              </a:defRPr>
+            </a:lvl1pPr>
+            <a:lvl2pPr lvl="1" algn="l">
+              <a:spcBef>
+                <a:spcPts val="1134"/>
+              </a:spcBef>
+              <a:buClr>
+                <a:srgbClr val="000000"/>
+              </a:buClr>
+              <a:buSzPct val="75000"/>
+              <a:buFont typeface="Symbol" charset="2"/>
+              <a:buChar char=""/>
+              <a:defRPr lang="en-US" sz="2800" b="0" u="none" strike="noStrike">
+                <a:solidFill>
+                  <a:srgbClr val="000000"/>
+                </a:solidFill>
+                <a:effectLst/>
+                <a:uFillTx/>
+                <a:latin typeface="Arial"/>
+              </a:defRPr>
+            </a:lvl2pPr>
+            <a:lvl3pPr lvl="2" algn="l">
+              <a:spcBef>
+                <a:spcPts val="850"/>
+              </a:spcBef>
+              <a:buClr>
+                <a:srgbClr val="000000"/>
+              </a:buClr>
+              <a:buSzPct val="45000"/>
+              <a:buFont typeface="Wingdings" charset="2"/>
+              <a:buChar char=""/>
+              <a:defRPr lang="en-US" sz="2400" b="0" u="none" strike="noStrike">
+                <a:solidFill>
+                  <a:srgbClr val="000000"/>
+                </a:solidFill>
+                <a:effectLst/>
+                <a:uFillTx/>
+                <a:latin typeface="Arial"/>
+              </a:defRPr>
+            </a:lvl3pPr>
+            <a:lvl4pPr lvl="3" algn="l">
+              <a:spcBef>
+                <a:spcPts val="567"/>
+              </a:spcBef>
+              <a:buClr>
+                <a:srgbClr val="000000"/>
+              </a:buClr>
+              <a:buSzPct val="75000"/>
+              <a:buFont typeface="Symbol" charset="2"/>
+              <a:buChar char=""/>
+              <a:defRPr lang="en-US" sz="2000" b="0" u="none" strike="noStrike">
+                <a:solidFill>
+                  <a:srgbClr val="000000"/>
+                </a:solidFill>
+                <a:effectLst/>
+                <a:uFillTx/>
+                <a:latin typeface="Arial"/>
+              </a:defRPr>
+            </a:lvl4pPr>
+            <a:lvl5pPr lvl="4" algn="l">
+              <a:spcBef>
+                <a:spcPts val="283"/>
+              </a:spcBef>
+              <a:buClr>
+                <a:srgbClr val="000000"/>
+              </a:buClr>
+              <a:buSzPct val="45000"/>
+              <a:buFont typeface="Wingdings" charset="2"/>
+              <a:buChar char=""/>
+              <a:defRPr lang="en-US" sz="2000" b="0" u="none" strike="noStrike">
+                <a:solidFill>
+                  <a:srgbClr val="000000"/>
+                </a:solidFill>
+                <a:effectLst/>
+                <a:uFillTx/>
+                <a:latin typeface="Arial"/>
+              </a:defRPr>
+            </a:lvl5pPr>
+            <a:lvl6pPr lvl="5" algn="l">
+              <a:spcBef>
+                <a:spcPts val="283"/>
+              </a:spcBef>
+              <a:buClr>
+                <a:srgbClr val="000000"/>
+              </a:buClr>
+              <a:buSzPct val="45000"/>
+              <a:buFont typeface="Wingdings" charset="2"/>
+              <a:buChar char=""/>
+              <a:defRPr lang="en-US" sz="2000" b="0" u="none" strike="noStrike">
+                <a:solidFill>
+                  <a:srgbClr val="000000"/>
+                </a:solidFill>
+                <a:effectLst/>
+                <a:uFillTx/>
+                <a:latin typeface="Arial"/>
+              </a:defRPr>
+            </a:lvl6pPr>
+            <a:lvl7pPr lvl="6" algn="l">
+              <a:spcBef>
+                <a:spcPts val="283"/>
+              </a:spcBef>
+              <a:buClr>
+                <a:srgbClr val="000000"/>
+              </a:buClr>
+              <a:buSzPct val="45000"/>
+              <a:buFont typeface="Wingdings" charset="2"/>
+              <a:buChar char=""/>
+              <a:defRPr lang="en-US" sz="2000" b="0" u="none" strike="noStrike">
+                <a:solidFill>
+                  <a:srgbClr val="000000"/>
+                </a:solidFill>
+                <a:effectLst/>
+                <a:uFillTx/>
+                <a:latin typeface="Arial"/>
+              </a:defRPr>
+            </a:lvl7pPr>
+          </a:lstStyle>
+          <a:p>
+            <a:pPr marL="432000" indent="-324000" algn="l">
+              <a:spcBef>
+                <a:spcPts val="1417"/>
+              </a:spcBef>
+              <a:buClr>
+                <a:srgbClr val="000000"/>
+              </a:buClr>
+              <a:buSzPct val="45000"/>
+              <a:buFont typeface="Wingdings" charset="2"/>
+              <a:buChar char=""/>
+            </a:pPr>
+            <a:r>
+              <a:rPr lang="en-US" sz="3200" b="0" u="none" strike="noStrike">
+                <a:solidFill>
+                  <a:srgbClr val="000000"/>
+                </a:solidFill>
+                <a:effectLst/>
+                <a:uFillTx/>
+                <a:latin typeface="Arial"/>
+              </a:rPr>
+              <a:t>Click to edit the outline text format</a:t>
+            </a:r>
+            <a:endParaRPr lang="en-US" sz="3200" b="0" u="none" strike="noStrike">
+              <a:solidFill>
+                <a:srgbClr val="000000"/>
+              </a:solidFill>
+              <a:effectLst/>
+              <a:uFillTx/>
+              <a:latin typeface="Arial"/>
+            </a:endParaRPr>
+          </a:p>
+          <a:p>
+            <a:pPr marL="864000" lvl="1" indent="-324000" algn="l">
+              <a:spcBef>
+                <a:spcPts val="1134"/>
+              </a:spcBef>
+              <a:buClr>
+                <a:srgbClr val="000000"/>
+              </a:buClr>
+              <a:buSzPct val="75000"/>
+              <a:buFont typeface="Symbol" charset="2"/>
+              <a:buChar char=""/>
+            </a:pPr>
+            <a:r>
+              <a:rPr lang="en-US" sz="2800" b="0" u="none" strike="noStrike">
+                <a:solidFill>
+                  <a:srgbClr val="000000"/>
+                </a:solidFill>
+                <a:effectLst/>
+                <a:uFillTx/>
+                <a:latin typeface="Arial"/>
+              </a:rPr>
+              <a:t>Second Outline Level</a:t>
+            </a:r>
+            <a:endParaRPr lang="en-US" sz="2800" b="0" u="none" strike="noStrike">
+              <a:solidFill>
+                <a:srgbClr val="000000"/>
+              </a:solidFill>
+              <a:effectLst/>
+              <a:uFillTx/>
+              <a:latin typeface="Arial"/>
+            </a:endParaRPr>
+          </a:p>
+          <a:p>
+            <a:pPr marL="1296000" lvl="2" indent="-288000" algn="l">
+              <a:spcBef>
+                <a:spcPts val="850"/>
+              </a:spcBef>
+              <a:buClr>
+                <a:srgbClr val="000000"/>
+              </a:buClr>
+              <a:buSzPct val="45000"/>
+              <a:buFont typeface="Wingdings" charset="2"/>
+              <a:buChar char=""/>
+            </a:pPr>
+            <a:r>
+              <a:rPr lang="en-US" sz="2400" b="0" u="none" strike="noStrike">
+                <a:solidFill>
+                  <a:srgbClr val="000000"/>
+                </a:solidFill>
+                <a:effectLst/>
+                <a:uFillTx/>
+                <a:latin typeface="Arial"/>
+              </a:rPr>
+              <a:t>Third Outline Level</a:t>
+            </a:r>
+            <a:endParaRPr lang="en-US" sz="2400" b="0" u="none" strike="noStrike">
+              <a:solidFill>
+                <a:srgbClr val="000000"/>
+              </a:solidFill>
+              <a:effectLst/>
+              <a:uFillTx/>
+              <a:latin typeface="Arial"/>
+            </a:endParaRPr>
+          </a:p>
+          <a:p>
+            <a:pPr marL="1728000" lvl="3" indent="-216000" algn="l">
+              <a:spcBef>
+                <a:spcPts val="567"/>
+              </a:spcBef>
+              <a:buClr>
+                <a:srgbClr val="000000"/>
+              </a:buClr>
+              <a:buSzPct val="75000"/>
+              <a:buFont typeface="Symbol" charset="2"/>
+              <a:buChar char=""/>
+            </a:pPr>
+            <a:r>
+              <a:rPr lang="en-US" sz="2000" b="0" u="none" strike="noStrike">
+                <a:solidFill>
+                  <a:srgbClr val="000000"/>
+                </a:solidFill>
+                <a:effectLst/>
+                <a:uFillTx/>
+                <a:latin typeface="Arial"/>
+              </a:rPr>
+              <a:t>Fourth Outline Level</a:t>
+            </a:r>
+            <a:endParaRPr lang="en-US" sz="2000" b="0" u="none" strike="noStrike">
+              <a:solidFill>
+                <a:srgbClr val="000000"/>
+              </a:solidFill>
+              <a:effectLst/>
+              <a:uFillTx/>
+              <a:latin typeface="Arial"/>
+            </a:endParaRPr>
+          </a:p>
+          <a:p>
+            <a:pPr marL="2160000" lvl="4" indent="-216000" algn="l">
+              <a:spcBef>
+                <a:spcPts val="283"/>
+              </a:spcBef>
+              <a:buClr>
+                <a:srgbClr val="000000"/>
+              </a:buClr>
+              <a:buSzPct val="45000"/>
+              <a:buFont typeface="Wingdings" charset="2"/>
+              <a:buChar char=""/>
+            </a:pPr>
+            <a:r>
+              <a:rPr lang="en-US" sz="2000" b="0" u="none" strike="noStrike">
+                <a:solidFill>
+                  <a:srgbClr val="000000"/>
+                </a:solidFill>
+                <a:effectLst/>
+                <a:uFillTx/>
+                <a:latin typeface="Arial"/>
+              </a:rPr>
+              <a:t>Fifth Outline Level</a:t>
+            </a:r>
+            <a:endParaRPr lang="en-US" sz="2000" b="0" u="none" strike="noStrike">
+              <a:solidFill>
+                <a:srgbClr val="000000"/>
+              </a:solidFill>
+              <a:effectLst/>
+              <a:uFillTx/>
+              <a:latin typeface="Arial"/>
+            </a:endParaRPr>
+          </a:p>
+          <a:p>
+            <a:pPr marL="2592000" lvl="5" indent="-216000" algn="l">
+              <a:spcBef>
+                <a:spcPts val="283"/>
+              </a:spcBef>
+              <a:buClr>
+                <a:srgbClr val="000000"/>
+              </a:buClr>
+              <a:buSzPct val="45000"/>
+              <a:buFont typeface="Wingdings" charset="2"/>
+              <a:buChar char=""/>
+            </a:pPr>
+            <a:r>
+              <a:rPr lang="en-US" sz="2000" b="0" u="none" strike="noStrike">
+                <a:solidFill>
+                  <a:srgbClr val="000000"/>
+                </a:solidFill>
+                <a:effectLst/>
+                <a:uFillTx/>
+                <a:latin typeface="Arial"/>
+              </a:rPr>
+              <a:t>Sixth Outline Level</a:t>
+            </a:r>
+            <a:endParaRPr lang="en-US" sz="2000" b="0" u="none" strike="noStrike">
+              <a:solidFill>
+                <a:srgbClr val="000000"/>
+              </a:solidFill>
+              <a:effectLst/>
+              <a:uFillTx/>
+              <a:latin typeface="Arial"/>
+            </a:endParaRPr>
+          </a:p>
+          <a:p>
+            <a:pPr marL="3024000" lvl="6" indent="-216000" algn="l">
+              <a:spcBef>
+                <a:spcPts val="283"/>
+              </a:spcBef>
+              <a:buClr>
+                <a:srgbClr val="000000"/>
+              </a:buClr>
+              <a:buSzPct val="45000"/>
+              <a:buFont typeface="Wingdings" charset="2"/>
+              <a:buChar char=""/>
+            </a:pPr>
+            <a:r>
+              <a:rPr lang="en-US" sz="2000" b="0" u="none" strike="noStrike">
+                <a:solidFill>
+                  <a:srgbClr val="000000"/>
+                </a:solidFill>
+                <a:effectLst/>
+                <a:uFillTx/>
+                <a:latin typeface="Arial"/>
+              </a:rPr>
+              <a:t>Seventh Outline Level</a:t>
+            </a:r>
+            <a:endParaRPr lang="en-US" sz="2000" b="0" u="none" strike="noStrike">
+              <a:solidFill>
+                <a:srgbClr val="000000"/>
+              </a:solidFill>
+              <a:effectLst/>
+              <a:uFillTx/>
+              <a:latin typeface="Arial"/>
+            </a:endParaRPr>
+          </a:p>
+        </p:txBody>
+      </p:sp>
     </p:spTree>
   </p:cSld>
   <p:clrMap bg1="lt1" tx1="dk1" bg2="lt2" tx2="dk2" accent1="accent1" accent2="accent2" accent3="accent3" accent4="accent4" accent5="accent5" accent6="accent6" hlink="hlink" folHlink="folHlink"/>
@@ -7855,14 +8277,14 @@
       </p:grpSpPr>
       <p:sp>
         <p:nvSpPr>
-          <p:cNvPr id="61" name="TextBox 1"/>
+          <p:cNvPr id="63" name="TextBox 1"/>
           <p:cNvSpPr/>
           <p:nvPr/>
         </p:nvSpPr>
         <p:spPr>
           <a:xfrm>
             <a:off x="685800" y="307080"/>
-            <a:ext cx="11169000" cy="1186920"/>
+            <a:ext cx="11168640" cy="1186920"/>
           </a:xfrm>
           <a:prstGeom prst="rect">
             <a:avLst/>
@@ -7938,7 +8360,7 @@
       </p:sp>
       <p:pic>
         <p:nvPicPr>
-          <p:cNvPr id="62" name=""/>
+          <p:cNvPr id="64" name=""/>
           <p:cNvPicPr/>
           <p:nvPr/>
         </p:nvPicPr>
@@ -7950,7 +8372,7 @@
         <p:spPr>
           <a:xfrm>
             <a:off x="5029200" y="1494000"/>
-            <a:ext cx="7085160" cy="3188520"/>
+            <a:ext cx="7084800" cy="3188160"/>
           </a:xfrm>
           <a:prstGeom prst="rect">
             <a:avLst/>
@@ -7963,14 +8385,14 @@
       </p:pic>
       <p:sp>
         <p:nvSpPr>
-          <p:cNvPr id="63" name=""/>
+          <p:cNvPr id="65" name=""/>
           <p:cNvSpPr/>
           <p:nvPr/>
         </p:nvSpPr>
         <p:spPr>
           <a:xfrm>
             <a:off x="592920" y="1857240"/>
-            <a:ext cx="2377080" cy="1461240"/>
+            <a:ext cx="3064680" cy="1187640"/>
           </a:xfrm>
           <a:prstGeom prst="rect">
             <a:avLst/>
@@ -8115,14 +8537,14 @@
       </p:sp>
       <p:sp>
         <p:nvSpPr>
-          <p:cNvPr id="64" name=""/>
+          <p:cNvPr id="66" name=""/>
           <p:cNvSpPr/>
           <p:nvPr/>
         </p:nvSpPr>
         <p:spPr>
           <a:xfrm>
             <a:off x="457200" y="4343400"/>
-            <a:ext cx="8457120" cy="1101960"/>
+            <a:ext cx="8456760" cy="1589760"/>
           </a:xfrm>
           <a:prstGeom prst="rect">
             <a:avLst/>
@@ -8160,7 +8582,7 @@
                 <a:uFillTx/>
                 <a:latin typeface="Arial"/>
               </a:rPr>
-              <a:t>Course material for download at:</a:t>
+              <a:t>Course material for this afternoon for download at:</a:t>
             </a:r>
             <a:endParaRPr lang="en-US" sz="3200" b="0" u="none" strike="noStrike">
               <a:solidFill>
@@ -8231,14 +8653,14 @@
       </p:grpSpPr>
       <p:sp>
         <p:nvSpPr>
-          <p:cNvPr id="81" name="TextBox 1"/>
+          <p:cNvPr id="83" name="TextBox 1"/>
           <p:cNvSpPr/>
           <p:nvPr/>
         </p:nvSpPr>
         <p:spPr>
           <a:xfrm>
             <a:off x="685800" y="670320"/>
-            <a:ext cx="9555480" cy="3626640"/>
+            <a:ext cx="9555120" cy="3626640"/>
           </a:xfrm>
           <a:prstGeom prst="rect">
             <a:avLst/>
@@ -8497,14 +8919,14 @@
       </p:grpSpPr>
       <p:sp>
         <p:nvSpPr>
-          <p:cNvPr id="82" name="TextBox 1"/>
+          <p:cNvPr id="84" name="TextBox 1"/>
           <p:cNvSpPr/>
           <p:nvPr/>
         </p:nvSpPr>
         <p:spPr>
           <a:xfrm>
             <a:off x="914400" y="690840"/>
-            <a:ext cx="9555480" cy="5212080"/>
+            <a:ext cx="9555120" cy="5212080"/>
           </a:xfrm>
           <a:prstGeom prst="rect">
             <a:avLst/>
@@ -8626,7 +9048,7 @@
             <a:r>
               <a:rPr lang="en-US" sz="2000" b="0" u="none" strike="noStrike">
                 <a:solidFill>
-                  <a:srgbClr val="000000"/>
+                  <a:srgbClr val="0000FF"/>
                 </a:solidFill>
                 <a:effectLst/>
                 <a:uFillTx/>
@@ -8901,7 +9323,7 @@
       </p:grpSpPr>
       <p:pic>
         <p:nvPicPr>
-          <p:cNvPr id="83" name=""/>
+          <p:cNvPr id="85" name=""/>
           <p:cNvPicPr/>
           <p:nvPr/>
         </p:nvPicPr>
@@ -8912,7 +9334,7 @@
         <p:spPr>
           <a:xfrm>
             <a:off x="1966320" y="320400"/>
-            <a:ext cx="8777880" cy="5851800"/>
+            <a:ext cx="8777520" cy="5851440"/>
           </a:xfrm>
           <a:prstGeom prst="rect">
             <a:avLst/>
@@ -8925,14 +9347,14 @@
       </p:pic>
       <p:sp>
         <p:nvSpPr>
-          <p:cNvPr id="84" name=""/>
-          <p:cNvSpPr txBox="1"/>
+          <p:cNvPr id="86" name=""/>
+          <p:cNvSpPr/>
           <p:nvPr/>
         </p:nvSpPr>
         <p:spPr>
           <a:xfrm>
             <a:off x="1600560" y="6232320"/>
-            <a:ext cx="9829800" cy="575280"/>
+            <a:ext cx="9829440" cy="574920"/>
           </a:xfrm>
           <a:prstGeom prst="rect">
             <a:avLst/>
@@ -8942,11 +9364,22 @@
             <a:noFill/>
           </a:ln>
         </p:spPr>
+        <p:style>
+          <a:lnRef idx="0"/>
+          <a:fillRef idx="0"/>
+          <a:effectRef idx="0"/>
+          <a:fontRef idx="minor"/>
+        </p:style>
         <p:txBody>
           <a:bodyPr lIns="90000" tIns="45000" rIns="90000" bIns="45000" anchor="t">
             <a:spAutoFit/>
           </a:bodyPr>
           <a:p>
+            <a:pPr>
+              <a:lnSpc>
+                <a:spcPct val="100000"/>
+              </a:lnSpc>
+            </a:pPr>
             <a:r>
               <a:rPr lang="en-US" sz="2600" b="0" u="none" strike="noStrike">
                 <a:solidFill>
@@ -9001,7 +9434,7 @@
       </p:grpSpPr>
       <p:pic>
         <p:nvPicPr>
-          <p:cNvPr id="85" name=""/>
+          <p:cNvPr id="87" name=""/>
           <p:cNvPicPr/>
           <p:nvPr/>
         </p:nvPicPr>
@@ -9012,7 +9445,7 @@
         <p:spPr>
           <a:xfrm>
             <a:off x="763560" y="721800"/>
-            <a:ext cx="7694640" cy="4397040"/>
+            <a:ext cx="7694280" cy="4396680"/>
           </a:xfrm>
           <a:prstGeom prst="rect">
             <a:avLst/>
@@ -9025,14 +9458,14 @@
       </p:pic>
       <p:sp>
         <p:nvSpPr>
-          <p:cNvPr id="86" name=""/>
-          <p:cNvSpPr txBox="1"/>
+          <p:cNvPr id="88" name=""/>
+          <p:cNvSpPr/>
           <p:nvPr/>
         </p:nvSpPr>
         <p:spPr>
           <a:xfrm>
             <a:off x="1600200" y="5368320"/>
-            <a:ext cx="9829800" cy="1032480"/>
+            <a:ext cx="9829440" cy="1032120"/>
           </a:xfrm>
           <a:prstGeom prst="rect">
             <a:avLst/>
@@ -9042,11 +9475,22 @@
             <a:noFill/>
           </a:ln>
         </p:spPr>
+        <p:style>
+          <a:lnRef idx="0"/>
+          <a:fillRef idx="0"/>
+          <a:effectRef idx="0"/>
+          <a:fontRef idx="minor"/>
+        </p:style>
         <p:txBody>
           <a:bodyPr lIns="90000" tIns="45000" rIns="90000" bIns="45000" anchor="t">
             <a:spAutoFit/>
           </a:bodyPr>
           <a:p>
+            <a:pPr>
+              <a:lnSpc>
+                <a:spcPct val="100000"/>
+              </a:lnSpc>
+            </a:pPr>
             <a:r>
               <a:rPr lang="en-US" sz="2600" b="0" u="none" strike="noStrike">
                 <a:solidFill>
@@ -9101,14 +9545,14 @@
       </p:grpSpPr>
       <p:sp>
         <p:nvSpPr>
-          <p:cNvPr id="87" name="TextBox 1"/>
+          <p:cNvPr id="89" name="TextBox 1"/>
           <p:cNvSpPr/>
           <p:nvPr/>
         </p:nvSpPr>
         <p:spPr>
           <a:xfrm>
             <a:off x="914400" y="457200"/>
-            <a:ext cx="9555480" cy="942120"/>
+            <a:ext cx="9555120" cy="941760"/>
           </a:xfrm>
           <a:prstGeom prst="rect">
             <a:avLst/>
@@ -9158,14 +9602,14 @@
       </p:sp>
       <p:sp>
         <p:nvSpPr>
-          <p:cNvPr id="88" name="TextBox 2"/>
+          <p:cNvPr id="90" name="TextBox 2"/>
           <p:cNvSpPr/>
           <p:nvPr/>
         </p:nvSpPr>
         <p:spPr>
           <a:xfrm>
             <a:off x="961560" y="1292760"/>
-            <a:ext cx="2747520" cy="4658040"/>
+            <a:ext cx="2747160" cy="4657680"/>
           </a:xfrm>
           <a:prstGeom prst="rect">
             <a:avLst/>
@@ -9449,14 +9893,14 @@
       </p:sp>
       <p:sp>
         <p:nvSpPr>
-          <p:cNvPr id="89" name="TextBox 3"/>
+          <p:cNvPr id="91" name="TextBox 3"/>
           <p:cNvSpPr/>
           <p:nvPr/>
         </p:nvSpPr>
         <p:spPr>
           <a:xfrm>
             <a:off x="3711600" y="1292760"/>
-            <a:ext cx="3897360" cy="4658040"/>
+            <a:ext cx="3897000" cy="4657680"/>
           </a:xfrm>
           <a:prstGeom prst="rect">
             <a:avLst/>
@@ -9740,14 +10184,14 @@
       </p:sp>
       <p:sp>
         <p:nvSpPr>
-          <p:cNvPr id="90" name="TextBox 4"/>
+          <p:cNvPr id="92" name="TextBox 4"/>
           <p:cNvSpPr/>
           <p:nvPr/>
         </p:nvSpPr>
         <p:spPr>
           <a:xfrm>
             <a:off x="7611480" y="1292760"/>
-            <a:ext cx="3897360" cy="4658040"/>
+            <a:ext cx="3897000" cy="4657680"/>
           </a:xfrm>
           <a:prstGeom prst="rect">
             <a:avLst/>
@@ -10061,14 +10505,14 @@
       </p:grpSpPr>
       <p:sp>
         <p:nvSpPr>
-          <p:cNvPr id="91" name="TextBox 1"/>
+          <p:cNvPr id="93" name="TextBox 1"/>
           <p:cNvSpPr/>
           <p:nvPr/>
         </p:nvSpPr>
         <p:spPr>
           <a:xfrm>
             <a:off x="1143000" y="2546280"/>
-            <a:ext cx="10025280" cy="1004040"/>
+            <a:ext cx="10024920" cy="1004040"/>
           </a:xfrm>
           <a:prstGeom prst="rect">
             <a:avLst/>
@@ -10176,14 +10620,14 @@
       </p:grpSpPr>
       <p:sp>
         <p:nvSpPr>
-          <p:cNvPr id="92" name="TextBox 1"/>
+          <p:cNvPr id="94" name="TextBox 1"/>
           <p:cNvSpPr/>
           <p:nvPr/>
         </p:nvSpPr>
         <p:spPr>
           <a:xfrm>
             <a:off x="961560" y="914400"/>
-            <a:ext cx="9555480" cy="4508280"/>
+            <a:ext cx="9555120" cy="4507560"/>
           </a:xfrm>
           <a:prstGeom prst="rect">
             <a:avLst/>
@@ -10468,14 +10912,14 @@
       </p:grpSpPr>
       <p:sp>
         <p:nvSpPr>
-          <p:cNvPr id="93" name="TextBox 1"/>
+          <p:cNvPr id="95" name="TextBox 1"/>
           <p:cNvSpPr/>
           <p:nvPr/>
         </p:nvSpPr>
         <p:spPr>
           <a:xfrm>
             <a:off x="961560" y="1272600"/>
-            <a:ext cx="9555480" cy="4109760"/>
+            <a:ext cx="9555120" cy="4109400"/>
           </a:xfrm>
           <a:prstGeom prst="rect">
             <a:avLst/>
@@ -10719,14 +11163,14 @@
       </p:grpSpPr>
       <p:sp>
         <p:nvSpPr>
-          <p:cNvPr id="94" name="TextBox 1"/>
+          <p:cNvPr id="96" name="TextBox 1"/>
           <p:cNvSpPr/>
           <p:nvPr/>
         </p:nvSpPr>
         <p:spPr>
           <a:xfrm>
             <a:off x="961560" y="1173240"/>
-            <a:ext cx="9555480" cy="4109760"/>
+            <a:ext cx="9555120" cy="4109400"/>
           </a:xfrm>
           <a:prstGeom prst="rect">
             <a:avLst/>
@@ -10970,14 +11414,14 @@
       </p:grpSpPr>
       <p:sp>
         <p:nvSpPr>
-          <p:cNvPr id="95" name="TextBox 1"/>
+          <p:cNvPr id="97" name="TextBox 1"/>
           <p:cNvSpPr/>
           <p:nvPr/>
         </p:nvSpPr>
         <p:spPr>
           <a:xfrm>
             <a:off x="961560" y="1272600"/>
-            <a:ext cx="9555480" cy="4109760"/>
+            <a:ext cx="9555120" cy="4109400"/>
           </a:xfrm>
           <a:prstGeom prst="rect">
             <a:avLst/>
@@ -11221,14 +11665,14 @@
       </p:grpSpPr>
       <p:sp>
         <p:nvSpPr>
-          <p:cNvPr id="65" name="TextBox 1"/>
+          <p:cNvPr id="67" name="TextBox 1"/>
           <p:cNvSpPr/>
           <p:nvPr/>
         </p:nvSpPr>
         <p:spPr>
           <a:xfrm>
             <a:off x="961560" y="1272600"/>
-            <a:ext cx="9555480" cy="2100600"/>
+            <a:ext cx="9555120" cy="2100600"/>
           </a:xfrm>
           <a:prstGeom prst="rect">
             <a:avLst/>
@@ -11406,14 +11850,14 @@
       </p:grpSpPr>
       <p:sp>
         <p:nvSpPr>
-          <p:cNvPr id="96" name="TextBox 1"/>
+          <p:cNvPr id="98" name="TextBox 1"/>
           <p:cNvSpPr/>
           <p:nvPr/>
         </p:nvSpPr>
         <p:spPr>
           <a:xfrm>
             <a:off x="961560" y="1272600"/>
-            <a:ext cx="9555480" cy="4109760"/>
+            <a:ext cx="9555120" cy="4109400"/>
           </a:xfrm>
           <a:prstGeom prst="rect">
             <a:avLst/>
@@ -11657,14 +12101,14 @@
       </p:grpSpPr>
       <p:sp>
         <p:nvSpPr>
-          <p:cNvPr id="97" name="TextBox 1"/>
+          <p:cNvPr id="99" name="TextBox 1"/>
           <p:cNvSpPr/>
           <p:nvPr/>
         </p:nvSpPr>
         <p:spPr>
           <a:xfrm>
             <a:off x="961560" y="1272600"/>
-            <a:ext cx="9555480" cy="4359240"/>
+            <a:ext cx="9555120" cy="4358520"/>
           </a:xfrm>
           <a:prstGeom prst="rect">
             <a:avLst/>
@@ -11923,14 +12367,14 @@
       </p:grpSpPr>
       <p:sp>
         <p:nvSpPr>
-          <p:cNvPr id="98" name="TextBox 1"/>
+          <p:cNvPr id="100" name="TextBox 1"/>
           <p:cNvSpPr/>
           <p:nvPr/>
         </p:nvSpPr>
         <p:spPr>
           <a:xfrm>
             <a:off x="961560" y="1272600"/>
-            <a:ext cx="9555480" cy="4109760"/>
+            <a:ext cx="9555120" cy="4109400"/>
           </a:xfrm>
           <a:prstGeom prst="rect">
             <a:avLst/>
@@ -12133,14 +12577,14 @@
       </p:grpSpPr>
       <p:sp>
         <p:nvSpPr>
-          <p:cNvPr id="99" name="TextBox 1"/>
+          <p:cNvPr id="101" name="TextBox 1"/>
           <p:cNvSpPr/>
           <p:nvPr/>
         </p:nvSpPr>
         <p:spPr>
           <a:xfrm>
             <a:off x="961560" y="1272600"/>
-            <a:ext cx="9555480" cy="4109760"/>
+            <a:ext cx="9555120" cy="4109400"/>
           </a:xfrm>
           <a:prstGeom prst="rect">
             <a:avLst/>
@@ -12384,14 +12828,14 @@
       </p:grpSpPr>
       <p:sp>
         <p:nvSpPr>
-          <p:cNvPr id="100" name="TextBox 1"/>
+          <p:cNvPr id="102" name="TextBox 1"/>
           <p:cNvSpPr/>
           <p:nvPr/>
         </p:nvSpPr>
         <p:spPr>
           <a:xfrm>
             <a:off x="961560" y="1272600"/>
-            <a:ext cx="9555480" cy="4109760"/>
+            <a:ext cx="9555120" cy="4109400"/>
           </a:xfrm>
           <a:prstGeom prst="rect">
             <a:avLst/>
@@ -12635,14 +13079,14 @@
       </p:grpSpPr>
       <p:sp>
         <p:nvSpPr>
-          <p:cNvPr id="101" name="TextBox 1"/>
+          <p:cNvPr id="103" name="TextBox 1"/>
           <p:cNvSpPr/>
           <p:nvPr/>
         </p:nvSpPr>
         <p:spPr>
           <a:xfrm>
             <a:off x="961560" y="1272600"/>
-            <a:ext cx="9555480" cy="4109760"/>
+            <a:ext cx="9555120" cy="4109400"/>
           </a:xfrm>
           <a:prstGeom prst="rect">
             <a:avLst/>
@@ -12886,14 +13330,14 @@
       </p:grpSpPr>
       <p:sp>
         <p:nvSpPr>
-          <p:cNvPr id="102" name="TextBox 1"/>
+          <p:cNvPr id="104" name="TextBox 1"/>
           <p:cNvSpPr/>
           <p:nvPr/>
         </p:nvSpPr>
         <p:spPr>
           <a:xfrm>
             <a:off x="961560" y="1272600"/>
-            <a:ext cx="9555480" cy="4109760"/>
+            <a:ext cx="9555120" cy="4054320"/>
           </a:xfrm>
           <a:prstGeom prst="rect">
             <a:avLst/>
@@ -12928,7 +13372,7 @@
                 <a:uFillTx/>
                 <a:latin typeface="Arial"/>
               </a:rPr>
-              <a:t>Can I combine different measurements from the same sample?</a:t>
+              <a:t>Combine different measurements from the same sample</a:t>
             </a:r>
             <a:endParaRPr lang="en-US" sz="2000" b="0" u="none" strike="noStrike">
               <a:solidFill>
@@ -13137,14 +13581,14 @@
       </p:grpSpPr>
       <p:sp>
         <p:nvSpPr>
-          <p:cNvPr id="103" name="TextBox 1"/>
-          <p:cNvSpPr/>
+          <p:cNvPr id="105" name=""/>
+          <p:cNvSpPr txBox="1"/>
           <p:nvPr/>
         </p:nvSpPr>
         <p:spPr>
           <a:xfrm>
-            <a:off x="961560" y="1272600"/>
-            <a:ext cx="9555480" cy="4144680"/>
+            <a:off x="1143000" y="914400"/>
+            <a:ext cx="9372600" cy="5029200"/>
           </a:xfrm>
           <a:prstGeom prst="rect">
             <a:avLst/>
@@ -13154,280 +13598,177 @@
             <a:noFill/>
           </a:ln>
         </p:spPr>
-        <p:style>
-          <a:lnRef idx="0"/>
-          <a:fillRef idx="0"/>
-          <a:effectRef idx="0"/>
-          <a:fontRef idx="minor"/>
-        </p:style>
         <p:txBody>
           <a:bodyPr lIns="90000" tIns="45000" rIns="90000" bIns="45000" anchor="t">
             <a:spAutoFit/>
           </a:bodyPr>
           <a:p>
-            <a:pPr defTabSz="457200">
-              <a:lnSpc>
-                <a:spcPct val="100000"/>
-              </a:lnSpc>
-            </a:pPr>
-            <a:r>
-              <a:rPr lang="en-US" sz="2600" b="0" u="none" strike="noStrike">
-                <a:solidFill>
-                  <a:srgbClr val="000000"/>
-                </a:solidFill>
-                <a:effectLst/>
-                <a:uFillTx/>
-                <a:latin typeface="Arial"/>
-              </a:rPr>
-              <a:t>Caveats</a:t>
-            </a:r>
-            <a:endParaRPr lang="en-US" sz="2600" b="0" u="none" strike="noStrike">
-              <a:solidFill>
-                <a:srgbClr val="000000"/>
-              </a:solidFill>
-              <a:effectLst/>
-              <a:uFillTx/>
-              <a:latin typeface="Arial"/>
-            </a:endParaRPr>
-          </a:p>
-          <a:p>
-            <a:pPr defTabSz="457200">
-              <a:lnSpc>
-                <a:spcPct val="100000"/>
-              </a:lnSpc>
-            </a:pPr>
-            <a:endParaRPr lang="en-US" sz="2000" b="0" u="none" strike="noStrike">
-              <a:solidFill>
-                <a:srgbClr val="000000"/>
-              </a:solidFill>
-              <a:effectLst/>
-              <a:uFillTx/>
-              <a:latin typeface="Arial"/>
-            </a:endParaRPr>
-          </a:p>
-          <a:p>
-            <a:pPr defTabSz="457200">
-              <a:lnSpc>
-                <a:spcPct val="100000"/>
-              </a:lnSpc>
-            </a:pPr>
-            <a:r>
-              <a:rPr lang="en-US" sz="2000" b="0" u="none" strike="noStrike">
-                <a:solidFill>
-                  <a:srgbClr val="000000"/>
-                </a:solidFill>
-                <a:effectLst/>
-                <a:uFillTx/>
-                <a:latin typeface="Arial"/>
-              </a:rPr>
-              <a:t>Most of these outputs are inference, not measurement</a:t>
-            </a:r>
-            <a:endParaRPr lang="en-US" sz="2000" b="0" u="none" strike="noStrike">
-              <a:solidFill>
-                <a:srgbClr val="000000"/>
-              </a:solidFill>
-              <a:effectLst/>
-              <a:uFillTx/>
-              <a:latin typeface="Arial"/>
-            </a:endParaRPr>
-          </a:p>
-          <a:p>
-            <a:pPr defTabSz="457200">
-              <a:lnSpc>
-                <a:spcPct val="100000"/>
-              </a:lnSpc>
-            </a:pPr>
-            <a:endParaRPr lang="en-US" sz="2000" b="0" u="none" strike="noStrike">
-              <a:solidFill>
-                <a:srgbClr val="000000"/>
-              </a:solidFill>
-              <a:effectLst/>
-              <a:uFillTx/>
-              <a:latin typeface="Arial"/>
-            </a:endParaRPr>
-          </a:p>
-          <a:p>
-            <a:pPr defTabSz="457200">
-              <a:lnSpc>
-                <a:spcPct val="100000"/>
-              </a:lnSpc>
-            </a:pPr>
-            <a:r>
-              <a:rPr lang="en-US" sz="2000" b="0" u="none" strike="noStrike">
-                <a:solidFill>
-                  <a:srgbClr val="000000"/>
-                </a:solidFill>
-                <a:effectLst/>
-                <a:uFillTx/>
-                <a:latin typeface="Arial"/>
-              </a:rPr>
-              <a:t>Cluster resolution is a choice you made, and the number of cell types moves with it</a:t>
-            </a:r>
-            <a:endParaRPr lang="en-US" sz="2000" b="0" u="none" strike="noStrike">
-              <a:solidFill>
-                <a:srgbClr val="000000"/>
-              </a:solidFill>
-              <a:effectLst/>
-              <a:uFillTx/>
-              <a:latin typeface="Arial"/>
-            </a:endParaRPr>
-          </a:p>
-          <a:p>
-            <a:pPr defTabSz="457200">
-              <a:lnSpc>
-                <a:spcPct val="100000"/>
-              </a:lnSpc>
-            </a:pPr>
-            <a:endParaRPr lang="en-US" sz="2000" b="0" u="none" strike="noStrike">
-              <a:solidFill>
-                <a:srgbClr val="000000"/>
-              </a:solidFill>
-              <a:effectLst/>
-              <a:uFillTx/>
-              <a:latin typeface="Arial"/>
-            </a:endParaRPr>
-          </a:p>
-          <a:p>
-            <a:pPr defTabSz="457200">
-              <a:lnSpc>
-                <a:spcPct val="100000"/>
-              </a:lnSpc>
-            </a:pPr>
-            <a:r>
-              <a:rPr lang="en-US" sz="2000" b="0" u="none" strike="noStrike">
-                <a:solidFill>
-                  <a:srgbClr val="000000"/>
-                </a:solidFill>
-                <a:effectLst/>
-                <a:uFillTx/>
-                <a:latin typeface="Arial"/>
-              </a:rPr>
-              <a:t>Cell-cell interaction is a prediction from co-expression</a:t>
-            </a:r>
-            <a:endParaRPr lang="en-US" sz="2000" b="0" u="none" strike="noStrike">
-              <a:solidFill>
-                <a:srgbClr val="000000"/>
-              </a:solidFill>
-              <a:effectLst/>
-              <a:uFillTx/>
-              <a:latin typeface="Arial"/>
-            </a:endParaRPr>
-          </a:p>
-          <a:p>
-            <a:pPr defTabSz="457200">
-              <a:lnSpc>
-                <a:spcPct val="100000"/>
-              </a:lnSpc>
-            </a:pPr>
-            <a:endParaRPr lang="en-US" sz="2000" b="0" u="none" strike="noStrike">
-              <a:solidFill>
-                <a:srgbClr val="000000"/>
-              </a:solidFill>
-              <a:effectLst/>
-              <a:uFillTx/>
-              <a:latin typeface="Arial"/>
-            </a:endParaRPr>
-          </a:p>
-          <a:p>
-            <a:pPr defTabSz="457200">
-              <a:lnSpc>
-                <a:spcPct val="100000"/>
-              </a:lnSpc>
-            </a:pPr>
-            <a:r>
-              <a:rPr lang="en-US" sz="2000" b="0" u="none" strike="noStrike">
-                <a:solidFill>
-                  <a:srgbClr val="000000"/>
-                </a:solidFill>
-                <a:effectLst/>
-                <a:uFillTx/>
-                <a:latin typeface="Arial"/>
-              </a:rPr>
-              <a:t>Pseudotime is a distance, not a clock</a:t>
-            </a:r>
-            <a:endParaRPr lang="en-US" sz="2000" b="0" u="none" strike="noStrike">
-              <a:solidFill>
-                <a:srgbClr val="000000"/>
-              </a:solidFill>
-              <a:effectLst/>
-              <a:uFillTx/>
-              <a:latin typeface="Arial"/>
-            </a:endParaRPr>
-          </a:p>
-          <a:p>
-            <a:pPr defTabSz="457200">
-              <a:lnSpc>
-                <a:spcPct val="100000"/>
-              </a:lnSpc>
-            </a:pPr>
-            <a:endParaRPr lang="en-US" sz="2000" b="0" u="none" strike="noStrike">
-              <a:solidFill>
-                <a:srgbClr val="000000"/>
-              </a:solidFill>
-              <a:effectLst/>
-              <a:uFillTx/>
-              <a:latin typeface="Arial"/>
-            </a:endParaRPr>
-          </a:p>
-          <a:p>
-            <a:pPr defTabSz="457200">
-              <a:lnSpc>
-                <a:spcPct val="100000"/>
-              </a:lnSpc>
-            </a:pPr>
-            <a:r>
-              <a:rPr lang="en-US" sz="2000" b="0" u="none" strike="noStrike">
-                <a:solidFill>
-                  <a:srgbClr val="000000"/>
-                </a:solidFill>
-                <a:effectLst/>
-                <a:uFillTx/>
-                <a:latin typeface="Arial"/>
-              </a:rPr>
-              <a:t>Segmentation error propagates into every count downstream</a:t>
-            </a:r>
-            <a:endParaRPr lang="en-US" sz="2000" b="0" u="none" strike="noStrike">
-              <a:solidFill>
-                <a:srgbClr val="000000"/>
-              </a:solidFill>
-              <a:effectLst/>
-              <a:uFillTx/>
-              <a:latin typeface="Arial"/>
-            </a:endParaRPr>
-          </a:p>
-          <a:p>
-            <a:pPr defTabSz="457200">
-              <a:lnSpc>
-                <a:spcPct val="100000"/>
-              </a:lnSpc>
-            </a:pPr>
-            <a:endParaRPr lang="en-US" sz="2000" b="0" u="none" strike="noStrike">
-              <a:solidFill>
-                <a:srgbClr val="000000"/>
-              </a:solidFill>
-              <a:effectLst/>
-              <a:uFillTx/>
-              <a:latin typeface="Arial"/>
-            </a:endParaRPr>
-          </a:p>
-          <a:p>
-            <a:pPr defTabSz="457200">
-              <a:lnSpc>
-                <a:spcPct val="100000"/>
-              </a:lnSpc>
-            </a:pPr>
-            <a:r>
-              <a:rPr lang="en-US" sz="2000" b="0" u="none" strike="noStrike">
-                <a:solidFill>
-                  <a:srgbClr val="000000"/>
-                </a:solidFill>
-                <a:effectLst/>
-                <a:uFillTx/>
-                <a:latin typeface="Arial"/>
-              </a:rPr>
-              <a:t>None of this is a reason not to do it. It is a reason to say what you did.</a:t>
-            </a:r>
-            <a:endParaRPr lang="en-US" sz="2000" b="0" u="none" strike="noStrike">
+            <a:r>
+              <a:rPr lang="en-US" sz="2800" b="0" u="none" strike="noStrike">
+                <a:solidFill>
+                  <a:srgbClr val="000000"/>
+                </a:solidFill>
+                <a:effectLst/>
+                <a:uFillTx/>
+                <a:latin typeface="Arial"/>
+              </a:rPr>
+              <a:t>Recap</a:t>
+            </a:r>
+            <a:endParaRPr lang="en-US" sz="2800" b="0" u="none" strike="noStrike">
+              <a:solidFill>
+                <a:srgbClr val="000000"/>
+              </a:solidFill>
+              <a:effectLst/>
+              <a:uFillTx/>
+              <a:latin typeface="Arial"/>
+            </a:endParaRPr>
+          </a:p>
+          <a:p>
+            <a:endParaRPr lang="en-US" sz="1800" b="0" u="none" strike="noStrike">
+              <a:solidFill>
+                <a:srgbClr val="000000"/>
+              </a:solidFill>
+              <a:effectLst/>
+              <a:uFillTx/>
+              <a:latin typeface="Arial"/>
+            </a:endParaRPr>
+          </a:p>
+          <a:p>
+            <a:r>
+              <a:rPr lang="en-US" sz="1800" b="0" u="none" strike="noStrike">
+                <a:solidFill>
+                  <a:srgbClr val="000000"/>
+                </a:solidFill>
+                <a:effectLst/>
+                <a:uFillTx/>
+                <a:latin typeface="Arial"/>
+              </a:rPr>
+              <a:t>Disaggregated and spatial technologies</a:t>
+            </a:r>
+            <a:endParaRPr lang="en-US" sz="1800" b="0" u="none" strike="noStrike">
+              <a:solidFill>
+                <a:srgbClr val="000000"/>
+              </a:solidFill>
+              <a:effectLst/>
+              <a:uFillTx/>
+              <a:latin typeface="Arial"/>
+            </a:endParaRPr>
+          </a:p>
+          <a:p>
+            <a:endParaRPr lang="en-US" sz="1800" b="0" u="none" strike="noStrike">
+              <a:solidFill>
+                <a:srgbClr val="000000"/>
+              </a:solidFill>
+              <a:effectLst/>
+              <a:uFillTx/>
+              <a:latin typeface="Arial"/>
+            </a:endParaRPr>
+          </a:p>
+          <a:p>
+            <a:r>
+              <a:rPr lang="en-US" sz="1800" b="0" u="none" strike="noStrike">
+                <a:solidFill>
+                  <a:srgbClr val="000000"/>
+                </a:solidFill>
+                <a:effectLst/>
+                <a:uFillTx/>
+                <a:latin typeface="Arial"/>
+              </a:rPr>
+              <a:t>Disaggregated much cheaper / more widely used / less data intensive / downstream analysis more widely understood</a:t>
+            </a:r>
+            <a:endParaRPr lang="en-US" sz="1800" b="0" u="none" strike="noStrike">
+              <a:solidFill>
+                <a:srgbClr val="000000"/>
+              </a:solidFill>
+              <a:effectLst/>
+              <a:uFillTx/>
+              <a:latin typeface="Arial"/>
+            </a:endParaRPr>
+          </a:p>
+          <a:p>
+            <a:endParaRPr lang="en-US" sz="1800" b="0" u="none" strike="noStrike">
+              <a:solidFill>
+                <a:srgbClr val="000000"/>
+              </a:solidFill>
+              <a:effectLst/>
+              <a:uFillTx/>
+              <a:latin typeface="Arial"/>
+            </a:endParaRPr>
+          </a:p>
+          <a:p>
+            <a:r>
+              <a:rPr lang="en-US" sz="1800" b="0" u="none" strike="noStrike">
+                <a:solidFill>
+                  <a:srgbClr val="000000"/>
+                </a:solidFill>
+                <a:effectLst/>
+                <a:uFillTx/>
+                <a:latin typeface="Arial"/>
+              </a:rPr>
+              <a:t>Spatial, more expensive, requires more data handling computing power / more specialized / increasingly more Python packages (versus R packages).</a:t>
+            </a:r>
+            <a:endParaRPr lang="en-US" sz="1800" b="0" u="none" strike="noStrike">
+              <a:solidFill>
+                <a:srgbClr val="000000"/>
+              </a:solidFill>
+              <a:effectLst/>
+              <a:uFillTx/>
+              <a:latin typeface="Arial"/>
+            </a:endParaRPr>
+          </a:p>
+          <a:p>
+            <a:endParaRPr lang="en-US" sz="1800" b="0" u="none" strike="noStrike">
+              <a:solidFill>
+                <a:srgbClr val="000000"/>
+              </a:solidFill>
+              <a:effectLst/>
+              <a:uFillTx/>
+              <a:latin typeface="Arial"/>
+            </a:endParaRPr>
+          </a:p>
+          <a:p>
+            <a:r>
+              <a:rPr lang="en-US" sz="1800" b="0" u="none" strike="noStrike">
+                <a:solidFill>
+                  <a:srgbClr val="000000"/>
+                </a:solidFill>
+                <a:effectLst/>
+                <a:uFillTx/>
+                <a:latin typeface="Arial"/>
+              </a:rPr>
+              <a:t>There are now many “single cell atlases” of different tissues.  These serve as a point of reference for new experiments</a:t>
+            </a:r>
+            <a:endParaRPr lang="en-US" sz="1800" b="0" u="none" strike="noStrike">
+              <a:solidFill>
+                <a:srgbClr val="000000"/>
+              </a:solidFill>
+              <a:effectLst/>
+              <a:uFillTx/>
+              <a:latin typeface="Arial"/>
+            </a:endParaRPr>
+          </a:p>
+          <a:p>
+            <a:endParaRPr lang="en-US" sz="1800" b="0" u="none" strike="noStrike">
+              <a:solidFill>
+                <a:srgbClr val="000000"/>
+              </a:solidFill>
+              <a:effectLst/>
+              <a:uFillTx/>
+              <a:latin typeface="Arial"/>
+            </a:endParaRPr>
+          </a:p>
+          <a:p>
+            <a:endParaRPr lang="en-US" sz="1800" b="0" u="none" strike="noStrike">
+              <a:solidFill>
+                <a:srgbClr val="000000"/>
+              </a:solidFill>
+              <a:effectLst/>
+              <a:uFillTx/>
+              <a:latin typeface="Arial"/>
+            </a:endParaRPr>
+          </a:p>
+          <a:p>
+            <a:endParaRPr lang="en-US" sz="1800" b="0" u="none" strike="noStrike">
               <a:solidFill>
                 <a:srgbClr val="000000"/>
               </a:solidFill>
@@ -13470,14 +13811,14 @@
       </p:grpSpPr>
       <p:sp>
         <p:nvSpPr>
-          <p:cNvPr id="104" name="TextBox 1"/>
-          <p:cNvSpPr/>
+          <p:cNvPr id="106" name=""/>
+          <p:cNvSpPr txBox="1"/>
           <p:nvPr/>
         </p:nvSpPr>
         <p:spPr>
           <a:xfrm>
-            <a:off x="961560" y="1272600"/>
-            <a:ext cx="9555480" cy="4109760"/>
+            <a:off x="1828800" y="2057400"/>
+            <a:ext cx="8686800" cy="3200400"/>
           </a:xfrm>
           <a:prstGeom prst="rect">
             <a:avLst/>
@@ -13487,157 +13828,24 @@
             <a:noFill/>
           </a:ln>
         </p:spPr>
-        <p:style>
-          <a:lnRef idx="0"/>
-          <a:fillRef idx="0"/>
-          <a:effectRef idx="0"/>
-          <a:fontRef idx="minor"/>
-        </p:style>
         <p:txBody>
-          <a:bodyPr lIns="90000" tIns="45000" rIns="90000" bIns="45000" anchor="t">
+          <a:bodyPr lIns="90000" tIns="45000" rIns="90000" bIns="45000" anchor="t" anchorCtr="1">
             <a:spAutoFit/>
           </a:bodyPr>
           <a:p>
-            <a:pPr defTabSz="457200">
-              <a:lnSpc>
-                <a:spcPct val="100000"/>
-              </a:lnSpc>
-            </a:pPr>
-            <a:r>
-              <a:rPr lang="en-US" sz="1600" b="0" u="none" strike="noStrike">
-                <a:solidFill>
-                  <a:srgbClr val="000000"/>
-                </a:solidFill>
-                <a:effectLst/>
-                <a:uFillTx/>
-                <a:latin typeface="Arial"/>
-              </a:rPr>
-              <a:t>References: analysis and best practice</a:t>
-            </a:r>
-            <a:endParaRPr lang="en-US" sz="1600" b="0" u="none" strike="noStrike">
-              <a:solidFill>
-                <a:srgbClr val="000000"/>
-              </a:solidFill>
-              <a:effectLst/>
-              <a:uFillTx/>
-              <a:latin typeface="Arial"/>
-            </a:endParaRPr>
-          </a:p>
-          <a:p>
-            <a:pPr defTabSz="457200">
-              <a:lnSpc>
-                <a:spcPct val="100000"/>
-              </a:lnSpc>
-            </a:pPr>
-            <a:endParaRPr lang="en-US" sz="1600" b="0" u="none" strike="noStrike">
-              <a:solidFill>
-                <a:srgbClr val="000000"/>
-              </a:solidFill>
-              <a:effectLst/>
-              <a:uFillTx/>
-              <a:latin typeface="Arial"/>
-            </a:endParaRPr>
-          </a:p>
-          <a:p>
-            <a:pPr defTabSz="457200">
-              <a:lnSpc>
-                <a:spcPct val="100000"/>
-              </a:lnSpc>
-            </a:pPr>
-            <a:r>
-              <a:rPr lang="en-US" sz="1600" b="0" u="none" strike="noStrike">
-                <a:solidFill>
-                  <a:srgbClr val="000000"/>
-                </a:solidFill>
-                <a:effectLst/>
-                <a:uFillTx/>
-                <a:latin typeface="Arial"/>
-              </a:rPr>
-              <a:t>Luecken and Theis 2019, Current best practices in single-cell RNA-seq analysis: a tutorial, Molecular Systems Biology 15(6):e8746. https://doi.org/10.15252/msb.20188746</a:t>
-            </a:r>
-            <a:endParaRPr lang="en-US" sz="1600" b="0" u="none" strike="noStrike">
-              <a:solidFill>
-                <a:srgbClr val="000000"/>
-              </a:solidFill>
-              <a:effectLst/>
-              <a:uFillTx/>
-              <a:latin typeface="Arial"/>
-            </a:endParaRPr>
-          </a:p>
-          <a:p>
-            <a:pPr defTabSz="457200">
-              <a:lnSpc>
-                <a:spcPct val="100000"/>
-              </a:lnSpc>
-            </a:pPr>
-            <a:endParaRPr lang="en-US" sz="1600" b="0" u="none" strike="noStrike">
-              <a:solidFill>
-                <a:srgbClr val="000000"/>
-              </a:solidFill>
-              <a:effectLst/>
-              <a:uFillTx/>
-              <a:latin typeface="Arial"/>
-            </a:endParaRPr>
-          </a:p>
-          <a:p>
-            <a:pPr defTabSz="457200">
-              <a:lnSpc>
-                <a:spcPct val="100000"/>
-              </a:lnSpc>
-            </a:pPr>
-            <a:r>
-              <a:rPr lang="en-US" sz="1600" b="0" u="none" strike="noStrike">
-                <a:solidFill>
-                  <a:srgbClr val="000000"/>
-                </a:solidFill>
-                <a:effectLst/>
-                <a:uFillTx/>
-                <a:latin typeface="Arial"/>
-              </a:rPr>
-              <a:t>Heumos et al. 2023, Best practices for single-cell analysis across modalities, Nature Reviews Genetics 24(8):550-572. https://doi.org/10.1038/s41576-023-00586-w</a:t>
-            </a:r>
-            <a:endParaRPr lang="en-US" sz="1600" b="0" u="none" strike="noStrike">
-              <a:solidFill>
-                <a:srgbClr val="000000"/>
-              </a:solidFill>
-              <a:effectLst/>
-              <a:uFillTx/>
-              <a:latin typeface="Arial"/>
-            </a:endParaRPr>
-          </a:p>
-          <a:p>
-            <a:pPr defTabSz="457200">
-              <a:lnSpc>
-                <a:spcPct val="100000"/>
-              </a:lnSpc>
-            </a:pPr>
-            <a:endParaRPr lang="en-US" sz="1600" b="0" u="none" strike="noStrike">
-              <a:solidFill>
-                <a:srgbClr val="000000"/>
-              </a:solidFill>
-              <a:effectLst/>
-              <a:uFillTx/>
-              <a:latin typeface="Arial"/>
-            </a:endParaRPr>
-          </a:p>
-          <a:p>
-            <a:pPr defTabSz="457200">
-              <a:lnSpc>
-                <a:spcPct val="100000"/>
-              </a:lnSpc>
-            </a:pPr>
-            <a:r>
-              <a:rPr lang="en-US" sz="1600" b="0" u="none" strike="noStrike">
-                <a:solidFill>
-                  <a:srgbClr val="000000"/>
-                </a:solidFill>
-                <a:effectLst/>
-                <a:uFillTx/>
-                <a:latin typeface="Arial"/>
-              </a:rPr>
-              <a:t>Zappia and Theis 2021, Over 1000 tools reveal trends in the single-cell RNA-seq analysis landscape, Genome Biology 22:301. https://doi.org/10.1186/s13059-021-02519-4</a:t>
-            </a:r>
-            <a:endParaRPr lang="en-US" sz="1600" b="0" u="none" strike="noStrike">
+            <a:pPr algn="ctr"/>
+            <a:r>
+              <a:rPr lang="en-US" sz="3000" b="0" u="none" strike="noStrike">
+                <a:solidFill>
+                  <a:srgbClr val="000000"/>
+                </a:solidFill>
+                <a:effectLst/>
+                <a:uFillTx/>
+                <a:latin typeface="Arial"/>
+              </a:rPr>
+              <a:t>Questions? Comments?</a:t>
+            </a:r>
+            <a:endParaRPr lang="en-US" sz="3000" b="0" u="none" strike="noStrike">
               <a:solidFill>
                 <a:srgbClr val="000000"/>
               </a:solidFill>
@@ -13680,14 +13888,14 @@
       </p:grpSpPr>
       <p:sp>
         <p:nvSpPr>
-          <p:cNvPr id="105" name="TextBox 1"/>
+          <p:cNvPr id="107" name="TextBox 1"/>
           <p:cNvSpPr/>
           <p:nvPr/>
         </p:nvSpPr>
         <p:spPr>
           <a:xfrm>
             <a:off x="961560" y="1272600"/>
-            <a:ext cx="9555480" cy="4109760"/>
+            <a:ext cx="9555120" cy="4109400"/>
           </a:xfrm>
           <a:prstGeom prst="rect">
             <a:avLst/>
@@ -13722,7 +13930,7 @@
                 <a:uFillTx/>
                 <a:latin typeface="Arial"/>
               </a:rPr>
-              <a:t>References: technologies</a:t>
+              <a:t>References: analysis and best practice</a:t>
             </a:r>
             <a:endParaRPr lang="en-US" sz="1600" b="0" u="none" strike="noStrike">
               <a:solidFill>
@@ -13763,7 +13971,7 @@
                 <a:uFillTx/>
                 <a:latin typeface="Arial"/>
               </a:rPr>
-              <a:t>Moses and Pachter 2022, Museum of spatial transcriptomics, Nature Methods 19(5):534-546. https://doi.org/10.1038/s41592-022-01409-2</a:t>
+              <a:t>Luecken and Theis 2019, Current best practices in single-cell RNA-seq analysis: a tutorial, Molecular Systems Biology 15(6):e8746. https://doi.org/10.15252/msb.20188746</a:t>
             </a:r>
             <a:endParaRPr lang="en-US" sz="1600" b="0" u="none" strike="noStrike">
               <a:solidFill>
@@ -13804,7 +14012,7 @@
                 <a:uFillTx/>
                 <a:latin typeface="Arial"/>
               </a:rPr>
-              <a:t>Palla et al. 2022, Spatial components of molecular tissue biology, Nature Biotechnology 40(3):308-318. https://doi.org/10.1038/s41587-021-01182-1</a:t>
+              <a:t>Heumos et al. 2023, Best practices for single-cell analysis across modalities, Nature Reviews Genetics 24(8):550-572. https://doi.org/10.1038/s41576-023-00586-w</a:t>
             </a:r>
             <a:endParaRPr lang="en-US" sz="1600" b="0" u="none" strike="noStrike">
               <a:solidFill>
@@ -13845,48 +14053,7 @@
                 <a:uFillTx/>
                 <a:latin typeface="Arial"/>
               </a:rPr>
-              <a:t>Dixit et al. 2016, Perturb-Seq: Dissecting Molecular Circuits with Scalable Single-Cell RNA Profiling of Pooled Genetic Screens, Cell 167(7):1853-1866.e17. https://doi.org/10.1016/j.cell.2016.11.038</a:t>
-            </a:r>
-            <a:endParaRPr lang="en-US" sz="1600" b="0" u="none" strike="noStrike">
-              <a:solidFill>
-                <a:srgbClr val="000000"/>
-              </a:solidFill>
-              <a:effectLst/>
-              <a:uFillTx/>
-              <a:latin typeface="Arial"/>
-            </a:endParaRPr>
-          </a:p>
-          <a:p>
-            <a:pPr defTabSz="457200">
-              <a:lnSpc>
-                <a:spcPct val="100000"/>
-              </a:lnSpc>
-            </a:pPr>
-            <a:endParaRPr lang="en-US" sz="1600" b="0" u="none" strike="noStrike">
-              <a:solidFill>
-                <a:srgbClr val="000000"/>
-              </a:solidFill>
-              <a:effectLst/>
-              <a:uFillTx/>
-              <a:latin typeface="Arial"/>
-            </a:endParaRPr>
-          </a:p>
-          <a:p>
-            <a:pPr defTabSz="457200">
-              <a:lnSpc>
-                <a:spcPct val="100000"/>
-              </a:lnSpc>
-            </a:pPr>
-            <a:r>
-              <a:rPr lang="en-US" sz="1600" b="0" u="none" strike="noStrike">
-                <a:solidFill>
-                  <a:srgbClr val="000000"/>
-                </a:solidFill>
-                <a:effectLst/>
-                <a:uFillTx/>
-                <a:latin typeface="Arial"/>
-              </a:rPr>
-              <a:t>Replogle et al. 2022, Mapping information-rich genotype-phenotype landscapes with genome-scale Perturb-seq, Cell 185(14):2559-2575.e28. https://doi.org/10.1016/j.cell.2022.05.013</a:t>
+              <a:t>Zappia and Theis 2021, Over 1000 tools reveal trends in the single-cell RNA-seq analysis landscape, Genome Biology 22:301. https://doi.org/10.1186/s13059-021-02519-4</a:t>
             </a:r>
             <a:endParaRPr lang="en-US" sz="1600" b="0" u="none" strike="noStrike">
               <a:solidFill>
@@ -13931,14 +14098,14 @@
       </p:grpSpPr>
       <p:sp>
         <p:nvSpPr>
-          <p:cNvPr id="66" name="TextBox 1"/>
+          <p:cNvPr id="68" name="TextBox 1"/>
           <p:cNvSpPr/>
           <p:nvPr/>
         </p:nvSpPr>
         <p:spPr>
           <a:xfrm>
             <a:off x="718920" y="777600"/>
-            <a:ext cx="10025280" cy="2225160"/>
+            <a:ext cx="10024920" cy="2224440"/>
           </a:xfrm>
           <a:prstGeom prst="rect">
             <a:avLst/>
@@ -14069,6 +14236,257 @@
               <a:t>   - Spatial </a:t>
             </a:r>
             <a:endParaRPr lang="en-US" sz="2800" b="0" u="none" strike="noStrike">
+              <a:solidFill>
+                <a:srgbClr val="000000"/>
+              </a:solidFill>
+              <a:effectLst/>
+              <a:uFillTx/>
+              <a:latin typeface="Arial"/>
+            </a:endParaRPr>
+          </a:p>
+        </p:txBody>
+      </p:sp>
+    </p:spTree>
+  </p:cSld>
+  <mc:AlternateContent>
+    <mc:Choice Requires="p14">
+      <p:transition spd="slow" p14:dur="2000"/>
+    </mc:Choice>
+    <mc:Fallback>
+      <p:transition spd="slow"/>
+    </mc:Fallback>
+  </mc:AlternateContent>
+</p:sld>
+</file>
+
+<file path=ppt/slides/slide30.xml><?xml version="1.0" encoding="utf-8"?>
+<p:sld xmlns:a="http://schemas.openxmlformats.org/drawingml/2006/main" xmlns:p="http://schemas.openxmlformats.org/presentationml/2006/main" xmlns:r="http://schemas.openxmlformats.org/officeDocument/2006/relationships" xmlns:p14="http://schemas.microsoft.com/office/powerpoint/2010/main" xmlns:p15="http://schemas.microsoft.com/office/powerpoint/2012/main" xmlns:mc="http://schemas.openxmlformats.org/markup-compatibility/2006">
+  <p:cSld>
+    <p:spTree>
+      <p:nvGrpSpPr>
+        <p:cNvPr id="1" name=""/>
+        <p:cNvGrpSpPr/>
+        <p:nvPr/>
+      </p:nvGrpSpPr>
+      <p:grpSpPr>
+        <a:xfrm>
+          <a:off x="0" y="0"/>
+          <a:ext cx="0" cy="0"/>
+          <a:chOff x="0" y="0"/>
+          <a:chExt cx="0" cy="0"/>
+        </a:xfrm>
+      </p:grpSpPr>
+      <p:sp>
+        <p:nvSpPr>
+          <p:cNvPr id="108" name="TextBox 1"/>
+          <p:cNvSpPr/>
+          <p:nvPr/>
+        </p:nvSpPr>
+        <p:spPr>
+          <a:xfrm>
+            <a:off x="961560" y="1272600"/>
+            <a:ext cx="9555120" cy="4109400"/>
+          </a:xfrm>
+          <a:prstGeom prst="rect">
+            <a:avLst/>
+          </a:prstGeom>
+          <a:noFill/>
+          <a:ln w="0">
+            <a:noFill/>
+          </a:ln>
+        </p:spPr>
+        <p:style>
+          <a:lnRef idx="0"/>
+          <a:fillRef idx="0"/>
+          <a:effectRef idx="0"/>
+          <a:fontRef idx="minor"/>
+        </p:style>
+        <p:txBody>
+          <a:bodyPr lIns="90000" tIns="45000" rIns="90000" bIns="45000" anchor="t">
+            <a:spAutoFit/>
+          </a:bodyPr>
+          <a:p>
+            <a:pPr defTabSz="457200">
+              <a:lnSpc>
+                <a:spcPct val="100000"/>
+              </a:lnSpc>
+            </a:pPr>
+            <a:r>
+              <a:rPr lang="en-US" sz="1600" b="0" u="none" strike="noStrike">
+                <a:solidFill>
+                  <a:srgbClr val="000000"/>
+                </a:solidFill>
+                <a:effectLst/>
+                <a:uFillTx/>
+                <a:latin typeface="Arial"/>
+              </a:rPr>
+              <a:t>References: technologies</a:t>
+            </a:r>
+            <a:endParaRPr lang="en-US" sz="1600" b="0" u="none" strike="noStrike">
+              <a:solidFill>
+                <a:srgbClr val="000000"/>
+              </a:solidFill>
+              <a:effectLst/>
+              <a:uFillTx/>
+              <a:latin typeface="Arial"/>
+            </a:endParaRPr>
+          </a:p>
+          <a:p>
+            <a:pPr defTabSz="457200">
+              <a:lnSpc>
+                <a:spcPct val="100000"/>
+              </a:lnSpc>
+            </a:pPr>
+            <a:endParaRPr lang="en-US" sz="1600" b="0" u="none" strike="noStrike">
+              <a:solidFill>
+                <a:srgbClr val="000000"/>
+              </a:solidFill>
+              <a:effectLst/>
+              <a:uFillTx/>
+              <a:latin typeface="Arial"/>
+            </a:endParaRPr>
+          </a:p>
+          <a:p>
+            <a:pPr defTabSz="457200">
+              <a:lnSpc>
+                <a:spcPct val="100000"/>
+              </a:lnSpc>
+            </a:pPr>
+            <a:r>
+              <a:rPr lang="en-US" sz="1600" b="0" u="none" strike="noStrike">
+                <a:solidFill>
+                  <a:srgbClr val="000000"/>
+                </a:solidFill>
+                <a:effectLst/>
+                <a:uFillTx/>
+                <a:latin typeface="Arial"/>
+              </a:rPr>
+              <a:t>Moses and Pachter 2022, Museum of spatial transcriptomics, Nature Methods 19(5):534-546. https://doi.org/10.1038/s41592-022-01409-2</a:t>
+            </a:r>
+            <a:endParaRPr lang="en-US" sz="1600" b="0" u="none" strike="noStrike">
+              <a:solidFill>
+                <a:srgbClr val="000000"/>
+              </a:solidFill>
+              <a:effectLst/>
+              <a:uFillTx/>
+              <a:latin typeface="Arial"/>
+            </a:endParaRPr>
+          </a:p>
+          <a:p>
+            <a:pPr defTabSz="457200">
+              <a:lnSpc>
+                <a:spcPct val="100000"/>
+              </a:lnSpc>
+            </a:pPr>
+            <a:endParaRPr lang="en-US" sz="1600" b="0" u="none" strike="noStrike">
+              <a:solidFill>
+                <a:srgbClr val="000000"/>
+              </a:solidFill>
+              <a:effectLst/>
+              <a:uFillTx/>
+              <a:latin typeface="Arial"/>
+            </a:endParaRPr>
+          </a:p>
+          <a:p>
+            <a:pPr defTabSz="457200">
+              <a:lnSpc>
+                <a:spcPct val="100000"/>
+              </a:lnSpc>
+            </a:pPr>
+            <a:r>
+              <a:rPr lang="en-US" sz="1600" b="0" u="none" strike="noStrike">
+                <a:solidFill>
+                  <a:srgbClr val="000000"/>
+                </a:solidFill>
+                <a:effectLst/>
+                <a:uFillTx/>
+                <a:latin typeface="Arial"/>
+              </a:rPr>
+              <a:t>Palla et al. 2022, Spatial components of molecular tissue biology, Nature Biotechnology 40(3):308-318. https://doi.org/10.1038/s41587-021-01182-1</a:t>
+            </a:r>
+            <a:endParaRPr lang="en-US" sz="1600" b="0" u="none" strike="noStrike">
+              <a:solidFill>
+                <a:srgbClr val="000000"/>
+              </a:solidFill>
+              <a:effectLst/>
+              <a:uFillTx/>
+              <a:latin typeface="Arial"/>
+            </a:endParaRPr>
+          </a:p>
+          <a:p>
+            <a:pPr defTabSz="457200">
+              <a:lnSpc>
+                <a:spcPct val="100000"/>
+              </a:lnSpc>
+            </a:pPr>
+            <a:endParaRPr lang="en-US" sz="1600" b="0" u="none" strike="noStrike">
+              <a:solidFill>
+                <a:srgbClr val="000000"/>
+              </a:solidFill>
+              <a:effectLst/>
+              <a:uFillTx/>
+              <a:latin typeface="Arial"/>
+            </a:endParaRPr>
+          </a:p>
+          <a:p>
+            <a:pPr defTabSz="457200">
+              <a:lnSpc>
+                <a:spcPct val="100000"/>
+              </a:lnSpc>
+            </a:pPr>
+            <a:r>
+              <a:rPr lang="en-US" sz="1600" b="0" u="none" strike="noStrike">
+                <a:solidFill>
+                  <a:srgbClr val="000000"/>
+                </a:solidFill>
+                <a:effectLst/>
+                <a:uFillTx/>
+                <a:latin typeface="Arial"/>
+              </a:rPr>
+              <a:t>Dixit et al. 2016, Perturb-Seq: Dissecting Molecular Circuits with Scalable Single-Cell RNA Profiling of Pooled Genetic Screens, Cell 167(7):1853-1866.e17. https://doi.org/10.1016/j.cell.2016.11.038</a:t>
+            </a:r>
+            <a:endParaRPr lang="en-US" sz="1600" b="0" u="none" strike="noStrike">
+              <a:solidFill>
+                <a:srgbClr val="000000"/>
+              </a:solidFill>
+              <a:effectLst/>
+              <a:uFillTx/>
+              <a:latin typeface="Arial"/>
+            </a:endParaRPr>
+          </a:p>
+          <a:p>
+            <a:pPr defTabSz="457200">
+              <a:lnSpc>
+                <a:spcPct val="100000"/>
+              </a:lnSpc>
+            </a:pPr>
+            <a:endParaRPr lang="en-US" sz="1600" b="0" u="none" strike="noStrike">
+              <a:solidFill>
+                <a:srgbClr val="000000"/>
+              </a:solidFill>
+              <a:effectLst/>
+              <a:uFillTx/>
+              <a:latin typeface="Arial"/>
+            </a:endParaRPr>
+          </a:p>
+          <a:p>
+            <a:pPr defTabSz="457200">
+              <a:lnSpc>
+                <a:spcPct val="100000"/>
+              </a:lnSpc>
+            </a:pPr>
+            <a:r>
+              <a:rPr lang="en-US" sz="1600" b="0" u="none" strike="noStrike">
+                <a:solidFill>
+                  <a:srgbClr val="000000"/>
+                </a:solidFill>
+                <a:effectLst/>
+                <a:uFillTx/>
+                <a:latin typeface="Arial"/>
+              </a:rPr>
+              <a:t>Replogle et al. 2022, Mapping information-rich genotype-phenotype landscapes with genome-scale Perturb-seq, Cell 185(14):2559-2575.e28. https://doi.org/10.1016/j.cell.2022.05.013</a:t>
+            </a:r>
+            <a:endParaRPr lang="en-US" sz="1600" b="0" u="none" strike="noStrike">
               <a:solidFill>
                 <a:srgbClr val="000000"/>
               </a:solidFill>
@@ -14111,14 +14529,14 @@
       </p:grpSpPr>
       <p:sp>
         <p:nvSpPr>
-          <p:cNvPr id="67" name="TextBox 5"/>
+          <p:cNvPr id="69" name="TextBox 5"/>
           <p:cNvSpPr/>
           <p:nvPr/>
         </p:nvSpPr>
         <p:spPr>
           <a:xfrm>
             <a:off x="914400" y="320760"/>
-            <a:ext cx="9555480" cy="3535560"/>
+            <a:ext cx="9555120" cy="3534840"/>
           </a:xfrm>
           <a:prstGeom prst="rect">
             <a:avLst/>
@@ -14392,14 +14810,14 @@
       </p:grpSpPr>
       <p:sp>
         <p:nvSpPr>
-          <p:cNvPr id="68" name="TextBox 1"/>
+          <p:cNvPr id="70" name="TextBox 1"/>
           <p:cNvSpPr/>
           <p:nvPr/>
         </p:nvSpPr>
         <p:spPr>
           <a:xfrm>
             <a:off x="914400" y="320760"/>
-            <a:ext cx="9555480" cy="4450320"/>
+            <a:ext cx="9555120" cy="4449600"/>
           </a:xfrm>
           <a:prstGeom prst="rect">
             <a:avLst/>
@@ -14699,7 +15117,7 @@
       </p:grpSpPr>
       <p:pic>
         <p:nvPicPr>
-          <p:cNvPr id="69" name="Google Shape;169;p32"/>
+          <p:cNvPr id="71" name="Google Shape;169;p32"/>
           <p:cNvPicPr/>
           <p:nvPr/>
         </p:nvPicPr>
@@ -14710,7 +15128,7 @@
         <p:spPr>
           <a:xfrm>
             <a:off x="2529360" y="349200"/>
-            <a:ext cx="7017840" cy="3537000"/>
+            <a:ext cx="7017480" cy="3536640"/>
           </a:xfrm>
           <a:prstGeom prst="rect">
             <a:avLst/>
@@ -14723,14 +15141,14 @@
       </p:pic>
       <p:sp>
         <p:nvSpPr>
-          <p:cNvPr id="70" name="Google Shape;170;p 2"/>
+          <p:cNvPr id="72" name="Google Shape;170;p 2"/>
           <p:cNvSpPr/>
           <p:nvPr/>
         </p:nvSpPr>
         <p:spPr>
           <a:xfrm>
             <a:off x="843120" y="5494680"/>
-            <a:ext cx="10217160" cy="911160"/>
+            <a:ext cx="10216800" cy="910800"/>
           </a:xfrm>
           <a:prstGeom prst="rect">
             <a:avLst/>
@@ -14785,14 +15203,14 @@
       </p:sp>
       <p:sp>
         <p:nvSpPr>
-          <p:cNvPr id="71" name="Google Shape;171;p 2"/>
+          <p:cNvPr id="73" name="Google Shape;171;p 2"/>
           <p:cNvSpPr/>
           <p:nvPr/>
         </p:nvSpPr>
         <p:spPr>
           <a:xfrm>
             <a:off x="734760" y="4278240"/>
-            <a:ext cx="9343440" cy="690120"/>
+            <a:ext cx="9343080" cy="689760"/>
           </a:xfrm>
           <a:prstGeom prst="rect">
             <a:avLst/>
@@ -14847,14 +15265,14 @@
       </p:sp>
       <p:sp>
         <p:nvSpPr>
-          <p:cNvPr id="72" name="Google Shape;172;p 2"/>
+          <p:cNvPr id="74" name="Google Shape;172;p 2"/>
           <p:cNvSpPr/>
           <p:nvPr/>
         </p:nvSpPr>
         <p:spPr>
           <a:xfrm>
             <a:off x="734760" y="3233160"/>
-            <a:ext cx="4934880" cy="690120"/>
+            <a:ext cx="4934520" cy="689760"/>
           </a:xfrm>
           <a:prstGeom prst="rect">
             <a:avLst/>
@@ -14908,14 +15326,14 @@
       </p:sp>
       <p:sp>
         <p:nvSpPr>
-          <p:cNvPr id="73" name=""/>
-          <p:cNvSpPr txBox="1"/>
+          <p:cNvPr id="75" name=""/>
+          <p:cNvSpPr/>
           <p:nvPr/>
         </p:nvSpPr>
         <p:spPr>
           <a:xfrm>
             <a:off x="228600" y="685800"/>
-            <a:ext cx="2300760" cy="1371600"/>
+            <a:ext cx="2300400" cy="1371240"/>
           </a:xfrm>
           <a:prstGeom prst="rect">
             <a:avLst/>
@@ -14925,11 +15343,22 @@
             <a:noFill/>
           </a:ln>
         </p:spPr>
+        <p:style>
+          <a:lnRef idx="0"/>
+          <a:fillRef idx="0"/>
+          <a:effectRef idx="0"/>
+          <a:fontRef idx="minor"/>
+        </p:style>
         <p:txBody>
           <a:bodyPr lIns="90000" tIns="45000" rIns="90000" bIns="45000" anchor="t">
             <a:spAutoFit/>
           </a:bodyPr>
           <a:p>
+            <a:pPr>
+              <a:lnSpc>
+                <a:spcPct val="100000"/>
+              </a:lnSpc>
+            </a:pPr>
             <a:r>
               <a:rPr lang="en-US" sz="2800" b="0" u="none" strike="noStrike">
                 <a:solidFill>
@@ -14984,7 +15413,7 @@
       </p:grpSpPr>
       <p:pic>
         <p:nvPicPr>
-          <p:cNvPr id="74" name="Google Shape;177;p33"/>
+          <p:cNvPr id="76" name="Google Shape;177;p33"/>
           <p:cNvPicPr/>
           <p:nvPr/>
         </p:nvPicPr>
@@ -14995,7 +15424,7 @@
         <p:spPr>
           <a:xfrm>
             <a:off x="-92880" y="75240"/>
-            <a:ext cx="7636680" cy="3167640"/>
+            <a:ext cx="7636320" cy="3167280"/>
           </a:xfrm>
           <a:prstGeom prst="rect">
             <a:avLst/>
@@ -15008,7 +15437,7 @@
       </p:pic>
       <p:pic>
         <p:nvPicPr>
-          <p:cNvPr id="75" name="Google Shape;178;p 2"/>
+          <p:cNvPr id="77" name="Google Shape;178;p 2"/>
           <p:cNvPicPr/>
           <p:nvPr/>
         </p:nvPicPr>
@@ -15019,7 +15448,7 @@
         <p:spPr>
           <a:xfrm>
             <a:off x="6972480" y="3774240"/>
-            <a:ext cx="2448360" cy="3375720"/>
+            <a:ext cx="2448000" cy="3375360"/>
           </a:xfrm>
           <a:prstGeom prst="rect">
             <a:avLst/>
@@ -15032,14 +15461,14 @@
       </p:pic>
       <p:sp>
         <p:nvSpPr>
-          <p:cNvPr id="76" name="Google Shape;179;p 2"/>
+          <p:cNvPr id="78" name="Google Shape;179;p 2"/>
           <p:cNvSpPr/>
           <p:nvPr/>
         </p:nvSpPr>
         <p:spPr>
           <a:xfrm rot="5400000">
-            <a:off x="7820280" y="970200"/>
-            <a:ext cx="997560" cy="885960"/>
+            <a:off x="7820640" y="970200"/>
+            <a:ext cx="997200" cy="885600"/>
           </a:xfrm>
           <a:prstGeom prst="bentArrow">
             <a:avLst>
@@ -15083,7 +15512,7 @@
       </p:sp>
       <p:pic>
         <p:nvPicPr>
-          <p:cNvPr id="77" name="Google Shape;180;p 2"/>
+          <p:cNvPr id="79" name="Google Shape;180;p 2"/>
           <p:cNvPicPr/>
           <p:nvPr/>
         </p:nvPicPr>
@@ -15095,7 +15524,7 @@
         <p:spPr>
           <a:xfrm>
             <a:off x="7543800" y="2057400"/>
-            <a:ext cx="3403080" cy="1928880"/>
+            <a:ext cx="3402720" cy="1928520"/>
           </a:xfrm>
           <a:prstGeom prst="rect">
             <a:avLst/>
@@ -15108,14 +15537,14 @@
       </p:pic>
       <p:sp>
         <p:nvSpPr>
-          <p:cNvPr id="78" name="Google Shape;181;p 2"/>
+          <p:cNvPr id="80" name="Google Shape;181;p 2"/>
           <p:cNvSpPr/>
           <p:nvPr/>
         </p:nvSpPr>
         <p:spPr>
           <a:xfrm>
             <a:off x="9423720" y="4623840"/>
-            <a:ext cx="2535480" cy="791640"/>
+            <a:ext cx="2535120" cy="791280"/>
           </a:xfrm>
           <a:prstGeom prst="rect">
             <a:avLst/>
@@ -15199,14 +15628,14 @@
       </p:grpSpPr>
       <p:sp>
         <p:nvSpPr>
-          <p:cNvPr id="79" name="TextBox 1"/>
+          <p:cNvPr id="81" name="TextBox 1"/>
           <p:cNvSpPr/>
           <p:nvPr/>
         </p:nvSpPr>
         <p:spPr>
           <a:xfrm>
             <a:off x="914400" y="690840"/>
-            <a:ext cx="9555480" cy="4479120"/>
+            <a:ext cx="9555120" cy="4479120"/>
           </a:xfrm>
           <a:prstGeom prst="rect">
             <a:avLst/>
@@ -15539,14 +15968,14 @@
       </p:grpSpPr>
       <p:sp>
         <p:nvSpPr>
-          <p:cNvPr id="80" name="TextBox 1"/>
+          <p:cNvPr id="82" name="TextBox 1"/>
           <p:cNvSpPr/>
           <p:nvPr/>
         </p:nvSpPr>
         <p:spPr>
           <a:xfrm>
             <a:off x="685800" y="457200"/>
-            <a:ext cx="9555480" cy="5456160"/>
+            <a:ext cx="9555120" cy="5456160"/>
           </a:xfrm>
           <a:prstGeom prst="rect">
             <a:avLst/>
